--- a/assets/powerpoints/module-meteo/A2-les-consonnes-qui-tombent.pptx
+++ b/assets/powerpoints/module-meteo/A2-les-consonnes-qui-tombent.pptx
@@ -4649,7 +4649,7 @@
                 </a:solidFill>
                 <a:latin typeface="Verdana"/>
               </a:rPr>
-              <a:t>SÉANCE A2  ·  MODULE 6</a:t>
+              <a:t>SÉANCE A2  ·  MODULE 7</a:t>
             </a:r>
           </a:p>
         </p:txBody>

--- a/assets/powerpoints/module-meteo/A2-les-consonnes-qui-tombent.pptx
+++ b/assets/powerpoints/module-meteo/A2-les-consonnes-qui-tombent.pptx
@@ -21,6 +21,13 @@
     <p:sldId id="269" r:id="rId21"/>
     <p:sldId id="270" r:id="rId22"/>
     <p:sldId id="271" r:id="rId23"/>
+    <p:sldId id="272" r:id="rId24"/>
+    <p:sldId id="273" r:id="rId25"/>
+    <p:sldId id="274" r:id="rId26"/>
+    <p:sldId id="275" r:id="rId27"/>
+    <p:sldId id="276" r:id="rId28"/>
+    <p:sldId id="277" r:id="rId29"/>
+    <p:sldId id="278" r:id="rId30"/>
   </p:sldIdLst>
   <p:sldSz cx="12191695" cy="6858000" type="screen4x3"/>
   <p:notesSz cx="6858000" cy="9144000"/>
@@ -1007,7 +1014,217 @@
           <a:lstStyle/>
           <a:p>
             <a:r>
-              <a:t>Corriger la forme écrite avant tout. C'est elle qui compte dans un cahier ; la forme orale n'est là que pour l'oreille.</a:t>
+              <a:t>Enchaîner « météo, mètres, météo, mètres » lentement. La mâchoire descend sur « è », elle reste haute sur « é ».</a:t>
+            </a:r>
+          </a:p>
+        </p:txBody>
+      </p:sp>
+      <p:sp>
+        <p:nvSpPr>
+          <p:cNvPr id="4" name="Slide Number Placeholder 3"/>
+          <p:cNvSpPr>
+            <a:spLocks noGrp="1"/>
+          </p:cNvSpPr>
+          <p:nvPr>
+            <p:ph type="sldNum" idx="5" sz="quarter"/>
+          </p:nvPr>
+        </p:nvSpPr>
+        <p:spPr/>
+      </p:sp>
+    </p:spTree>
+  </p:cSld>
+  <p:clrMapOvr>
+    <a:masterClrMapping/>
+  </p:clrMapOvr>
+</p:notes>
+</file>
+
+<file path=ppt/notesSlides/notesSlide17.xml><?xml version="1.0" encoding="utf-8"?>
+<p:notes xmlns:a="http://schemas.openxmlformats.org/drawingml/2006/main" xmlns:p="http://schemas.openxmlformats.org/presentationml/2006/main" xmlns:r="http://schemas.openxmlformats.org/officeDocument/2006/relationships">
+  <p:cSld>
+    <p:spTree>
+      <p:nvGrpSpPr>
+        <p:cNvPr id="1" name=""/>
+        <p:cNvGrpSpPr/>
+        <p:nvPr/>
+      </p:nvGrpSpPr>
+      <p:grpSpPr>
+        <a:xfrm>
+          <a:off x="0" y="0"/>
+          <a:ext cx="0" cy="0"/>
+          <a:chOff x="0" y="0"/>
+          <a:chExt cx="0" cy="0"/>
+        </a:xfrm>
+      </p:grpSpPr>
+      <p:sp>
+        <p:nvSpPr>
+          <p:cNvPr id="2" name="Slide Image Placeholder 1"/>
+          <p:cNvSpPr>
+            <a:spLocks noGrp="1"/>
+          </p:cNvSpPr>
+          <p:nvPr>
+            <p:ph type="sldImg" idx="2"/>
+          </p:nvPr>
+        </p:nvSpPr>
+        <p:spPr/>
+      </p:sp>
+      <p:sp>
+        <p:nvSpPr>
+          <p:cNvPr id="3" name="Notes Placeholder 2"/>
+          <p:cNvSpPr>
+            <a:spLocks noGrp="1"/>
+          </p:cNvSpPr>
+          <p:nvPr>
+            <p:ph type="body" idx="3" sz="quarter"/>
+          </p:nvPr>
+        </p:nvSpPr>
+        <p:spPr/>
+        <p:txBody>
+          <a:bodyPr/>
+          <a:lstStyle/>
+          <a:p>
+            <a:r>
+              <a:t>La finale -er des verbes est le cas le plus rentable de la séance : elle vaut pour des centaines de verbes.</a:t>
+            </a:r>
+          </a:p>
+        </p:txBody>
+      </p:sp>
+      <p:sp>
+        <p:nvSpPr>
+          <p:cNvPr id="4" name="Slide Number Placeholder 3"/>
+          <p:cNvSpPr>
+            <a:spLocks noGrp="1"/>
+          </p:cNvSpPr>
+          <p:nvPr>
+            <p:ph type="sldNum" idx="5" sz="quarter"/>
+          </p:nvPr>
+        </p:nvSpPr>
+        <p:spPr/>
+      </p:sp>
+    </p:spTree>
+  </p:cSld>
+  <p:clrMapOvr>
+    <a:masterClrMapping/>
+  </p:clrMapOvr>
+</p:notes>
+</file>
+
+<file path=ppt/notesSlides/notesSlide18.xml><?xml version="1.0" encoding="utf-8"?>
+<p:notes xmlns:a="http://schemas.openxmlformats.org/drawingml/2006/main" xmlns:p="http://schemas.openxmlformats.org/presentationml/2006/main" xmlns:r="http://schemas.openxmlformats.org/officeDocument/2006/relationships">
+  <p:cSld>
+    <p:spTree>
+      <p:nvGrpSpPr>
+        <p:cNvPr id="1" name=""/>
+        <p:cNvGrpSpPr/>
+        <p:nvPr/>
+      </p:nvGrpSpPr>
+      <p:grpSpPr>
+        <a:xfrm>
+          <a:off x="0" y="0"/>
+          <a:ext cx="0" cy="0"/>
+          <a:chOff x="0" y="0"/>
+          <a:chExt cx="0" cy="0"/>
+        </a:xfrm>
+      </p:grpSpPr>
+      <p:sp>
+        <p:nvSpPr>
+          <p:cNvPr id="2" name="Slide Image Placeholder 1"/>
+          <p:cNvSpPr>
+            <a:spLocks noGrp="1"/>
+          </p:cNvSpPr>
+          <p:nvPr>
+            <p:ph type="sldImg" idx="2"/>
+          </p:nvPr>
+        </p:nvSpPr>
+        <p:spPr/>
+      </p:sp>
+      <p:sp>
+        <p:nvSpPr>
+          <p:cNvPr id="3" name="Notes Placeholder 2"/>
+          <p:cNvSpPr>
+            <a:spLocks noGrp="1"/>
+          </p:cNvSpPr>
+          <p:nvPr>
+            <p:ph type="body" idx="3" sz="quarter"/>
+          </p:nvPr>
+        </p:nvSpPr>
+        <p:spPr/>
+        <p:txBody>
+          <a:bodyPr/>
+          <a:lstStyle/>
+          <a:p>
+            <a:r>
+              <a:t>Faire souligner les deux consonnes qui suivent le e dans verglas, personne et averse. La règle devient visuelle.</a:t>
+            </a:r>
+          </a:p>
+        </p:txBody>
+      </p:sp>
+      <p:sp>
+        <p:nvSpPr>
+          <p:cNvPr id="4" name="Slide Number Placeholder 3"/>
+          <p:cNvSpPr>
+            <a:spLocks noGrp="1"/>
+          </p:cNvSpPr>
+          <p:nvPr>
+            <p:ph type="sldNum" idx="5" sz="quarter"/>
+          </p:nvPr>
+        </p:nvSpPr>
+        <p:spPr/>
+      </p:sp>
+    </p:spTree>
+  </p:cSld>
+  <p:clrMapOvr>
+    <a:masterClrMapping/>
+  </p:clrMapOvr>
+</p:notes>
+</file>
+
+<file path=ppt/notesSlides/notesSlide19.xml><?xml version="1.0" encoding="utf-8"?>
+<p:notes xmlns:a="http://schemas.openxmlformats.org/drawingml/2006/main" xmlns:p="http://schemas.openxmlformats.org/presentationml/2006/main" xmlns:r="http://schemas.openxmlformats.org/officeDocument/2006/relationships">
+  <p:cSld>
+    <p:spTree>
+      <p:nvGrpSpPr>
+        <p:cNvPr id="1" name=""/>
+        <p:cNvGrpSpPr/>
+        <p:nvPr/>
+      </p:nvGrpSpPr>
+      <p:grpSpPr>
+        <a:xfrm>
+          <a:off x="0" y="0"/>
+          <a:ext cx="0" cy="0"/>
+          <a:chOff x="0" y="0"/>
+          <a:chExt cx="0" cy="0"/>
+        </a:xfrm>
+      </p:grpSpPr>
+      <p:sp>
+        <p:nvSpPr>
+          <p:cNvPr id="2" name="Slide Image Placeholder 1"/>
+          <p:cNvSpPr>
+            <a:spLocks noGrp="1"/>
+          </p:cNvSpPr>
+          <p:nvPr>
+            <p:ph type="sldImg" idx="2"/>
+          </p:nvPr>
+        </p:nvSpPr>
+        <p:spPr/>
+      </p:sp>
+      <p:sp>
+        <p:nvSpPr>
+          <p:cNvPr id="3" name="Notes Placeholder 2"/>
+          <p:cNvSpPr>
+            <a:spLocks noGrp="1"/>
+          </p:cNvSpPr>
+          <p:nvPr>
+            <p:ph type="body" idx="3" sz="quarter"/>
+          </p:nvPr>
+        </p:nvSpPr>
+        <p:spPr/>
+        <p:txBody>
+          <a:bodyPr/>
+          <a:lstStyle/>
+          <a:p>
+            <a:r>
+              <a:t>Les huit mots de l'exercice de sons du module en ligne, dans le même ordre. Ne pas montrer l'orthographe avant la correction : l'accent écrit donnerait la réponse.</a:t>
             </a:r>
           </a:p>
         </p:txBody>
@@ -1078,6 +1295,286 @@
           <a:p>
             <a:r>
               <a:t>Lire les objectifs à voix haute. Y revenir au billet de sortie.</a:t>
+            </a:r>
+          </a:p>
+        </p:txBody>
+      </p:sp>
+      <p:sp>
+        <p:nvSpPr>
+          <p:cNvPr id="4" name="Slide Number Placeholder 3"/>
+          <p:cNvSpPr>
+            <a:spLocks noGrp="1"/>
+          </p:cNvSpPr>
+          <p:nvPr>
+            <p:ph type="sldNum" idx="5" sz="quarter"/>
+          </p:nvPr>
+        </p:nvSpPr>
+        <p:spPr/>
+      </p:sp>
+    </p:spTree>
+  </p:cSld>
+  <p:clrMapOvr>
+    <a:masterClrMapping/>
+  </p:clrMapOvr>
+</p:notes>
+</file>
+
+<file path=ppt/notesSlides/notesSlide20.xml><?xml version="1.0" encoding="utf-8"?>
+<p:notes xmlns:a="http://schemas.openxmlformats.org/drawingml/2006/main" xmlns:p="http://schemas.openxmlformats.org/presentationml/2006/main" xmlns:r="http://schemas.openxmlformats.org/officeDocument/2006/relationships">
+  <p:cSld>
+    <p:spTree>
+      <p:nvGrpSpPr>
+        <p:cNvPr id="1" name=""/>
+        <p:cNvGrpSpPr/>
+        <p:nvPr/>
+      </p:nvGrpSpPr>
+      <p:grpSpPr>
+        <a:xfrm>
+          <a:off x="0" y="0"/>
+          <a:ext cx="0" cy="0"/>
+          <a:chOff x="0" y="0"/>
+          <a:chExt cx="0" cy="0"/>
+        </a:xfrm>
+      </p:grpSpPr>
+      <p:sp>
+        <p:nvSpPr>
+          <p:cNvPr id="2" name="Slide Image Placeholder 1"/>
+          <p:cNvSpPr>
+            <a:spLocks noGrp="1"/>
+          </p:cNvSpPr>
+          <p:nvPr>
+            <p:ph type="sldImg" idx="2"/>
+          </p:nvPr>
+        </p:nvSpPr>
+        <p:spPr/>
+      </p:sp>
+      <p:sp>
+        <p:nvSpPr>
+          <p:cNvPr id="3" name="Notes Placeholder 2"/>
+          <p:cNvSpPr>
+            <a:spLocks noGrp="1"/>
+          </p:cNvSpPr>
+          <p:nvPr>
+            <p:ph type="body" idx="3" sz="quarter"/>
+          </p:nvPr>
+        </p:nvSpPr>
+        <p:spPr/>
+        <p:txBody>
+          <a:bodyPr/>
+          <a:lstStyle/>
+          <a:p>
+            <a:r>
+              <a:t>Corriger en groupe. Donner la bonne réponse, sans revenir sur qui s'est trompé.</a:t>
+            </a:r>
+          </a:p>
+        </p:txBody>
+      </p:sp>
+      <p:sp>
+        <p:nvSpPr>
+          <p:cNvPr id="4" name="Slide Number Placeholder 3"/>
+          <p:cNvSpPr>
+            <a:spLocks noGrp="1"/>
+          </p:cNvSpPr>
+          <p:nvPr>
+            <p:ph type="sldNum" idx="5" sz="quarter"/>
+          </p:nvPr>
+        </p:nvSpPr>
+        <p:spPr/>
+      </p:sp>
+    </p:spTree>
+  </p:cSld>
+  <p:clrMapOvr>
+    <a:masterClrMapping/>
+  </p:clrMapOvr>
+</p:notes>
+</file>
+
+<file path=ppt/notesSlides/notesSlide21.xml><?xml version="1.0" encoding="utf-8"?>
+<p:notes xmlns:a="http://schemas.openxmlformats.org/drawingml/2006/main" xmlns:p="http://schemas.openxmlformats.org/presentationml/2006/main" xmlns:r="http://schemas.openxmlformats.org/officeDocument/2006/relationships">
+  <p:cSld>
+    <p:spTree>
+      <p:nvGrpSpPr>
+        <p:cNvPr id="1" name=""/>
+        <p:cNvGrpSpPr/>
+        <p:nvPr/>
+      </p:nvGrpSpPr>
+      <p:grpSpPr>
+        <a:xfrm>
+          <a:off x="0" y="0"/>
+          <a:ext cx="0" cy="0"/>
+          <a:chOff x="0" y="0"/>
+          <a:chExt cx="0" cy="0"/>
+        </a:xfrm>
+      </p:grpSpPr>
+      <p:sp>
+        <p:nvSpPr>
+          <p:cNvPr id="2" name="Slide Image Placeholder 1"/>
+          <p:cNvSpPr>
+            <a:spLocks noGrp="1"/>
+          </p:cNvSpPr>
+          <p:nvPr>
+            <p:ph type="sldImg" idx="2"/>
+          </p:nvPr>
+        </p:nvSpPr>
+        <p:spPr/>
+      </p:sp>
+      <p:sp>
+        <p:nvSpPr>
+          <p:cNvPr id="3" name="Notes Placeholder 2"/>
+          <p:cNvSpPr>
+            <a:spLocks noGrp="1"/>
+          </p:cNvSpPr>
+          <p:nvPr>
+            <p:ph type="body" idx="3" sz="quarter"/>
+          </p:nvPr>
+        </p:nvSpPr>
+        <p:spPr/>
+        <p:txBody>
+          <a:bodyPr/>
+          <a:lstStyle/>
+          <a:p>
+            <a:r>
+              <a:t>Faire lire lentement : à vitesse normale, la différence s'efface et l'exercice perd son intérêt.</a:t>
+            </a:r>
+          </a:p>
+        </p:txBody>
+      </p:sp>
+      <p:sp>
+        <p:nvSpPr>
+          <p:cNvPr id="4" name="Slide Number Placeholder 3"/>
+          <p:cNvSpPr>
+            <a:spLocks noGrp="1"/>
+          </p:cNvSpPr>
+          <p:nvPr>
+            <p:ph type="sldNum" idx="5" sz="quarter"/>
+          </p:nvPr>
+        </p:nvSpPr>
+        <p:spPr/>
+      </p:sp>
+    </p:spTree>
+  </p:cSld>
+  <p:clrMapOvr>
+    <a:masterClrMapping/>
+  </p:clrMapOvr>
+</p:notes>
+</file>
+
+<file path=ppt/notesSlides/notesSlide22.xml><?xml version="1.0" encoding="utf-8"?>
+<p:notes xmlns:a="http://schemas.openxmlformats.org/drawingml/2006/main" xmlns:p="http://schemas.openxmlformats.org/presentationml/2006/main" xmlns:r="http://schemas.openxmlformats.org/officeDocument/2006/relationships">
+  <p:cSld>
+    <p:spTree>
+      <p:nvGrpSpPr>
+        <p:cNvPr id="1" name=""/>
+        <p:cNvGrpSpPr/>
+        <p:nvPr/>
+      </p:nvGrpSpPr>
+      <p:grpSpPr>
+        <a:xfrm>
+          <a:off x="0" y="0"/>
+          <a:ext cx="0" cy="0"/>
+          <a:chOff x="0" y="0"/>
+          <a:chExt cx="0" cy="0"/>
+        </a:xfrm>
+      </p:grpSpPr>
+      <p:sp>
+        <p:nvSpPr>
+          <p:cNvPr id="2" name="Slide Image Placeholder 1"/>
+          <p:cNvSpPr>
+            <a:spLocks noGrp="1"/>
+          </p:cNvSpPr>
+          <p:nvPr>
+            <p:ph type="sldImg" idx="2"/>
+          </p:nvPr>
+        </p:nvSpPr>
+        <p:spPr/>
+      </p:sp>
+      <p:sp>
+        <p:nvSpPr>
+          <p:cNvPr id="3" name="Notes Placeholder 2"/>
+          <p:cNvSpPr>
+            <a:spLocks noGrp="1"/>
+          </p:cNvSpPr>
+          <p:nvPr>
+            <p:ph type="body" idx="3" sz="quarter"/>
+          </p:nvPr>
+        </p:nvSpPr>
+        <p:spPr/>
+        <p:txBody>
+          <a:bodyPr/>
+          <a:lstStyle/>
+          <a:p>
+            <a:r>
+              <a:t>Corriger en groupe. Donner la bonne réponse, sans revenir sur qui s'est trompé.</a:t>
+            </a:r>
+          </a:p>
+        </p:txBody>
+      </p:sp>
+      <p:sp>
+        <p:nvSpPr>
+          <p:cNvPr id="4" name="Slide Number Placeholder 3"/>
+          <p:cNvSpPr>
+            <a:spLocks noGrp="1"/>
+          </p:cNvSpPr>
+          <p:nvPr>
+            <p:ph type="sldNum" idx="5" sz="quarter"/>
+          </p:nvPr>
+        </p:nvSpPr>
+        <p:spPr/>
+      </p:sp>
+    </p:spTree>
+  </p:cSld>
+  <p:clrMapOvr>
+    <a:masterClrMapping/>
+  </p:clrMapOvr>
+</p:notes>
+</file>
+
+<file path=ppt/notesSlides/notesSlide23.xml><?xml version="1.0" encoding="utf-8"?>
+<p:notes xmlns:a="http://schemas.openxmlformats.org/drawingml/2006/main" xmlns:p="http://schemas.openxmlformats.org/presentationml/2006/main" xmlns:r="http://schemas.openxmlformats.org/officeDocument/2006/relationships">
+  <p:cSld>
+    <p:spTree>
+      <p:nvGrpSpPr>
+        <p:cNvPr id="1" name=""/>
+        <p:cNvGrpSpPr/>
+        <p:nvPr/>
+      </p:nvGrpSpPr>
+      <p:grpSpPr>
+        <a:xfrm>
+          <a:off x="0" y="0"/>
+          <a:ext cx="0" cy="0"/>
+          <a:chOff x="0" y="0"/>
+          <a:chExt cx="0" cy="0"/>
+        </a:xfrm>
+      </p:grpSpPr>
+      <p:sp>
+        <p:nvSpPr>
+          <p:cNvPr id="2" name="Slide Image Placeholder 1"/>
+          <p:cNvSpPr>
+            <a:spLocks noGrp="1"/>
+          </p:cNvSpPr>
+          <p:nvPr>
+            <p:ph type="sldImg" idx="2"/>
+          </p:nvPr>
+        </p:nvSpPr>
+        <p:spPr/>
+      </p:sp>
+      <p:sp>
+        <p:nvSpPr>
+          <p:cNvPr id="3" name="Notes Placeholder 2"/>
+          <p:cNvSpPr>
+            <a:spLocks noGrp="1"/>
+          </p:cNvSpPr>
+          <p:nvPr>
+            <p:ph type="body" idx="3" sz="quarter"/>
+          </p:nvPr>
+        </p:nvSpPr>
+        <p:spPr/>
+        <p:txBody>
+          <a:bodyPr/>
+          <a:lstStyle/>
+          <a:p>
+            <a:r>
+              <a:t>Corriger la forme écrite avant tout. C'est elle qui compte dans un cahier ; la forme orale n'est là que pour l'oreille.</a:t>
             </a:r>
           </a:p>
         </p:txBody>
@@ -6087,7 +6584,7 @@
                 </a:solidFill>
                 <a:latin typeface="Verdana"/>
               </a:rPr>
-              <a:t>PRATIQUE · 3 DE 4</a:t>
+              <a:t>PRATIQUE · 3 DE 6</a:t>
             </a:r>
           </a:p>
         </p:txBody>
@@ -7977,7 +8474,7 @@
                 </a:solidFill>
                 <a:latin typeface="Verdana"/>
               </a:rPr>
-              <a:t>PRATIQUE · 4 DE 4</a:t>
+              <a:t>PRATIQUE · 4 DE 6</a:t>
             </a:r>
           </a:p>
         </p:txBody>
@@ -9835,7 +10332,234 @@
       </p:sp>
       <p:sp>
         <p:nvSpPr>
-          <p:cNvPr id="5" name="Rectangle 4"/>
+          <p:cNvPr id="5" name="TextBox 4"/>
+          <p:cNvSpPr txBox="1"/>
+          <p:nvPr/>
+        </p:nvSpPr>
+        <p:spPr>
+          <a:xfrm>
+            <a:off x="566928" y="420624"/>
+            <a:ext cx="11057839" cy="237744"/>
+          </a:xfrm>
+          <a:prstGeom prst="rect">
+            <a:avLst/>
+          </a:prstGeom>
+          <a:noFill/>
+        </p:spPr>
+        <p:txBody>
+          <a:bodyPr wrap="square" lIns="0" rIns="0" tIns="0" bIns="0" anchor="t">
+            <a:spAutoFit/>
+          </a:bodyPr>
+          <a:lstStyle/>
+          <a:p>
+            <a:pPr algn="l">
+              <a:lnSpc>
+                <a:spcPct val="135000"/>
+              </a:lnSpc>
+            </a:pPr>
+            <a:r>
+              <a:rPr sz="1300" b="1" i="0" spc="156">
+                <a:solidFill>
+                  <a:srgbClr val="6B4FBB"/>
+                </a:solidFill>
+                <a:latin typeface="Verdana"/>
+              </a:rPr>
+              <a:t>L'AUTRE DIFFICULTÉ DU BULLETIN : É OU È</a:t>
+            </a:r>
+          </a:p>
+        </p:txBody>
+      </p:sp>
+      <p:sp>
+        <p:nvSpPr>
+          <p:cNvPr id="6" name="Rounded Rectangle 5"/>
+          <p:cNvSpPr/>
+          <p:nvPr/>
+        </p:nvSpPr>
+        <p:spPr>
+          <a:xfrm>
+            <a:off x="566928" y="1225296"/>
+            <a:ext cx="11057839" cy="1967991"/>
+          </a:xfrm>
+          <a:prstGeom prst="roundRect">
+            <a:avLst>
+              <a:gd name="adj" fmla="val 7434"/>
+            </a:avLst>
+          </a:prstGeom>
+          <a:solidFill>
+            <a:srgbClr val="EFEAFA"/>
+          </a:solidFill>
+          <a:ln w="12700">
+            <a:solidFill>
+              <a:srgbClr val="EAEAE8"/>
+            </a:solidFill>
+          </a:ln>
+          <a:effectLst/>
+        </p:spPr>
+        <p:style>
+          <a:lnRef idx="1">
+            <a:schemeClr val="accent1"/>
+          </a:lnRef>
+          <a:fillRef idx="3">
+            <a:schemeClr val="accent1"/>
+          </a:fillRef>
+          <a:effectRef idx="2">
+            <a:schemeClr val="accent1"/>
+          </a:effectRef>
+          <a:fontRef idx="minor">
+            <a:schemeClr val="lt1"/>
+          </a:fontRef>
+        </p:style>
+        <p:txBody>
+          <a:bodyPr rtlCol="0" anchor="ctr"/>
+          <a:lstStyle/>
+          <a:p/>
+        </p:txBody>
+      </p:sp>
+      <p:sp>
+        <p:nvSpPr>
+          <p:cNvPr id="7" name="TextBox 6"/>
+          <p:cNvSpPr txBox="1"/>
+          <p:nvPr/>
+        </p:nvSpPr>
+        <p:spPr>
+          <a:xfrm>
+            <a:off x="1298448" y="1682496"/>
+            <a:ext cx="9594799" cy="1145032"/>
+          </a:xfrm>
+          <a:prstGeom prst="rect">
+            <a:avLst/>
+          </a:prstGeom>
+          <a:noFill/>
+        </p:spPr>
+        <p:txBody>
+          <a:bodyPr wrap="square" lIns="0" rIns="0" tIns="0" bIns="0" anchor="t">
+            <a:spAutoFit/>
+          </a:bodyPr>
+          <a:lstStyle/>
+          <a:p>
+            <a:pPr algn="l">
+              <a:lnSpc>
+                <a:spcPct val="122000"/>
+              </a:lnSpc>
+            </a:pPr>
+            <a:r>
+              <a:rPr sz="3400" b="1" i="0">
+                <a:solidFill>
+                  <a:srgbClr val="17181A"/>
+                </a:solidFill>
+                <a:latin typeface="Verdana"/>
+              </a:rPr>
+              <a:t>L'accent change le son : « é » ferme la bouche, « è » l'ouvre.</a:t>
+            </a:r>
+          </a:p>
+        </p:txBody>
+      </p:sp>
+      <p:sp>
+        <p:nvSpPr>
+          <p:cNvPr id="8" name="Rounded Rectangle 7"/>
+          <p:cNvSpPr/>
+          <p:nvPr/>
+        </p:nvSpPr>
+        <p:spPr>
+          <a:xfrm>
+            <a:off x="566928" y="3467607"/>
+            <a:ext cx="11057839" cy="1671827"/>
+          </a:xfrm>
+          <a:prstGeom prst="roundRect">
+            <a:avLst>
+              <a:gd name="adj" fmla="val 8751"/>
+            </a:avLst>
+          </a:prstGeom>
+          <a:solidFill>
+            <a:srgbClr val="FFFFFF"/>
+          </a:solidFill>
+          <a:ln w="12700">
+            <a:solidFill>
+              <a:srgbClr val="EAEAE8"/>
+            </a:solidFill>
+          </a:ln>
+          <a:effectLst/>
+        </p:spPr>
+        <p:style>
+          <a:lnRef idx="1">
+            <a:schemeClr val="accent1"/>
+          </a:lnRef>
+          <a:fillRef idx="3">
+            <a:schemeClr val="accent1"/>
+          </a:fillRef>
+          <a:effectRef idx="2">
+            <a:schemeClr val="accent1"/>
+          </a:effectRef>
+          <a:fontRef idx="minor">
+            <a:schemeClr val="lt1"/>
+          </a:fontRef>
+        </p:style>
+        <p:txBody>
+          <a:bodyPr rtlCol="0" anchor="ctr"/>
+          <a:lstStyle/>
+          <a:p/>
+        </p:txBody>
+      </p:sp>
+      <p:sp>
+        <p:nvSpPr>
+          <p:cNvPr id="9" name="TextBox 8"/>
+          <p:cNvSpPr txBox="1"/>
+          <p:nvPr/>
+        </p:nvSpPr>
+        <p:spPr>
+          <a:xfrm>
+            <a:off x="969264" y="3741927"/>
+            <a:ext cx="10234879" cy="1214627"/>
+          </a:xfrm>
+          <a:prstGeom prst="rect">
+            <a:avLst/>
+          </a:prstGeom>
+          <a:noFill/>
+        </p:spPr>
+        <p:txBody>
+          <a:bodyPr wrap="square" lIns="0" rIns="0" tIns="0" bIns="0" anchor="t">
+            <a:spAutoFit/>
+          </a:bodyPr>
+          <a:lstStyle/>
+          <a:p>
+            <a:pPr algn="l">
+              <a:lnSpc>
+                <a:spcPct val="145000"/>
+              </a:lnSpc>
+            </a:pPr>
+            <a:r>
+              <a:rPr sz="2000" b="0" i="0">
+                <a:solidFill>
+                  <a:srgbClr val="4B4F52"/>
+                </a:solidFill>
+                <a:latin typeface="Verdana"/>
+              </a:rPr>
+              <a:t>« Météo » et « mètres » se suivent dans le même bulletin. Le premier a deux fois le son « é », le second le son « è ». L'écart est petit à l'oreille et net à l'écrit.</a:t>
+            </a:r>
+          </a:p>
+        </p:txBody>
+      </p:sp>
+    </p:spTree>
+  </p:cSld>
+  <p:clrMapOvr>
+    <a:masterClrMapping/>
+  </p:clrMapOvr>
+</p:sld>
+</file>
+
+<file path=ppt/slides/slide17.xml><?xml version="1.0" encoding="utf-8"?>
+<p:sld xmlns:a="http://schemas.openxmlformats.org/drawingml/2006/main" xmlns:p="http://schemas.openxmlformats.org/presentationml/2006/main" xmlns:r="http://schemas.openxmlformats.org/officeDocument/2006/relationships">
+  <p:cSld>
+    <p:spTree>
+      <p:nvGrpSpPr>
+        <p:cNvPr id="1" name=""/>
+        <p:cNvGrpSpPr/>
+        <p:nvPr/>
+      </p:nvGrpSpPr>
+      <p:grpSpPr/>
+      <p:sp>
+        <p:nvSpPr>
+          <p:cNvPr id="2" name="Rectangle 1"/>
           <p:cNvSpPr/>
           <p:nvPr/>
         </p:nvSpPr>
@@ -9848,7 +10572,7 @@
             <a:avLst/>
           </a:prstGeom>
           <a:solidFill>
-            <a:srgbClr val="17181A"/>
+            <a:srgbClr val="F7F7F5"/>
           </a:solidFill>
           <a:ln>
             <a:noFill/>
@@ -9877,14 +10601,131 @@
       </p:sp>
       <p:sp>
         <p:nvSpPr>
+          <p:cNvPr id="3" name="TextBox 2"/>
+          <p:cNvSpPr txBox="1"/>
+          <p:nvPr/>
+        </p:nvSpPr>
+        <p:spPr>
+          <a:xfrm>
+            <a:off x="566928" y="6355080"/>
+            <a:ext cx="6400800" cy="219456"/>
+          </a:xfrm>
+          <a:prstGeom prst="rect">
+            <a:avLst/>
+          </a:prstGeom>
+          <a:noFill/>
+        </p:spPr>
+        <p:txBody>
+          <a:bodyPr wrap="square" lIns="0" rIns="0" tIns="0" bIns="0" anchor="t">
+            <a:spAutoFit/>
+          </a:bodyPr>
+          <a:lstStyle/>
+          <a:p>
+            <a:pPr algn="l">
+              <a:lnSpc>
+                <a:spcPct val="135000"/>
+              </a:lnSpc>
+            </a:pPr>
+            <a:r>
+              <a:rPr sz="1200" b="0" i="0">
+                <a:solidFill>
+                  <a:srgbClr val="6E7175"/>
+                </a:solidFill>
+                <a:latin typeface="Verdana"/>
+              </a:rPr>
+              <a:t>A2 · Quelles sont les prévisions ?</a:t>
+            </a:r>
+          </a:p>
+        </p:txBody>
+      </p:sp>
+      <p:sp>
+        <p:nvSpPr>
+          <p:cNvPr id="4" name="TextBox 3"/>
+          <p:cNvSpPr txBox="1"/>
+          <p:nvPr/>
+        </p:nvSpPr>
+        <p:spPr>
+          <a:xfrm>
+            <a:off x="10710367" y="6355080"/>
+            <a:ext cx="914400" cy="219456"/>
+          </a:xfrm>
+          <a:prstGeom prst="rect">
+            <a:avLst/>
+          </a:prstGeom>
+          <a:noFill/>
+        </p:spPr>
+        <p:txBody>
+          <a:bodyPr wrap="square" lIns="0" rIns="0" tIns="0" bIns="0" anchor="t">
+            <a:spAutoFit/>
+          </a:bodyPr>
+          <a:lstStyle/>
+          <a:p>
+            <a:pPr algn="r">
+              <a:lnSpc>
+                <a:spcPct val="135000"/>
+              </a:lnSpc>
+            </a:pPr>
+            <a:r>
+              <a:rPr sz="1200" b="0" i="0">
+                <a:solidFill>
+                  <a:srgbClr val="6E7175"/>
+                </a:solidFill>
+                <a:latin typeface="Verdana"/>
+              </a:rPr>
+              <a:t>17</a:t>
+            </a:r>
+          </a:p>
+        </p:txBody>
+      </p:sp>
+      <p:sp>
+        <p:nvSpPr>
+          <p:cNvPr id="5" name="TextBox 4"/>
+          <p:cNvSpPr txBox="1"/>
+          <p:nvPr/>
+        </p:nvSpPr>
+        <p:spPr>
+          <a:xfrm>
+            <a:off x="566928" y="420624"/>
+            <a:ext cx="11057839" cy="237744"/>
+          </a:xfrm>
+          <a:prstGeom prst="rect">
+            <a:avLst/>
+          </a:prstGeom>
+          <a:noFill/>
+        </p:spPr>
+        <p:txBody>
+          <a:bodyPr wrap="square" lIns="0" rIns="0" tIns="0" bIns="0" anchor="t">
+            <a:spAutoFit/>
+          </a:bodyPr>
+          <a:lstStyle/>
+          <a:p>
+            <a:pPr algn="l">
+              <a:lnSpc>
+                <a:spcPct val="135000"/>
+              </a:lnSpc>
+            </a:pPr>
+            <a:r>
+              <a:rPr sz="1300" b="1" i="0" spc="156">
+                <a:solidFill>
+                  <a:srgbClr val="6B4FBB"/>
+                </a:solidFill>
+                <a:latin typeface="Verdana"/>
+              </a:rPr>
+              <a:t>ANALYSE</a:t>
+            </a:r>
+          </a:p>
+        </p:txBody>
+      </p:sp>
+      <p:sp>
+        <p:nvSpPr>
           <p:cNvPr id="6" name="TextBox 5"/>
           <p:cNvSpPr txBox="1"/>
           <p:nvPr/>
         </p:nvSpPr>
         <p:spPr>
           <a:xfrm>
-            <a:off x="566928" y="1051560"/>
-            <a:ext cx="11057839" cy="274320"/>
+            <a:off x="566928" y="749808"/>
+            <a:ext cx="11057839" cy="877824"/>
           </a:xfrm>
           <a:prstGeom prst="rect">
             <a:avLst/>
@@ -9899,78 +10740,317 @@
           <a:p>
             <a:pPr algn="l">
               <a:lnSpc>
-                <a:spcPct val="135000"/>
-              </a:lnSpc>
-            </a:pPr>
-            <a:r>
-              <a:rPr sz="1300" b="1" i="0" spc="156">
-                <a:solidFill>
-                  <a:srgbClr val="FFFFFF"/>
-                </a:solidFill>
-                <a:latin typeface="Verdana"/>
-              </a:rPr>
-              <a:t>BILLET DE SORTIE</a:t>
-            </a:r>
-          </a:p>
-        </p:txBody>
-      </p:sp>
-      <p:sp>
-        <p:nvSpPr>
-          <p:cNvPr id="7" name="TextBox 6"/>
-          <p:cNvSpPr txBox="1"/>
-          <p:nvPr/>
-        </p:nvSpPr>
-        <p:spPr>
-          <a:xfrm>
-            <a:off x="566928" y="1572768"/>
-            <a:ext cx="9777679" cy="2103120"/>
-          </a:xfrm>
-          <a:prstGeom prst="rect">
-            <a:avLst/>
-          </a:prstGeom>
-          <a:noFill/>
-        </p:spPr>
-        <p:txBody>
-          <a:bodyPr wrap="square" lIns="0" rIns="0" tIns="0" bIns="0" anchor="t">
-            <a:spAutoFit/>
-          </a:bodyPr>
-          <a:lstStyle/>
-          <a:p>
-            <a:pPr algn="l">
-              <a:lnSpc>
-                <a:spcPct val="125000"/>
+                <a:spcPct val="115000"/>
               </a:lnSpc>
             </a:pPr>
             <a:r>
               <a:rPr sz="3400" b="1" i="0">
                 <a:solidFill>
-                  <a:srgbClr val="FFFFFF"/>
-                </a:solidFill>
-                <a:latin typeface="Verdana"/>
-              </a:rPr>
-              <a:t>Écrivez quatre mots dont la consonne finale tombe souvent à l'oral.</a:t>
-            </a:r>
-          </a:p>
-        </p:txBody>
-      </p:sp>
-      <p:sp>
-        <p:nvSpPr>
-          <p:cNvPr id="8" name="Rounded Rectangle 7"/>
+                  <a:srgbClr val="17181A"/>
+                </a:solidFill>
+                <a:latin typeface="Verdana"/>
+              </a:rPr>
+              <a:t>Les deux sons dans les mots de la météo</a:t>
+            </a:r>
+          </a:p>
+        </p:txBody>
+      </p:sp>
+      <p:sp>
+        <p:nvSpPr>
+          <p:cNvPr id="7" name="Rounded Rectangle 6"/>
           <p:cNvSpPr/>
           <p:nvPr/>
         </p:nvSpPr>
         <p:spPr>
           <a:xfrm>
-            <a:off x="566928" y="3931920"/>
-            <a:ext cx="11057839" cy="666496"/>
+            <a:off x="566928" y="1810512"/>
+            <a:ext cx="11057839" cy="2322576"/>
           </a:xfrm>
           <a:prstGeom prst="roundRect">
             <a:avLst>
-              <a:gd name="adj" fmla="val 13719"/>
+              <a:gd name="adj" fmla="val 6299"/>
             </a:avLst>
           </a:prstGeom>
           <a:solidFill>
-            <a:srgbClr val="2A2C2F"/>
+            <a:srgbClr val="FFFFFF"/>
+          </a:solidFill>
+          <a:ln w="12700">
+            <a:solidFill>
+              <a:srgbClr val="EAEAE8"/>
+            </a:solidFill>
+          </a:ln>
+          <a:effectLst/>
+        </p:spPr>
+        <p:style>
+          <a:lnRef idx="1">
+            <a:schemeClr val="accent1"/>
+          </a:lnRef>
+          <a:fillRef idx="3">
+            <a:schemeClr val="accent1"/>
+          </a:fillRef>
+          <a:effectRef idx="2">
+            <a:schemeClr val="accent1"/>
+          </a:effectRef>
+          <a:fontRef idx="minor">
+            <a:schemeClr val="lt1"/>
+          </a:fontRef>
+        </p:style>
+        <p:txBody>
+          <a:bodyPr rtlCol="0" anchor="ctr"/>
+          <a:lstStyle/>
+          <a:p/>
+        </p:txBody>
+      </p:sp>
+      <p:sp>
+        <p:nvSpPr>
+          <p:cNvPr id="8" name="TextBox 7"/>
+          <p:cNvSpPr txBox="1"/>
+          <p:nvPr/>
+        </p:nvSpPr>
+        <p:spPr>
+          <a:xfrm>
+            <a:off x="932688" y="1975104"/>
+            <a:ext cx="3222650" cy="237744"/>
+          </a:xfrm>
+          <a:prstGeom prst="rect">
+            <a:avLst/>
+          </a:prstGeom>
+          <a:noFill/>
+        </p:spPr>
+        <p:txBody>
+          <a:bodyPr wrap="square" lIns="0" rIns="0" tIns="0" bIns="0" anchor="t">
+            <a:spAutoFit/>
+          </a:bodyPr>
+          <a:lstStyle/>
+          <a:p>
+            <a:pPr algn="l">
+              <a:lnSpc>
+                <a:spcPct val="135000"/>
+              </a:lnSpc>
+            </a:pPr>
+            <a:r>
+              <a:rPr sz="1300" b="1" i="0" spc="156">
+                <a:solidFill>
+                  <a:srgbClr val="6E7175"/>
+                </a:solidFill>
+                <a:latin typeface="Verdana"/>
+              </a:rPr>
+              <a:t>LE SON</a:t>
+            </a:r>
+          </a:p>
+        </p:txBody>
+      </p:sp>
+      <p:sp>
+        <p:nvSpPr>
+          <p:cNvPr id="9" name="TextBox 8"/>
+          <p:cNvSpPr txBox="1"/>
+          <p:nvPr/>
+        </p:nvSpPr>
+        <p:spPr>
+          <a:xfrm>
+            <a:off x="4374794" y="1975104"/>
+            <a:ext cx="3222650" cy="237744"/>
+          </a:xfrm>
+          <a:prstGeom prst="rect">
+            <a:avLst/>
+          </a:prstGeom>
+          <a:noFill/>
+        </p:spPr>
+        <p:txBody>
+          <a:bodyPr wrap="square" lIns="0" rIns="0" tIns="0" bIns="0" anchor="t">
+            <a:spAutoFit/>
+          </a:bodyPr>
+          <a:lstStyle/>
+          <a:p>
+            <a:pPr algn="l">
+              <a:lnSpc>
+                <a:spcPct val="135000"/>
+              </a:lnSpc>
+            </a:pPr>
+            <a:r>
+              <a:rPr sz="1300" b="1" i="0" spc="156">
+                <a:solidFill>
+                  <a:srgbClr val="6E7175"/>
+                </a:solidFill>
+                <a:latin typeface="Verdana"/>
+              </a:rPr>
+              <a:t>IL S'ÉCRIT</a:t>
+            </a:r>
+          </a:p>
+        </p:txBody>
+      </p:sp>
+      <p:sp>
+        <p:nvSpPr>
+          <p:cNvPr id="10" name="TextBox 9"/>
+          <p:cNvSpPr txBox="1"/>
+          <p:nvPr/>
+        </p:nvSpPr>
+        <p:spPr>
+          <a:xfrm>
+            <a:off x="7816900" y="1975104"/>
+            <a:ext cx="3222650" cy="237744"/>
+          </a:xfrm>
+          <a:prstGeom prst="rect">
+            <a:avLst/>
+          </a:prstGeom>
+          <a:noFill/>
+        </p:spPr>
+        <p:txBody>
+          <a:bodyPr wrap="square" lIns="0" rIns="0" tIns="0" bIns="0" anchor="t">
+            <a:spAutoFit/>
+          </a:bodyPr>
+          <a:lstStyle/>
+          <a:p>
+            <a:pPr algn="l">
+              <a:lnSpc>
+                <a:spcPct val="135000"/>
+              </a:lnSpc>
+            </a:pPr>
+            <a:r>
+              <a:rPr sz="1300" b="1" i="0" spc="156">
+                <a:solidFill>
+                  <a:srgbClr val="6E7175"/>
+                </a:solidFill>
+                <a:latin typeface="Verdana"/>
+              </a:rPr>
+              <a:t>MOTS DU MODULE</a:t>
+            </a:r>
+          </a:p>
+        </p:txBody>
+      </p:sp>
+      <p:sp>
+        <p:nvSpPr>
+          <p:cNvPr id="11" name="TextBox 10"/>
+          <p:cNvSpPr txBox="1"/>
+          <p:nvPr/>
+        </p:nvSpPr>
+        <p:spPr>
+          <a:xfrm>
+            <a:off x="932688" y="2395728"/>
+            <a:ext cx="3222650" cy="640080"/>
+          </a:xfrm>
+          <a:prstGeom prst="rect">
+            <a:avLst/>
+          </a:prstGeom>
+          <a:noFill/>
+        </p:spPr>
+        <p:txBody>
+          <a:bodyPr wrap="square" lIns="0" rIns="0" tIns="0" bIns="0" anchor="t">
+            <a:spAutoFit/>
+          </a:bodyPr>
+          <a:lstStyle/>
+          <a:p>
+            <a:pPr algn="l">
+              <a:lnSpc>
+                <a:spcPct val="132000"/>
+              </a:lnSpc>
+            </a:pPr>
+            <a:r>
+              <a:rPr sz="1800" b="1" i="0">
+                <a:solidFill>
+                  <a:srgbClr val="6B4FBB"/>
+                </a:solidFill>
+                <a:latin typeface="Verdana"/>
+              </a:rPr>
+              <a:t>le son « é »</a:t>
+            </a:r>
+          </a:p>
+        </p:txBody>
+      </p:sp>
+      <p:sp>
+        <p:nvSpPr>
+          <p:cNvPr id="12" name="TextBox 11"/>
+          <p:cNvSpPr txBox="1"/>
+          <p:nvPr/>
+        </p:nvSpPr>
+        <p:spPr>
+          <a:xfrm>
+            <a:off x="4374794" y="2395728"/>
+            <a:ext cx="3222650" cy="640080"/>
+          </a:xfrm>
+          <a:prstGeom prst="rect">
+            <a:avLst/>
+          </a:prstGeom>
+          <a:noFill/>
+        </p:spPr>
+        <p:txBody>
+          <a:bodyPr wrap="square" lIns="0" rIns="0" tIns="0" bIns="0" anchor="t">
+            <a:spAutoFit/>
+          </a:bodyPr>
+          <a:lstStyle/>
+          <a:p>
+            <a:pPr algn="l">
+              <a:lnSpc>
+                <a:spcPct val="132000"/>
+              </a:lnSpc>
+            </a:pPr>
+            <a:r>
+              <a:rPr sz="1800" b="0" i="0">
+                <a:solidFill>
+                  <a:srgbClr val="3A3D40"/>
+                </a:solidFill>
+                <a:latin typeface="Verdana"/>
+              </a:rPr>
+              <a:t>é, et les finales -er, -ez, -ée</a:t>
+            </a:r>
+          </a:p>
+        </p:txBody>
+      </p:sp>
+      <p:sp>
+        <p:nvSpPr>
+          <p:cNvPr id="13" name="TextBox 12"/>
+          <p:cNvSpPr txBox="1"/>
+          <p:nvPr/>
+        </p:nvSpPr>
+        <p:spPr>
+          <a:xfrm>
+            <a:off x="7816900" y="2395728"/>
+            <a:ext cx="3222650" cy="640080"/>
+          </a:xfrm>
+          <a:prstGeom prst="rect">
+            <a:avLst/>
+          </a:prstGeom>
+          <a:noFill/>
+        </p:spPr>
+        <p:txBody>
+          <a:bodyPr wrap="square" lIns="0" rIns="0" tIns="0" bIns="0" anchor="t">
+            <a:spAutoFit/>
+          </a:bodyPr>
+          <a:lstStyle/>
+          <a:p>
+            <a:pPr algn="l">
+              <a:lnSpc>
+                <a:spcPct val="132000"/>
+              </a:lnSpc>
+            </a:pPr>
+            <a:r>
+              <a:rPr sz="1800" b="0" i="0">
+                <a:solidFill>
+                  <a:srgbClr val="3A3D40"/>
+                </a:solidFill>
+                <a:latin typeface="Verdana"/>
+              </a:rPr>
+              <a:t>météo, degrés, préparer, journée</a:t>
+            </a:r>
+          </a:p>
+        </p:txBody>
+      </p:sp>
+      <p:sp>
+        <p:nvSpPr>
+          <p:cNvPr id="14" name="Rectangle 13"/>
+          <p:cNvSpPr/>
+          <p:nvPr/>
+        </p:nvSpPr>
+        <p:spPr>
+          <a:xfrm>
+            <a:off x="932688" y="3108960"/>
+            <a:ext cx="10326319" cy="10058"/>
+          </a:xfrm>
+          <a:prstGeom prst="rect">
+            <a:avLst/>
+          </a:prstGeom>
+          <a:solidFill>
+            <a:srgbClr val="EAEAE8"/>
           </a:solidFill>
           <a:ln>
             <a:noFill/>
@@ -9999,14 +11079,14 @@
       </p:sp>
       <p:sp>
         <p:nvSpPr>
-          <p:cNvPr id="9" name="TextBox 8"/>
-          <p:cNvSpPr txBox="1"/>
-          <p:nvPr/>
-        </p:nvSpPr>
-        <p:spPr>
-          <a:xfrm>
-            <a:off x="932688" y="4087368"/>
-            <a:ext cx="10051999" cy="392176"/>
+          <p:cNvPr id="15" name="TextBox 14"/>
+          <p:cNvSpPr txBox="1"/>
+          <p:nvPr/>
+        </p:nvSpPr>
+        <p:spPr>
+          <a:xfrm>
+            <a:off x="932688" y="3236976"/>
+            <a:ext cx="3222650" cy="640080"/>
           </a:xfrm>
           <a:prstGeom prst="rect">
             <a:avLst/>
@@ -10021,39 +11101,218 @@
           <a:p>
             <a:pPr algn="l">
               <a:lnSpc>
-                <a:spcPct val="140000"/>
-              </a:lnSpc>
-            </a:pPr>
-            <a:r>
-              <a:rPr sz="2000" b="0" i="0">
-                <a:solidFill>
-                  <a:srgbClr val="FFFFFF"/>
-                </a:solidFill>
-                <a:latin typeface="Verdana"/>
-              </a:rPr>
-              <a:t>Écrivez la forme entière, puis la forme entendue à côté.</a:t>
-            </a:r>
-          </a:p>
-        </p:txBody>
-      </p:sp>
-      <p:sp>
-        <p:nvSpPr>
-          <p:cNvPr id="10" name="Rounded Rectangle 9"/>
+                <a:spcPct val="132000"/>
+              </a:lnSpc>
+            </a:pPr>
+            <a:r>
+              <a:rPr sz="1800" b="1" i="0">
+                <a:solidFill>
+                  <a:srgbClr val="6B4FBB"/>
+                </a:solidFill>
+                <a:latin typeface="Verdana"/>
+              </a:rPr>
+              <a:t>le son « è »</a:t>
+            </a:r>
+          </a:p>
+        </p:txBody>
+      </p:sp>
+      <p:sp>
+        <p:nvSpPr>
+          <p:cNvPr id="16" name="TextBox 15"/>
+          <p:cNvSpPr txBox="1"/>
+          <p:nvPr/>
+        </p:nvSpPr>
+        <p:spPr>
+          <a:xfrm>
+            <a:off x="4374794" y="3236976"/>
+            <a:ext cx="3222650" cy="640080"/>
+          </a:xfrm>
+          <a:prstGeom prst="rect">
+            <a:avLst/>
+          </a:prstGeom>
+          <a:noFill/>
+        </p:spPr>
+        <p:txBody>
+          <a:bodyPr wrap="square" lIns="0" rIns="0" tIns="0" bIns="0" anchor="t">
+            <a:spAutoFit/>
+          </a:bodyPr>
+          <a:lstStyle/>
+          <a:p>
+            <a:pPr algn="l">
+              <a:lnSpc>
+                <a:spcPct val="132000"/>
+              </a:lnSpc>
+            </a:pPr>
+            <a:r>
+              <a:rPr sz="1800" b="0" i="0">
+                <a:solidFill>
+                  <a:srgbClr val="3A3D40"/>
+                </a:solidFill>
+                <a:latin typeface="Verdana"/>
+              </a:rPr>
+              <a:t>è, ê, ai, ei, e suivi de deux consonnes</a:t>
+            </a:r>
+          </a:p>
+        </p:txBody>
+      </p:sp>
+      <p:sp>
+        <p:nvSpPr>
+          <p:cNvPr id="17" name="TextBox 16"/>
+          <p:cNvSpPr txBox="1"/>
+          <p:nvPr/>
+        </p:nvSpPr>
+        <p:spPr>
+          <a:xfrm>
+            <a:off x="7816900" y="3236976"/>
+            <a:ext cx="3222650" cy="640080"/>
+          </a:xfrm>
+          <a:prstGeom prst="rect">
+            <a:avLst/>
+          </a:prstGeom>
+          <a:noFill/>
+        </p:spPr>
+        <p:txBody>
+          <a:bodyPr wrap="square" lIns="0" rIns="0" tIns="0" bIns="0" anchor="t">
+            <a:spAutoFit/>
+          </a:bodyPr>
+          <a:lstStyle/>
+          <a:p>
+            <a:pPr algn="l">
+              <a:lnSpc>
+                <a:spcPct val="132000"/>
+              </a:lnSpc>
+            </a:pPr>
+            <a:r>
+              <a:rPr sz="1800" b="0" i="0">
+                <a:solidFill>
+                  <a:srgbClr val="3A3D40"/>
+                </a:solidFill>
+                <a:latin typeface="Verdana"/>
+              </a:rPr>
+              <a:t>mètres, neige, après, verglas</a:t>
+            </a:r>
+          </a:p>
+        </p:txBody>
+      </p:sp>
+      <p:sp>
+        <p:nvSpPr>
+          <p:cNvPr id="18" name="Rounded Rectangle 17"/>
           <p:cNvSpPr/>
           <p:nvPr/>
         </p:nvSpPr>
         <p:spPr>
           <a:xfrm>
-            <a:off x="566928" y="4680712"/>
-            <a:ext cx="11057839" cy="666496"/>
+            <a:off x="566928" y="4370831"/>
+            <a:ext cx="11057839" cy="1175004"/>
           </a:xfrm>
           <a:prstGeom prst="roundRect">
             <a:avLst>
-              <a:gd name="adj" fmla="val 13719"/>
+              <a:gd name="adj" fmla="val 12451"/>
             </a:avLst>
           </a:prstGeom>
           <a:solidFill>
-            <a:srgbClr val="2A2C2F"/>
+            <a:srgbClr val="FBFBFA"/>
+          </a:solidFill>
+          <a:ln w="12700">
+            <a:solidFill>
+              <a:srgbClr val="EAEAE8"/>
+            </a:solidFill>
+          </a:ln>
+          <a:effectLst/>
+        </p:spPr>
+        <p:style>
+          <a:lnRef idx="1">
+            <a:schemeClr val="accent1"/>
+          </a:lnRef>
+          <a:fillRef idx="3">
+            <a:schemeClr val="accent1"/>
+          </a:fillRef>
+          <a:effectRef idx="2">
+            <a:schemeClr val="accent1"/>
+          </a:effectRef>
+          <a:fontRef idx="minor">
+            <a:schemeClr val="lt1"/>
+          </a:fontRef>
+        </p:style>
+        <p:txBody>
+          <a:bodyPr rtlCol="0" anchor="ctr"/>
+          <a:lstStyle/>
+          <a:p/>
+        </p:txBody>
+      </p:sp>
+      <p:sp>
+        <p:nvSpPr>
+          <p:cNvPr id="19" name="TextBox 18"/>
+          <p:cNvSpPr txBox="1"/>
+          <p:nvPr/>
+        </p:nvSpPr>
+        <p:spPr>
+          <a:xfrm>
+            <a:off x="969264" y="4626864"/>
+            <a:ext cx="10234879" cy="717804"/>
+          </a:xfrm>
+          <a:prstGeom prst="rect">
+            <a:avLst/>
+          </a:prstGeom>
+          <a:noFill/>
+        </p:spPr>
+        <p:txBody>
+          <a:bodyPr wrap="square" lIns="0" rIns="0" tIns="0" bIns="0" anchor="t">
+            <a:spAutoFit/>
+          </a:bodyPr>
+          <a:lstStyle/>
+          <a:p>
+            <a:pPr algn="l">
+              <a:lnSpc>
+                <a:spcPct val="145000"/>
+              </a:lnSpc>
+            </a:pPr>
+            <a:r>
+              <a:rPr sz="1800" b="0" i="0">
+                <a:solidFill>
+                  <a:srgbClr val="4B4F52"/>
+                </a:solidFill>
+                <a:latin typeface="Verdana"/>
+              </a:rPr>
+              <a:t>Un verbe qui finit par -er se dit toujours avec le son « é » : préparer, annuler, tomber. La règle n'a pas d'exception.</a:t>
+            </a:r>
+          </a:p>
+        </p:txBody>
+      </p:sp>
+    </p:spTree>
+  </p:cSld>
+  <p:clrMapOvr>
+    <a:masterClrMapping/>
+  </p:clrMapOvr>
+</p:sld>
+</file>
+
+<file path=ppt/slides/slide18.xml><?xml version="1.0" encoding="utf-8"?>
+<p:sld xmlns:a="http://schemas.openxmlformats.org/drawingml/2006/main" xmlns:p="http://schemas.openxmlformats.org/presentationml/2006/main" xmlns:r="http://schemas.openxmlformats.org/officeDocument/2006/relationships">
+  <p:cSld>
+    <p:spTree>
+      <p:nvGrpSpPr>
+        <p:cNvPr id="1" name=""/>
+        <p:cNvGrpSpPr/>
+        <p:nvPr/>
+      </p:nvGrpSpPr>
+      <p:grpSpPr/>
+      <p:sp>
+        <p:nvSpPr>
+          <p:cNvPr id="2" name="Rectangle 1"/>
+          <p:cNvSpPr/>
+          <p:nvPr/>
+        </p:nvSpPr>
+        <p:spPr>
+          <a:xfrm>
+            <a:off x="0" y="0"/>
+            <a:ext cx="12191695" cy="6858000"/>
+          </a:xfrm>
+          <a:prstGeom prst="rect">
+            <a:avLst/>
+          </a:prstGeom>
+          <a:solidFill>
+            <a:srgbClr val="F7F7F5"/>
           </a:solidFill>
           <a:ln>
             <a:noFill/>
@@ -10082,46 +11341,7 @@
       </p:sp>
       <p:sp>
         <p:nvSpPr>
-          <p:cNvPr id="11" name="TextBox 10"/>
-          <p:cNvSpPr txBox="1"/>
-          <p:nvPr/>
-        </p:nvSpPr>
-        <p:spPr>
-          <a:xfrm>
-            <a:off x="932688" y="4836160"/>
-            <a:ext cx="10051999" cy="392176"/>
-          </a:xfrm>
-          <a:prstGeom prst="rect">
-            <a:avLst/>
-          </a:prstGeom>
-          <a:noFill/>
-        </p:spPr>
-        <p:txBody>
-          <a:bodyPr wrap="square" lIns="0" rIns="0" tIns="0" bIns="0" anchor="t">
-            <a:spAutoFit/>
-          </a:bodyPr>
-          <a:lstStyle/>
-          <a:p>
-            <a:pPr algn="l">
-              <a:lnSpc>
-                <a:spcPct val="140000"/>
-              </a:lnSpc>
-            </a:pPr>
-            <a:r>
-              <a:rPr sz="2000" b="0" i="0">
-                <a:solidFill>
-                  <a:srgbClr val="FFFFFF"/>
-                </a:solidFill>
-                <a:latin typeface="Verdana"/>
-              </a:rPr>
-              <a:t>Exemple : « quatre » — on entend « quat' ».</a:t>
-            </a:r>
-          </a:p>
-        </p:txBody>
-      </p:sp>
-      <p:sp>
-        <p:nvSpPr>
-          <p:cNvPr id="12" name="TextBox 11"/>
+          <p:cNvPr id="3" name="TextBox 2"/>
           <p:cNvSpPr txBox="1"/>
           <p:nvPr/>
         </p:nvSpPr>
@@ -10154,6 +11374,2055 @@
                 <a:latin typeface="Verdana"/>
               </a:rPr>
               <a:t>A2 · Quelles sont les prévisions ?</a:t>
+            </a:r>
+          </a:p>
+        </p:txBody>
+      </p:sp>
+      <p:sp>
+        <p:nvSpPr>
+          <p:cNvPr id="4" name="TextBox 3"/>
+          <p:cNvSpPr txBox="1"/>
+          <p:nvPr/>
+        </p:nvSpPr>
+        <p:spPr>
+          <a:xfrm>
+            <a:off x="10710367" y="6355080"/>
+            <a:ext cx="914400" cy="219456"/>
+          </a:xfrm>
+          <a:prstGeom prst="rect">
+            <a:avLst/>
+          </a:prstGeom>
+          <a:noFill/>
+        </p:spPr>
+        <p:txBody>
+          <a:bodyPr wrap="square" lIns="0" rIns="0" tIns="0" bIns="0" anchor="t">
+            <a:spAutoFit/>
+          </a:bodyPr>
+          <a:lstStyle/>
+          <a:p>
+            <a:pPr algn="r">
+              <a:lnSpc>
+                <a:spcPct val="135000"/>
+              </a:lnSpc>
+            </a:pPr>
+            <a:r>
+              <a:rPr sz="1200" b="0" i="0">
+                <a:solidFill>
+                  <a:srgbClr val="6E7175"/>
+                </a:solidFill>
+                <a:latin typeface="Verdana"/>
+              </a:rPr>
+              <a:t>18</a:t>
+            </a:r>
+          </a:p>
+        </p:txBody>
+      </p:sp>
+      <p:sp>
+        <p:nvSpPr>
+          <p:cNvPr id="5" name="TextBox 4"/>
+          <p:cNvSpPr txBox="1"/>
+          <p:nvPr/>
+        </p:nvSpPr>
+        <p:spPr>
+          <a:xfrm>
+            <a:off x="566928" y="420624"/>
+            <a:ext cx="11057839" cy="237744"/>
+          </a:xfrm>
+          <a:prstGeom prst="rect">
+            <a:avLst/>
+          </a:prstGeom>
+          <a:noFill/>
+        </p:spPr>
+        <p:txBody>
+          <a:bodyPr wrap="square" lIns="0" rIns="0" tIns="0" bIns="0" anchor="t">
+            <a:spAutoFit/>
+          </a:bodyPr>
+          <a:lstStyle/>
+          <a:p>
+            <a:pPr algn="l">
+              <a:lnSpc>
+                <a:spcPct val="135000"/>
+              </a:lnSpc>
+            </a:pPr>
+            <a:r>
+              <a:rPr sz="1300" b="1" i="0" spc="156">
+                <a:solidFill>
+                  <a:srgbClr val="6B4FBB"/>
+                </a:solidFill>
+                <a:latin typeface="Verdana"/>
+              </a:rPr>
+              <a:t>LE PIÈGE DE « VERGLAS »</a:t>
+            </a:r>
+          </a:p>
+        </p:txBody>
+      </p:sp>
+      <p:sp>
+        <p:nvSpPr>
+          <p:cNvPr id="6" name="TextBox 5"/>
+          <p:cNvSpPr txBox="1"/>
+          <p:nvPr/>
+        </p:nvSpPr>
+        <p:spPr>
+          <a:xfrm>
+            <a:off x="566928" y="749808"/>
+            <a:ext cx="11057839" cy="877824"/>
+          </a:xfrm>
+          <a:prstGeom prst="rect">
+            <a:avLst/>
+          </a:prstGeom>
+          <a:noFill/>
+        </p:spPr>
+        <p:txBody>
+          <a:bodyPr wrap="square" lIns="0" rIns="0" tIns="0" bIns="0" anchor="t">
+            <a:spAutoFit/>
+          </a:bodyPr>
+          <a:lstStyle/>
+          <a:p>
+            <a:pPr algn="l">
+              <a:lnSpc>
+                <a:spcPct val="115000"/>
+              </a:lnSpc>
+            </a:pPr>
+            <a:r>
+              <a:rPr sz="3400" b="1" i="0">
+                <a:solidFill>
+                  <a:srgbClr val="17181A"/>
+                </a:solidFill>
+                <a:latin typeface="Verdana"/>
+              </a:rPr>
+              <a:t>Le piège le plus fréquent</a:t>
+            </a:r>
+          </a:p>
+        </p:txBody>
+      </p:sp>
+      <p:sp>
+        <p:nvSpPr>
+          <p:cNvPr id="7" name="Rounded Rectangle 6"/>
+          <p:cNvSpPr/>
+          <p:nvPr/>
+        </p:nvSpPr>
+        <p:spPr>
+          <a:xfrm>
+            <a:off x="566928" y="1856232"/>
+            <a:ext cx="5428335" cy="2331720"/>
+          </a:xfrm>
+          <a:prstGeom prst="roundRect">
+            <a:avLst>
+              <a:gd name="adj" fmla="val 6274"/>
+            </a:avLst>
+          </a:prstGeom>
+          <a:solidFill>
+            <a:srgbClr val="FFF6F5"/>
+          </a:solidFill>
+          <a:ln w="12700">
+            <a:solidFill>
+              <a:srgbClr val="DC2626"/>
+            </a:solidFill>
+          </a:ln>
+          <a:effectLst/>
+        </p:spPr>
+        <p:style>
+          <a:lnRef idx="1">
+            <a:schemeClr val="accent1"/>
+          </a:lnRef>
+          <a:fillRef idx="3">
+            <a:schemeClr val="accent1"/>
+          </a:fillRef>
+          <a:effectRef idx="2">
+            <a:schemeClr val="accent1"/>
+          </a:effectRef>
+          <a:fontRef idx="minor">
+            <a:schemeClr val="lt1"/>
+          </a:fontRef>
+        </p:style>
+        <p:txBody>
+          <a:bodyPr rtlCol="0" anchor="ctr"/>
+          <a:lstStyle/>
+          <a:p/>
+        </p:txBody>
+      </p:sp>
+      <p:sp>
+        <p:nvSpPr>
+          <p:cNvPr id="8" name="TextBox 7"/>
+          <p:cNvSpPr txBox="1"/>
+          <p:nvPr/>
+        </p:nvSpPr>
+        <p:spPr>
+          <a:xfrm>
+            <a:off x="932688" y="2130552"/>
+            <a:ext cx="4696815" cy="274320"/>
+          </a:xfrm>
+          <a:prstGeom prst="rect">
+            <a:avLst/>
+          </a:prstGeom>
+          <a:noFill/>
+        </p:spPr>
+        <p:txBody>
+          <a:bodyPr wrap="square" lIns="0" rIns="0" tIns="0" bIns="0" anchor="t">
+            <a:spAutoFit/>
+          </a:bodyPr>
+          <a:lstStyle/>
+          <a:p>
+            <a:pPr algn="l">
+              <a:lnSpc>
+                <a:spcPct val="135000"/>
+              </a:lnSpc>
+            </a:pPr>
+            <a:r>
+              <a:rPr sz="1300" b="1" i="0" spc="156">
+                <a:solidFill>
+                  <a:srgbClr val="B91C1C"/>
+                </a:solidFill>
+                <a:latin typeface="Verdana"/>
+              </a:rPr>
+              <a:t>ON ENTEND SOUVENT</a:t>
+            </a:r>
+          </a:p>
+        </p:txBody>
+      </p:sp>
+      <p:sp>
+        <p:nvSpPr>
+          <p:cNvPr id="9" name="TextBox 8"/>
+          <p:cNvSpPr txBox="1"/>
+          <p:nvPr/>
+        </p:nvSpPr>
+        <p:spPr>
+          <a:xfrm>
+            <a:off x="932688" y="2569464"/>
+            <a:ext cx="4696815" cy="1417320"/>
+          </a:xfrm>
+          <a:prstGeom prst="rect">
+            <a:avLst/>
+          </a:prstGeom>
+          <a:noFill/>
+        </p:spPr>
+        <p:txBody>
+          <a:bodyPr wrap="square" lIns="0" rIns="0" tIns="0" bIns="0" anchor="t">
+            <a:spAutoFit/>
+          </a:bodyPr>
+          <a:lstStyle/>
+          <a:p>
+            <a:pPr algn="l">
+              <a:lnSpc>
+                <a:spcPct val="130000"/>
+              </a:lnSpc>
+            </a:pPr>
+            <a:r>
+              <a:rPr sz="2500" b="1" i="0">
+                <a:solidFill>
+                  <a:srgbClr val="17181A"/>
+                </a:solidFill>
+                <a:latin typeface="Verdana"/>
+              </a:rPr>
+              <a:t>vé-glas, avec le son « é »</a:t>
+            </a:r>
+          </a:p>
+        </p:txBody>
+      </p:sp>
+      <p:sp>
+        <p:nvSpPr>
+          <p:cNvPr id="10" name="Rounded Rectangle 9"/>
+          <p:cNvSpPr/>
+          <p:nvPr/>
+        </p:nvSpPr>
+        <p:spPr>
+          <a:xfrm>
+            <a:off x="6196431" y="1856232"/>
+            <a:ext cx="5428335" cy="2331720"/>
+          </a:xfrm>
+          <a:prstGeom prst="roundRect">
+            <a:avLst>
+              <a:gd name="adj" fmla="val 6274"/>
+            </a:avLst>
+          </a:prstGeom>
+          <a:solidFill>
+            <a:srgbClr val="E6F5EE"/>
+          </a:solidFill>
+          <a:ln w="12700">
+            <a:solidFill>
+              <a:srgbClr val="0A8F5B"/>
+            </a:solidFill>
+          </a:ln>
+          <a:effectLst/>
+        </p:spPr>
+        <p:style>
+          <a:lnRef idx="1">
+            <a:schemeClr val="accent1"/>
+          </a:lnRef>
+          <a:fillRef idx="3">
+            <a:schemeClr val="accent1"/>
+          </a:fillRef>
+          <a:effectRef idx="2">
+            <a:schemeClr val="accent1"/>
+          </a:effectRef>
+          <a:fontRef idx="minor">
+            <a:schemeClr val="lt1"/>
+          </a:fontRef>
+        </p:style>
+        <p:txBody>
+          <a:bodyPr rtlCol="0" anchor="ctr"/>
+          <a:lstStyle/>
+          <a:p/>
+        </p:txBody>
+      </p:sp>
+      <p:sp>
+        <p:nvSpPr>
+          <p:cNvPr id="11" name="TextBox 10"/>
+          <p:cNvSpPr txBox="1"/>
+          <p:nvPr/>
+        </p:nvSpPr>
+        <p:spPr>
+          <a:xfrm>
+            <a:off x="6562191" y="2130552"/>
+            <a:ext cx="4696815" cy="274320"/>
+          </a:xfrm>
+          <a:prstGeom prst="rect">
+            <a:avLst/>
+          </a:prstGeom>
+          <a:noFill/>
+        </p:spPr>
+        <p:txBody>
+          <a:bodyPr wrap="square" lIns="0" rIns="0" tIns="0" bIns="0" anchor="t">
+            <a:spAutoFit/>
+          </a:bodyPr>
+          <a:lstStyle/>
+          <a:p>
+            <a:pPr algn="l">
+              <a:lnSpc>
+                <a:spcPct val="135000"/>
+              </a:lnSpc>
+            </a:pPr>
+            <a:r>
+              <a:rPr sz="1300" b="1" i="0" spc="156">
+                <a:solidFill>
+                  <a:srgbClr val="07734A"/>
+                </a:solidFill>
+                <a:latin typeface="Verdana"/>
+              </a:rPr>
+              <a:t>IL FAUT DIRE PLUTÔT</a:t>
+            </a:r>
+          </a:p>
+        </p:txBody>
+      </p:sp>
+      <p:sp>
+        <p:nvSpPr>
+          <p:cNvPr id="12" name="TextBox 11"/>
+          <p:cNvSpPr txBox="1"/>
+          <p:nvPr/>
+        </p:nvSpPr>
+        <p:spPr>
+          <a:xfrm>
+            <a:off x="6562191" y="2569464"/>
+            <a:ext cx="4696815" cy="1417320"/>
+          </a:xfrm>
+          <a:prstGeom prst="rect">
+            <a:avLst/>
+          </a:prstGeom>
+          <a:noFill/>
+        </p:spPr>
+        <p:txBody>
+          <a:bodyPr wrap="square" lIns="0" rIns="0" tIns="0" bIns="0" anchor="t">
+            <a:spAutoFit/>
+          </a:bodyPr>
+          <a:lstStyle/>
+          <a:p>
+            <a:pPr algn="l">
+              <a:lnSpc>
+                <a:spcPct val="130000"/>
+              </a:lnSpc>
+            </a:pPr>
+            <a:r>
+              <a:rPr sz="2500" b="1" i="0">
+                <a:solidFill>
+                  <a:srgbClr val="17181A"/>
+                </a:solidFill>
+                <a:latin typeface="Verdana"/>
+              </a:rPr>
+              <a:t>ver-glas — le son « è », parce que le e est suivi de deux consonnes</a:t>
+            </a:r>
+          </a:p>
+        </p:txBody>
+      </p:sp>
+      <p:sp>
+        <p:nvSpPr>
+          <p:cNvPr id="13" name="Rounded Rectangle 12"/>
+          <p:cNvSpPr/>
+          <p:nvPr/>
+        </p:nvSpPr>
+        <p:spPr>
+          <a:xfrm>
+            <a:off x="566928" y="4462272"/>
+            <a:ext cx="11057839" cy="1618487"/>
+          </a:xfrm>
+          <a:prstGeom prst="roundRect">
+            <a:avLst>
+              <a:gd name="adj" fmla="val 9039"/>
+            </a:avLst>
+          </a:prstGeom>
+          <a:solidFill>
+            <a:srgbClr val="FFFFFF"/>
+          </a:solidFill>
+          <a:ln w="12700">
+            <a:solidFill>
+              <a:srgbClr val="EAEAE8"/>
+            </a:solidFill>
+          </a:ln>
+          <a:effectLst/>
+        </p:spPr>
+        <p:style>
+          <a:lnRef idx="1">
+            <a:schemeClr val="accent1"/>
+          </a:lnRef>
+          <a:fillRef idx="3">
+            <a:schemeClr val="accent1"/>
+          </a:fillRef>
+          <a:effectRef idx="2">
+            <a:schemeClr val="accent1"/>
+          </a:effectRef>
+          <a:fontRef idx="minor">
+            <a:schemeClr val="lt1"/>
+          </a:fontRef>
+        </p:style>
+        <p:txBody>
+          <a:bodyPr rtlCol="0" anchor="ctr"/>
+          <a:lstStyle/>
+          <a:p/>
+        </p:txBody>
+      </p:sp>
+      <p:sp>
+        <p:nvSpPr>
+          <p:cNvPr id="14" name="TextBox 13"/>
+          <p:cNvSpPr txBox="1"/>
+          <p:nvPr/>
+        </p:nvSpPr>
+        <p:spPr>
+          <a:xfrm>
+            <a:off x="969264" y="4736592"/>
+            <a:ext cx="10234879" cy="1150620"/>
+          </a:xfrm>
+          <a:prstGeom prst="rect">
+            <a:avLst/>
+          </a:prstGeom>
+          <a:noFill/>
+        </p:spPr>
+        <p:txBody>
+          <a:bodyPr wrap="square" lIns="0" rIns="0" tIns="0" bIns="0" anchor="t">
+            <a:spAutoFit/>
+          </a:bodyPr>
+          <a:lstStyle/>
+          <a:p>
+            <a:pPr algn="l">
+              <a:lnSpc>
+                <a:spcPct val="145000"/>
+              </a:lnSpc>
+            </a:pPr>
+            <a:r>
+              <a:rPr sz="2000" b="0" i="0">
+                <a:solidFill>
+                  <a:srgbClr val="4B4F52"/>
+                </a:solidFill>
+                <a:latin typeface="Verdana"/>
+              </a:rPr>
+              <a:t>Sans accent écrit, on croit lire un « é ». Mais un e suivi de deux consonnes se dit « è » : verglas, personne, averse. C'est une règle qui se voit à l'œil, sans avoir à connaître le mot.</a:t>
+            </a:r>
+          </a:p>
+        </p:txBody>
+      </p:sp>
+    </p:spTree>
+  </p:cSld>
+  <p:clrMapOvr>
+    <a:masterClrMapping/>
+  </p:clrMapOvr>
+</p:sld>
+</file>
+
+<file path=ppt/slides/slide19.xml><?xml version="1.0" encoding="utf-8"?>
+<p:sld xmlns:a="http://schemas.openxmlformats.org/drawingml/2006/main" xmlns:p="http://schemas.openxmlformats.org/presentationml/2006/main" xmlns:r="http://schemas.openxmlformats.org/officeDocument/2006/relationships">
+  <p:cSld>
+    <p:spTree>
+      <p:nvGrpSpPr>
+        <p:cNvPr id="1" name=""/>
+        <p:cNvGrpSpPr/>
+        <p:nvPr/>
+      </p:nvGrpSpPr>
+      <p:grpSpPr/>
+      <p:sp>
+        <p:nvSpPr>
+          <p:cNvPr id="2" name="Rectangle 1"/>
+          <p:cNvSpPr/>
+          <p:nvPr/>
+        </p:nvSpPr>
+        <p:spPr>
+          <a:xfrm>
+            <a:off x="0" y="0"/>
+            <a:ext cx="12191695" cy="6858000"/>
+          </a:xfrm>
+          <a:prstGeom prst="rect">
+            <a:avLst/>
+          </a:prstGeom>
+          <a:solidFill>
+            <a:srgbClr val="F7F7F5"/>
+          </a:solidFill>
+          <a:ln>
+            <a:noFill/>
+          </a:ln>
+          <a:effectLst/>
+        </p:spPr>
+        <p:style>
+          <a:lnRef idx="1">
+            <a:schemeClr val="accent1"/>
+          </a:lnRef>
+          <a:fillRef idx="3">
+            <a:schemeClr val="accent1"/>
+          </a:fillRef>
+          <a:effectRef idx="2">
+            <a:schemeClr val="accent1"/>
+          </a:effectRef>
+          <a:fontRef idx="minor">
+            <a:schemeClr val="lt1"/>
+          </a:fontRef>
+        </p:style>
+        <p:txBody>
+          <a:bodyPr rtlCol="0" anchor="ctr"/>
+          <a:lstStyle/>
+          <a:p/>
+        </p:txBody>
+      </p:sp>
+      <p:sp>
+        <p:nvSpPr>
+          <p:cNvPr id="3" name="TextBox 2"/>
+          <p:cNvSpPr txBox="1"/>
+          <p:nvPr/>
+        </p:nvSpPr>
+        <p:spPr>
+          <a:xfrm>
+            <a:off x="566928" y="6355080"/>
+            <a:ext cx="6400800" cy="219456"/>
+          </a:xfrm>
+          <a:prstGeom prst="rect">
+            <a:avLst/>
+          </a:prstGeom>
+          <a:noFill/>
+        </p:spPr>
+        <p:txBody>
+          <a:bodyPr wrap="square" lIns="0" rIns="0" tIns="0" bIns="0" anchor="t">
+            <a:spAutoFit/>
+          </a:bodyPr>
+          <a:lstStyle/>
+          <a:p>
+            <a:pPr algn="l">
+              <a:lnSpc>
+                <a:spcPct val="135000"/>
+              </a:lnSpc>
+            </a:pPr>
+            <a:r>
+              <a:rPr sz="1200" b="0" i="0">
+                <a:solidFill>
+                  <a:srgbClr val="6E7175"/>
+                </a:solidFill>
+                <a:latin typeface="Verdana"/>
+              </a:rPr>
+              <a:t>A2 · Quelles sont les prévisions ?</a:t>
+            </a:r>
+          </a:p>
+        </p:txBody>
+      </p:sp>
+      <p:sp>
+        <p:nvSpPr>
+          <p:cNvPr id="4" name="TextBox 3"/>
+          <p:cNvSpPr txBox="1"/>
+          <p:nvPr/>
+        </p:nvSpPr>
+        <p:spPr>
+          <a:xfrm>
+            <a:off x="10710367" y="6355080"/>
+            <a:ext cx="914400" cy="219456"/>
+          </a:xfrm>
+          <a:prstGeom prst="rect">
+            <a:avLst/>
+          </a:prstGeom>
+          <a:noFill/>
+        </p:spPr>
+        <p:txBody>
+          <a:bodyPr wrap="square" lIns="0" rIns="0" tIns="0" bIns="0" anchor="t">
+            <a:spAutoFit/>
+          </a:bodyPr>
+          <a:lstStyle/>
+          <a:p>
+            <a:pPr algn="r">
+              <a:lnSpc>
+                <a:spcPct val="135000"/>
+              </a:lnSpc>
+            </a:pPr>
+            <a:r>
+              <a:rPr sz="1200" b="0" i="0">
+                <a:solidFill>
+                  <a:srgbClr val="6E7175"/>
+                </a:solidFill>
+                <a:latin typeface="Verdana"/>
+              </a:rPr>
+              <a:t>19</a:t>
+            </a:r>
+          </a:p>
+        </p:txBody>
+      </p:sp>
+      <p:sp>
+        <p:nvSpPr>
+          <p:cNvPr id="5" name="TextBox 4"/>
+          <p:cNvSpPr txBox="1"/>
+          <p:nvPr/>
+        </p:nvSpPr>
+        <p:spPr>
+          <a:xfrm>
+            <a:off x="566928" y="420624"/>
+            <a:ext cx="11057839" cy="237744"/>
+          </a:xfrm>
+          <a:prstGeom prst="rect">
+            <a:avLst/>
+          </a:prstGeom>
+          <a:noFill/>
+        </p:spPr>
+        <p:txBody>
+          <a:bodyPr wrap="square" lIns="0" rIns="0" tIns="0" bIns="0" anchor="t">
+            <a:spAutoFit/>
+          </a:bodyPr>
+          <a:lstStyle/>
+          <a:p>
+            <a:pPr algn="l">
+              <a:lnSpc>
+                <a:spcPct val="135000"/>
+              </a:lnSpc>
+            </a:pPr>
+            <a:r>
+              <a:rPr sz="1300" b="1" i="0" spc="156">
+                <a:solidFill>
+                  <a:srgbClr val="6B4FBB"/>
+                </a:solidFill>
+                <a:latin typeface="Verdana"/>
+              </a:rPr>
+              <a:t>PRATIQUE · 5 DE 6</a:t>
+            </a:r>
+          </a:p>
+        </p:txBody>
+      </p:sp>
+      <p:sp>
+        <p:nvSpPr>
+          <p:cNvPr id="6" name="TextBox 5"/>
+          <p:cNvSpPr txBox="1"/>
+          <p:nvPr/>
+        </p:nvSpPr>
+        <p:spPr>
+          <a:xfrm>
+            <a:off x="566928" y="749808"/>
+            <a:ext cx="11057839" cy="877824"/>
+          </a:xfrm>
+          <a:prstGeom prst="rect">
+            <a:avLst/>
+          </a:prstGeom>
+          <a:noFill/>
+        </p:spPr>
+        <p:txBody>
+          <a:bodyPr wrap="square" lIns="0" rIns="0" tIns="0" bIns="0" anchor="t">
+            <a:spAutoFit/>
+          </a:bodyPr>
+          <a:lstStyle/>
+          <a:p>
+            <a:pPr algn="l">
+              <a:lnSpc>
+                <a:spcPct val="115000"/>
+              </a:lnSpc>
+            </a:pPr>
+            <a:r>
+              <a:rPr sz="3400" b="1" i="0">
+                <a:solidFill>
+                  <a:srgbClr val="17181A"/>
+                </a:solidFill>
+                <a:latin typeface="Verdana"/>
+              </a:rPr>
+              <a:t>Quel son entendez-vous ?</a:t>
+            </a:r>
+          </a:p>
+        </p:txBody>
+      </p:sp>
+      <p:sp>
+        <p:nvSpPr>
+          <p:cNvPr id="7" name="TextBox 6"/>
+          <p:cNvSpPr txBox="1"/>
+          <p:nvPr/>
+        </p:nvSpPr>
+        <p:spPr>
+          <a:xfrm>
+            <a:off x="566928" y="1645920"/>
+            <a:ext cx="11057839" cy="329184"/>
+          </a:xfrm>
+          <a:prstGeom prst="rect">
+            <a:avLst/>
+          </a:prstGeom>
+          <a:noFill/>
+        </p:spPr>
+        <p:txBody>
+          <a:bodyPr wrap="square" lIns="0" rIns="0" tIns="0" bIns="0" anchor="t">
+            <a:spAutoFit/>
+          </a:bodyPr>
+          <a:lstStyle/>
+          <a:p>
+            <a:pPr algn="l">
+              <a:lnSpc>
+                <a:spcPct val="135000"/>
+              </a:lnSpc>
+            </a:pPr>
+            <a:r>
+              <a:rPr sz="1800" b="0" i="0">
+                <a:solidFill>
+                  <a:srgbClr val="6E7175"/>
+                </a:solidFill>
+                <a:latin typeface="Verdana"/>
+              </a:rPr>
+              <a:t>Écoutez le mot, écrivez « é » ou « è ».</a:t>
+            </a:r>
+          </a:p>
+        </p:txBody>
+      </p:sp>
+      <p:sp>
+        <p:nvSpPr>
+          <p:cNvPr id="8" name="Rounded Rectangle 7"/>
+          <p:cNvSpPr/>
+          <p:nvPr/>
+        </p:nvSpPr>
+        <p:spPr>
+          <a:xfrm>
+            <a:off x="566928" y="2139696"/>
+            <a:ext cx="5464911" cy="648716"/>
+          </a:xfrm>
+          <a:prstGeom prst="roundRect">
+            <a:avLst>
+              <a:gd name="adj" fmla="val 22552"/>
+            </a:avLst>
+          </a:prstGeom>
+          <a:solidFill>
+            <a:srgbClr val="FFFFFF"/>
+          </a:solidFill>
+          <a:ln w="12700">
+            <a:solidFill>
+              <a:srgbClr val="EAEAE8"/>
+            </a:solidFill>
+          </a:ln>
+          <a:effectLst/>
+        </p:spPr>
+        <p:style>
+          <a:lnRef idx="1">
+            <a:schemeClr val="accent1"/>
+          </a:lnRef>
+          <a:fillRef idx="3">
+            <a:schemeClr val="accent1"/>
+          </a:fillRef>
+          <a:effectRef idx="2">
+            <a:schemeClr val="accent1"/>
+          </a:effectRef>
+          <a:fontRef idx="minor">
+            <a:schemeClr val="lt1"/>
+          </a:fontRef>
+        </p:style>
+        <p:txBody>
+          <a:bodyPr rtlCol="0" anchor="ctr"/>
+          <a:lstStyle/>
+          <a:p/>
+        </p:txBody>
+      </p:sp>
+      <p:sp>
+        <p:nvSpPr>
+          <p:cNvPr id="9" name="Rounded Rectangle 8"/>
+          <p:cNvSpPr/>
+          <p:nvPr/>
+        </p:nvSpPr>
+        <p:spPr>
+          <a:xfrm>
+            <a:off x="841247" y="2281174"/>
+            <a:ext cx="365760" cy="365760"/>
+          </a:xfrm>
+          <a:prstGeom prst="roundRect">
+            <a:avLst>
+              <a:gd name="adj" fmla="val 32500"/>
+            </a:avLst>
+          </a:prstGeom>
+          <a:solidFill>
+            <a:srgbClr val="EFEAFA"/>
+          </a:solidFill>
+          <a:ln>
+            <a:noFill/>
+          </a:ln>
+          <a:effectLst/>
+        </p:spPr>
+        <p:style>
+          <a:lnRef idx="1">
+            <a:schemeClr val="accent1"/>
+          </a:lnRef>
+          <a:fillRef idx="3">
+            <a:schemeClr val="accent1"/>
+          </a:fillRef>
+          <a:effectRef idx="2">
+            <a:schemeClr val="accent1"/>
+          </a:effectRef>
+          <a:fontRef idx="minor">
+            <a:schemeClr val="lt1"/>
+          </a:fontRef>
+        </p:style>
+        <p:txBody>
+          <a:bodyPr rtlCol="0" anchor="ctr"/>
+          <a:lstStyle/>
+          <a:p/>
+        </p:txBody>
+      </p:sp>
+      <p:sp>
+        <p:nvSpPr>
+          <p:cNvPr id="10" name="TextBox 9"/>
+          <p:cNvSpPr txBox="1"/>
+          <p:nvPr/>
+        </p:nvSpPr>
+        <p:spPr>
+          <a:xfrm>
+            <a:off x="841247" y="2345182"/>
+            <a:ext cx="365760" cy="256032"/>
+          </a:xfrm>
+          <a:prstGeom prst="rect">
+            <a:avLst/>
+          </a:prstGeom>
+          <a:noFill/>
+        </p:spPr>
+        <p:txBody>
+          <a:bodyPr wrap="square" lIns="0" rIns="0" tIns="0" bIns="0" anchor="t">
+            <a:spAutoFit/>
+          </a:bodyPr>
+          <a:lstStyle/>
+          <a:p>
+            <a:pPr algn="ctr">
+              <a:lnSpc>
+                <a:spcPct val="135000"/>
+              </a:lnSpc>
+            </a:pPr>
+            <a:r>
+              <a:rPr sz="1500" b="1" i="0">
+                <a:solidFill>
+                  <a:srgbClr val="6B4FBB"/>
+                </a:solidFill>
+                <a:latin typeface="Verdana"/>
+              </a:rPr>
+              <a:t>1</a:t>
+            </a:r>
+          </a:p>
+        </p:txBody>
+      </p:sp>
+      <p:sp>
+        <p:nvSpPr>
+          <p:cNvPr id="11" name="TextBox 10"/>
+          <p:cNvSpPr txBox="1"/>
+          <p:nvPr/>
+        </p:nvSpPr>
+        <p:spPr>
+          <a:xfrm>
+            <a:off x="1344168" y="2295144"/>
+            <a:ext cx="4504791" cy="374396"/>
+          </a:xfrm>
+          <a:prstGeom prst="rect">
+            <a:avLst/>
+          </a:prstGeom>
+          <a:noFill/>
+        </p:spPr>
+        <p:txBody>
+          <a:bodyPr wrap="square" lIns="0" rIns="0" tIns="0" bIns="0" anchor="t">
+            <a:spAutoFit/>
+          </a:bodyPr>
+          <a:lstStyle/>
+          <a:p>
+            <a:pPr algn="l">
+              <a:lnSpc>
+                <a:spcPct val="140000"/>
+              </a:lnSpc>
+            </a:pPr>
+            <a:r>
+              <a:rPr sz="1900" b="0" i="0">
+                <a:solidFill>
+                  <a:srgbClr val="3A3D40"/>
+                </a:solidFill>
+                <a:latin typeface="Verdana"/>
+              </a:rPr>
+              <a:t>météo</a:t>
+            </a:r>
+          </a:p>
+        </p:txBody>
+      </p:sp>
+      <p:sp>
+        <p:nvSpPr>
+          <p:cNvPr id="12" name="Rounded Rectangle 11"/>
+          <p:cNvSpPr/>
+          <p:nvPr/>
+        </p:nvSpPr>
+        <p:spPr>
+          <a:xfrm>
+            <a:off x="6159855" y="2139696"/>
+            <a:ext cx="5464911" cy="648716"/>
+          </a:xfrm>
+          <a:prstGeom prst="roundRect">
+            <a:avLst>
+              <a:gd name="adj" fmla="val 22552"/>
+            </a:avLst>
+          </a:prstGeom>
+          <a:solidFill>
+            <a:srgbClr val="FFFFFF"/>
+          </a:solidFill>
+          <a:ln w="12700">
+            <a:solidFill>
+              <a:srgbClr val="EAEAE8"/>
+            </a:solidFill>
+          </a:ln>
+          <a:effectLst/>
+        </p:spPr>
+        <p:style>
+          <a:lnRef idx="1">
+            <a:schemeClr val="accent1"/>
+          </a:lnRef>
+          <a:fillRef idx="3">
+            <a:schemeClr val="accent1"/>
+          </a:fillRef>
+          <a:effectRef idx="2">
+            <a:schemeClr val="accent1"/>
+          </a:effectRef>
+          <a:fontRef idx="minor">
+            <a:schemeClr val="lt1"/>
+          </a:fontRef>
+        </p:style>
+        <p:txBody>
+          <a:bodyPr rtlCol="0" anchor="ctr"/>
+          <a:lstStyle/>
+          <a:p/>
+        </p:txBody>
+      </p:sp>
+      <p:sp>
+        <p:nvSpPr>
+          <p:cNvPr id="13" name="Rounded Rectangle 12"/>
+          <p:cNvSpPr/>
+          <p:nvPr/>
+        </p:nvSpPr>
+        <p:spPr>
+          <a:xfrm>
+            <a:off x="6434175" y="2281174"/>
+            <a:ext cx="365760" cy="365760"/>
+          </a:xfrm>
+          <a:prstGeom prst="roundRect">
+            <a:avLst>
+              <a:gd name="adj" fmla="val 32500"/>
+            </a:avLst>
+          </a:prstGeom>
+          <a:solidFill>
+            <a:srgbClr val="EFEAFA"/>
+          </a:solidFill>
+          <a:ln>
+            <a:noFill/>
+          </a:ln>
+          <a:effectLst/>
+        </p:spPr>
+        <p:style>
+          <a:lnRef idx="1">
+            <a:schemeClr val="accent1"/>
+          </a:lnRef>
+          <a:fillRef idx="3">
+            <a:schemeClr val="accent1"/>
+          </a:fillRef>
+          <a:effectRef idx="2">
+            <a:schemeClr val="accent1"/>
+          </a:effectRef>
+          <a:fontRef idx="minor">
+            <a:schemeClr val="lt1"/>
+          </a:fontRef>
+        </p:style>
+        <p:txBody>
+          <a:bodyPr rtlCol="0" anchor="ctr"/>
+          <a:lstStyle/>
+          <a:p/>
+        </p:txBody>
+      </p:sp>
+      <p:sp>
+        <p:nvSpPr>
+          <p:cNvPr id="14" name="TextBox 13"/>
+          <p:cNvSpPr txBox="1"/>
+          <p:nvPr/>
+        </p:nvSpPr>
+        <p:spPr>
+          <a:xfrm>
+            <a:off x="6434175" y="2345182"/>
+            <a:ext cx="365760" cy="256032"/>
+          </a:xfrm>
+          <a:prstGeom prst="rect">
+            <a:avLst/>
+          </a:prstGeom>
+          <a:noFill/>
+        </p:spPr>
+        <p:txBody>
+          <a:bodyPr wrap="square" lIns="0" rIns="0" tIns="0" bIns="0" anchor="t">
+            <a:spAutoFit/>
+          </a:bodyPr>
+          <a:lstStyle/>
+          <a:p>
+            <a:pPr algn="ctr">
+              <a:lnSpc>
+                <a:spcPct val="135000"/>
+              </a:lnSpc>
+            </a:pPr>
+            <a:r>
+              <a:rPr sz="1500" b="1" i="0">
+                <a:solidFill>
+                  <a:srgbClr val="6B4FBB"/>
+                </a:solidFill>
+                <a:latin typeface="Verdana"/>
+              </a:rPr>
+              <a:t>2</a:t>
+            </a:r>
+          </a:p>
+        </p:txBody>
+      </p:sp>
+      <p:sp>
+        <p:nvSpPr>
+          <p:cNvPr id="15" name="TextBox 14"/>
+          <p:cNvSpPr txBox="1"/>
+          <p:nvPr/>
+        </p:nvSpPr>
+        <p:spPr>
+          <a:xfrm>
+            <a:off x="6937095" y="2295144"/>
+            <a:ext cx="4504791" cy="374396"/>
+          </a:xfrm>
+          <a:prstGeom prst="rect">
+            <a:avLst/>
+          </a:prstGeom>
+          <a:noFill/>
+        </p:spPr>
+        <p:txBody>
+          <a:bodyPr wrap="square" lIns="0" rIns="0" tIns="0" bIns="0" anchor="t">
+            <a:spAutoFit/>
+          </a:bodyPr>
+          <a:lstStyle/>
+          <a:p>
+            <a:pPr algn="l">
+              <a:lnSpc>
+                <a:spcPct val="140000"/>
+              </a:lnSpc>
+            </a:pPr>
+            <a:r>
+              <a:rPr sz="1900" b="0" i="0">
+                <a:solidFill>
+                  <a:srgbClr val="3A3D40"/>
+                </a:solidFill>
+                <a:latin typeface="Verdana"/>
+              </a:rPr>
+              <a:t>mètres</a:t>
+            </a:r>
+          </a:p>
+        </p:txBody>
+      </p:sp>
+      <p:sp>
+        <p:nvSpPr>
+          <p:cNvPr id="16" name="Rounded Rectangle 15"/>
+          <p:cNvSpPr/>
+          <p:nvPr/>
+        </p:nvSpPr>
+        <p:spPr>
+          <a:xfrm>
+            <a:off x="566928" y="2916428"/>
+            <a:ext cx="5464911" cy="648716"/>
+          </a:xfrm>
+          <a:prstGeom prst="roundRect">
+            <a:avLst>
+              <a:gd name="adj" fmla="val 22552"/>
+            </a:avLst>
+          </a:prstGeom>
+          <a:solidFill>
+            <a:srgbClr val="FFFFFF"/>
+          </a:solidFill>
+          <a:ln w="12700">
+            <a:solidFill>
+              <a:srgbClr val="EAEAE8"/>
+            </a:solidFill>
+          </a:ln>
+          <a:effectLst/>
+        </p:spPr>
+        <p:style>
+          <a:lnRef idx="1">
+            <a:schemeClr val="accent1"/>
+          </a:lnRef>
+          <a:fillRef idx="3">
+            <a:schemeClr val="accent1"/>
+          </a:fillRef>
+          <a:effectRef idx="2">
+            <a:schemeClr val="accent1"/>
+          </a:effectRef>
+          <a:fontRef idx="minor">
+            <a:schemeClr val="lt1"/>
+          </a:fontRef>
+        </p:style>
+        <p:txBody>
+          <a:bodyPr rtlCol="0" anchor="ctr"/>
+          <a:lstStyle/>
+          <a:p/>
+        </p:txBody>
+      </p:sp>
+      <p:sp>
+        <p:nvSpPr>
+          <p:cNvPr id="17" name="Rounded Rectangle 16"/>
+          <p:cNvSpPr/>
+          <p:nvPr/>
+        </p:nvSpPr>
+        <p:spPr>
+          <a:xfrm>
+            <a:off x="841247" y="3057905"/>
+            <a:ext cx="365760" cy="365760"/>
+          </a:xfrm>
+          <a:prstGeom prst="roundRect">
+            <a:avLst>
+              <a:gd name="adj" fmla="val 32500"/>
+            </a:avLst>
+          </a:prstGeom>
+          <a:solidFill>
+            <a:srgbClr val="EFEAFA"/>
+          </a:solidFill>
+          <a:ln>
+            <a:noFill/>
+          </a:ln>
+          <a:effectLst/>
+        </p:spPr>
+        <p:style>
+          <a:lnRef idx="1">
+            <a:schemeClr val="accent1"/>
+          </a:lnRef>
+          <a:fillRef idx="3">
+            <a:schemeClr val="accent1"/>
+          </a:fillRef>
+          <a:effectRef idx="2">
+            <a:schemeClr val="accent1"/>
+          </a:effectRef>
+          <a:fontRef idx="minor">
+            <a:schemeClr val="lt1"/>
+          </a:fontRef>
+        </p:style>
+        <p:txBody>
+          <a:bodyPr rtlCol="0" anchor="ctr"/>
+          <a:lstStyle/>
+          <a:p/>
+        </p:txBody>
+      </p:sp>
+      <p:sp>
+        <p:nvSpPr>
+          <p:cNvPr id="18" name="TextBox 17"/>
+          <p:cNvSpPr txBox="1"/>
+          <p:nvPr/>
+        </p:nvSpPr>
+        <p:spPr>
+          <a:xfrm>
+            <a:off x="841247" y="3121913"/>
+            <a:ext cx="365760" cy="256032"/>
+          </a:xfrm>
+          <a:prstGeom prst="rect">
+            <a:avLst/>
+          </a:prstGeom>
+          <a:noFill/>
+        </p:spPr>
+        <p:txBody>
+          <a:bodyPr wrap="square" lIns="0" rIns="0" tIns="0" bIns="0" anchor="t">
+            <a:spAutoFit/>
+          </a:bodyPr>
+          <a:lstStyle/>
+          <a:p>
+            <a:pPr algn="ctr">
+              <a:lnSpc>
+                <a:spcPct val="135000"/>
+              </a:lnSpc>
+            </a:pPr>
+            <a:r>
+              <a:rPr sz="1500" b="1" i="0">
+                <a:solidFill>
+                  <a:srgbClr val="6B4FBB"/>
+                </a:solidFill>
+                <a:latin typeface="Verdana"/>
+              </a:rPr>
+              <a:t>3</a:t>
+            </a:r>
+          </a:p>
+        </p:txBody>
+      </p:sp>
+      <p:sp>
+        <p:nvSpPr>
+          <p:cNvPr id="19" name="TextBox 18"/>
+          <p:cNvSpPr txBox="1"/>
+          <p:nvPr/>
+        </p:nvSpPr>
+        <p:spPr>
+          <a:xfrm>
+            <a:off x="1344168" y="3071876"/>
+            <a:ext cx="4504791" cy="374396"/>
+          </a:xfrm>
+          <a:prstGeom prst="rect">
+            <a:avLst/>
+          </a:prstGeom>
+          <a:noFill/>
+        </p:spPr>
+        <p:txBody>
+          <a:bodyPr wrap="square" lIns="0" rIns="0" tIns="0" bIns="0" anchor="t">
+            <a:spAutoFit/>
+          </a:bodyPr>
+          <a:lstStyle/>
+          <a:p>
+            <a:pPr algn="l">
+              <a:lnSpc>
+                <a:spcPct val="140000"/>
+              </a:lnSpc>
+            </a:pPr>
+            <a:r>
+              <a:rPr sz="1900" b="0" i="0">
+                <a:solidFill>
+                  <a:srgbClr val="3A3D40"/>
+                </a:solidFill>
+                <a:latin typeface="Verdana"/>
+              </a:rPr>
+              <a:t>degrés</a:t>
+            </a:r>
+          </a:p>
+        </p:txBody>
+      </p:sp>
+      <p:sp>
+        <p:nvSpPr>
+          <p:cNvPr id="20" name="Rounded Rectangle 19"/>
+          <p:cNvSpPr/>
+          <p:nvPr/>
+        </p:nvSpPr>
+        <p:spPr>
+          <a:xfrm>
+            <a:off x="6159855" y="2916428"/>
+            <a:ext cx="5464911" cy="648716"/>
+          </a:xfrm>
+          <a:prstGeom prst="roundRect">
+            <a:avLst>
+              <a:gd name="adj" fmla="val 22552"/>
+            </a:avLst>
+          </a:prstGeom>
+          <a:solidFill>
+            <a:srgbClr val="FFFFFF"/>
+          </a:solidFill>
+          <a:ln w="12700">
+            <a:solidFill>
+              <a:srgbClr val="EAEAE8"/>
+            </a:solidFill>
+          </a:ln>
+          <a:effectLst/>
+        </p:spPr>
+        <p:style>
+          <a:lnRef idx="1">
+            <a:schemeClr val="accent1"/>
+          </a:lnRef>
+          <a:fillRef idx="3">
+            <a:schemeClr val="accent1"/>
+          </a:fillRef>
+          <a:effectRef idx="2">
+            <a:schemeClr val="accent1"/>
+          </a:effectRef>
+          <a:fontRef idx="minor">
+            <a:schemeClr val="lt1"/>
+          </a:fontRef>
+        </p:style>
+        <p:txBody>
+          <a:bodyPr rtlCol="0" anchor="ctr"/>
+          <a:lstStyle/>
+          <a:p/>
+        </p:txBody>
+      </p:sp>
+      <p:sp>
+        <p:nvSpPr>
+          <p:cNvPr id="21" name="Rounded Rectangle 20"/>
+          <p:cNvSpPr/>
+          <p:nvPr/>
+        </p:nvSpPr>
+        <p:spPr>
+          <a:xfrm>
+            <a:off x="6434175" y="3057905"/>
+            <a:ext cx="365760" cy="365760"/>
+          </a:xfrm>
+          <a:prstGeom prst="roundRect">
+            <a:avLst>
+              <a:gd name="adj" fmla="val 32500"/>
+            </a:avLst>
+          </a:prstGeom>
+          <a:solidFill>
+            <a:srgbClr val="EFEAFA"/>
+          </a:solidFill>
+          <a:ln>
+            <a:noFill/>
+          </a:ln>
+          <a:effectLst/>
+        </p:spPr>
+        <p:style>
+          <a:lnRef idx="1">
+            <a:schemeClr val="accent1"/>
+          </a:lnRef>
+          <a:fillRef idx="3">
+            <a:schemeClr val="accent1"/>
+          </a:fillRef>
+          <a:effectRef idx="2">
+            <a:schemeClr val="accent1"/>
+          </a:effectRef>
+          <a:fontRef idx="minor">
+            <a:schemeClr val="lt1"/>
+          </a:fontRef>
+        </p:style>
+        <p:txBody>
+          <a:bodyPr rtlCol="0" anchor="ctr"/>
+          <a:lstStyle/>
+          <a:p/>
+        </p:txBody>
+      </p:sp>
+      <p:sp>
+        <p:nvSpPr>
+          <p:cNvPr id="22" name="TextBox 21"/>
+          <p:cNvSpPr txBox="1"/>
+          <p:nvPr/>
+        </p:nvSpPr>
+        <p:spPr>
+          <a:xfrm>
+            <a:off x="6434175" y="3121913"/>
+            <a:ext cx="365760" cy="256032"/>
+          </a:xfrm>
+          <a:prstGeom prst="rect">
+            <a:avLst/>
+          </a:prstGeom>
+          <a:noFill/>
+        </p:spPr>
+        <p:txBody>
+          <a:bodyPr wrap="square" lIns="0" rIns="0" tIns="0" bIns="0" anchor="t">
+            <a:spAutoFit/>
+          </a:bodyPr>
+          <a:lstStyle/>
+          <a:p>
+            <a:pPr algn="ctr">
+              <a:lnSpc>
+                <a:spcPct val="135000"/>
+              </a:lnSpc>
+            </a:pPr>
+            <a:r>
+              <a:rPr sz="1500" b="1" i="0">
+                <a:solidFill>
+                  <a:srgbClr val="6B4FBB"/>
+                </a:solidFill>
+                <a:latin typeface="Verdana"/>
+              </a:rPr>
+              <a:t>4</a:t>
+            </a:r>
+          </a:p>
+        </p:txBody>
+      </p:sp>
+      <p:sp>
+        <p:nvSpPr>
+          <p:cNvPr id="23" name="TextBox 22"/>
+          <p:cNvSpPr txBox="1"/>
+          <p:nvPr/>
+        </p:nvSpPr>
+        <p:spPr>
+          <a:xfrm>
+            <a:off x="6937095" y="3071876"/>
+            <a:ext cx="4504791" cy="374396"/>
+          </a:xfrm>
+          <a:prstGeom prst="rect">
+            <a:avLst/>
+          </a:prstGeom>
+          <a:noFill/>
+        </p:spPr>
+        <p:txBody>
+          <a:bodyPr wrap="square" lIns="0" rIns="0" tIns="0" bIns="0" anchor="t">
+            <a:spAutoFit/>
+          </a:bodyPr>
+          <a:lstStyle/>
+          <a:p>
+            <a:pPr algn="l">
+              <a:lnSpc>
+                <a:spcPct val="140000"/>
+              </a:lnSpc>
+            </a:pPr>
+            <a:r>
+              <a:rPr sz="1900" b="0" i="0">
+                <a:solidFill>
+                  <a:srgbClr val="3A3D40"/>
+                </a:solidFill>
+                <a:latin typeface="Verdana"/>
+              </a:rPr>
+              <a:t>neige</a:t>
+            </a:r>
+          </a:p>
+        </p:txBody>
+      </p:sp>
+      <p:sp>
+        <p:nvSpPr>
+          <p:cNvPr id="24" name="Rounded Rectangle 23"/>
+          <p:cNvSpPr/>
+          <p:nvPr/>
+        </p:nvSpPr>
+        <p:spPr>
+          <a:xfrm>
+            <a:off x="566928" y="3693160"/>
+            <a:ext cx="5464911" cy="648716"/>
+          </a:xfrm>
+          <a:prstGeom prst="roundRect">
+            <a:avLst>
+              <a:gd name="adj" fmla="val 22552"/>
+            </a:avLst>
+          </a:prstGeom>
+          <a:solidFill>
+            <a:srgbClr val="FFFFFF"/>
+          </a:solidFill>
+          <a:ln w="12700">
+            <a:solidFill>
+              <a:srgbClr val="EAEAE8"/>
+            </a:solidFill>
+          </a:ln>
+          <a:effectLst/>
+        </p:spPr>
+        <p:style>
+          <a:lnRef idx="1">
+            <a:schemeClr val="accent1"/>
+          </a:lnRef>
+          <a:fillRef idx="3">
+            <a:schemeClr val="accent1"/>
+          </a:fillRef>
+          <a:effectRef idx="2">
+            <a:schemeClr val="accent1"/>
+          </a:effectRef>
+          <a:fontRef idx="minor">
+            <a:schemeClr val="lt1"/>
+          </a:fontRef>
+        </p:style>
+        <p:txBody>
+          <a:bodyPr rtlCol="0" anchor="ctr"/>
+          <a:lstStyle/>
+          <a:p/>
+        </p:txBody>
+      </p:sp>
+      <p:sp>
+        <p:nvSpPr>
+          <p:cNvPr id="25" name="Rounded Rectangle 24"/>
+          <p:cNvSpPr/>
+          <p:nvPr/>
+        </p:nvSpPr>
+        <p:spPr>
+          <a:xfrm>
+            <a:off x="841247" y="3834638"/>
+            <a:ext cx="365760" cy="365760"/>
+          </a:xfrm>
+          <a:prstGeom prst="roundRect">
+            <a:avLst>
+              <a:gd name="adj" fmla="val 32500"/>
+            </a:avLst>
+          </a:prstGeom>
+          <a:solidFill>
+            <a:srgbClr val="EFEAFA"/>
+          </a:solidFill>
+          <a:ln>
+            <a:noFill/>
+          </a:ln>
+          <a:effectLst/>
+        </p:spPr>
+        <p:style>
+          <a:lnRef idx="1">
+            <a:schemeClr val="accent1"/>
+          </a:lnRef>
+          <a:fillRef idx="3">
+            <a:schemeClr val="accent1"/>
+          </a:fillRef>
+          <a:effectRef idx="2">
+            <a:schemeClr val="accent1"/>
+          </a:effectRef>
+          <a:fontRef idx="minor">
+            <a:schemeClr val="lt1"/>
+          </a:fontRef>
+        </p:style>
+        <p:txBody>
+          <a:bodyPr rtlCol="0" anchor="ctr"/>
+          <a:lstStyle/>
+          <a:p/>
+        </p:txBody>
+      </p:sp>
+      <p:sp>
+        <p:nvSpPr>
+          <p:cNvPr id="26" name="TextBox 25"/>
+          <p:cNvSpPr txBox="1"/>
+          <p:nvPr/>
+        </p:nvSpPr>
+        <p:spPr>
+          <a:xfrm>
+            <a:off x="841247" y="3898646"/>
+            <a:ext cx="365760" cy="256032"/>
+          </a:xfrm>
+          <a:prstGeom prst="rect">
+            <a:avLst/>
+          </a:prstGeom>
+          <a:noFill/>
+        </p:spPr>
+        <p:txBody>
+          <a:bodyPr wrap="square" lIns="0" rIns="0" tIns="0" bIns="0" anchor="t">
+            <a:spAutoFit/>
+          </a:bodyPr>
+          <a:lstStyle/>
+          <a:p>
+            <a:pPr algn="ctr">
+              <a:lnSpc>
+                <a:spcPct val="135000"/>
+              </a:lnSpc>
+            </a:pPr>
+            <a:r>
+              <a:rPr sz="1500" b="1" i="0">
+                <a:solidFill>
+                  <a:srgbClr val="6B4FBB"/>
+                </a:solidFill>
+                <a:latin typeface="Verdana"/>
+              </a:rPr>
+              <a:t>5</a:t>
+            </a:r>
+          </a:p>
+        </p:txBody>
+      </p:sp>
+      <p:sp>
+        <p:nvSpPr>
+          <p:cNvPr id="27" name="TextBox 26"/>
+          <p:cNvSpPr txBox="1"/>
+          <p:nvPr/>
+        </p:nvSpPr>
+        <p:spPr>
+          <a:xfrm>
+            <a:off x="1344168" y="3848608"/>
+            <a:ext cx="4504791" cy="374396"/>
+          </a:xfrm>
+          <a:prstGeom prst="rect">
+            <a:avLst/>
+          </a:prstGeom>
+          <a:noFill/>
+        </p:spPr>
+        <p:txBody>
+          <a:bodyPr wrap="square" lIns="0" rIns="0" tIns="0" bIns="0" anchor="t">
+            <a:spAutoFit/>
+          </a:bodyPr>
+          <a:lstStyle/>
+          <a:p>
+            <a:pPr algn="l">
+              <a:lnSpc>
+                <a:spcPct val="140000"/>
+              </a:lnSpc>
+            </a:pPr>
+            <a:r>
+              <a:rPr sz="1900" b="0" i="0">
+                <a:solidFill>
+                  <a:srgbClr val="3A3D40"/>
+                </a:solidFill>
+                <a:latin typeface="Verdana"/>
+              </a:rPr>
+              <a:t>préparer</a:t>
+            </a:r>
+          </a:p>
+        </p:txBody>
+      </p:sp>
+      <p:sp>
+        <p:nvSpPr>
+          <p:cNvPr id="28" name="Rounded Rectangle 27"/>
+          <p:cNvSpPr/>
+          <p:nvPr/>
+        </p:nvSpPr>
+        <p:spPr>
+          <a:xfrm>
+            <a:off x="6159855" y="3693160"/>
+            <a:ext cx="5464911" cy="648716"/>
+          </a:xfrm>
+          <a:prstGeom prst="roundRect">
+            <a:avLst>
+              <a:gd name="adj" fmla="val 22552"/>
+            </a:avLst>
+          </a:prstGeom>
+          <a:solidFill>
+            <a:srgbClr val="FFFFFF"/>
+          </a:solidFill>
+          <a:ln w="12700">
+            <a:solidFill>
+              <a:srgbClr val="EAEAE8"/>
+            </a:solidFill>
+          </a:ln>
+          <a:effectLst/>
+        </p:spPr>
+        <p:style>
+          <a:lnRef idx="1">
+            <a:schemeClr val="accent1"/>
+          </a:lnRef>
+          <a:fillRef idx="3">
+            <a:schemeClr val="accent1"/>
+          </a:fillRef>
+          <a:effectRef idx="2">
+            <a:schemeClr val="accent1"/>
+          </a:effectRef>
+          <a:fontRef idx="minor">
+            <a:schemeClr val="lt1"/>
+          </a:fontRef>
+        </p:style>
+        <p:txBody>
+          <a:bodyPr rtlCol="0" anchor="ctr"/>
+          <a:lstStyle/>
+          <a:p/>
+        </p:txBody>
+      </p:sp>
+      <p:sp>
+        <p:nvSpPr>
+          <p:cNvPr id="29" name="Rounded Rectangle 28"/>
+          <p:cNvSpPr/>
+          <p:nvPr/>
+        </p:nvSpPr>
+        <p:spPr>
+          <a:xfrm>
+            <a:off x="6434175" y="3834638"/>
+            <a:ext cx="365760" cy="365760"/>
+          </a:xfrm>
+          <a:prstGeom prst="roundRect">
+            <a:avLst>
+              <a:gd name="adj" fmla="val 32500"/>
+            </a:avLst>
+          </a:prstGeom>
+          <a:solidFill>
+            <a:srgbClr val="EFEAFA"/>
+          </a:solidFill>
+          <a:ln>
+            <a:noFill/>
+          </a:ln>
+          <a:effectLst/>
+        </p:spPr>
+        <p:style>
+          <a:lnRef idx="1">
+            <a:schemeClr val="accent1"/>
+          </a:lnRef>
+          <a:fillRef idx="3">
+            <a:schemeClr val="accent1"/>
+          </a:fillRef>
+          <a:effectRef idx="2">
+            <a:schemeClr val="accent1"/>
+          </a:effectRef>
+          <a:fontRef idx="minor">
+            <a:schemeClr val="lt1"/>
+          </a:fontRef>
+        </p:style>
+        <p:txBody>
+          <a:bodyPr rtlCol="0" anchor="ctr"/>
+          <a:lstStyle/>
+          <a:p/>
+        </p:txBody>
+      </p:sp>
+      <p:sp>
+        <p:nvSpPr>
+          <p:cNvPr id="30" name="TextBox 29"/>
+          <p:cNvSpPr txBox="1"/>
+          <p:nvPr/>
+        </p:nvSpPr>
+        <p:spPr>
+          <a:xfrm>
+            <a:off x="6434175" y="3898646"/>
+            <a:ext cx="365760" cy="256032"/>
+          </a:xfrm>
+          <a:prstGeom prst="rect">
+            <a:avLst/>
+          </a:prstGeom>
+          <a:noFill/>
+        </p:spPr>
+        <p:txBody>
+          <a:bodyPr wrap="square" lIns="0" rIns="0" tIns="0" bIns="0" anchor="t">
+            <a:spAutoFit/>
+          </a:bodyPr>
+          <a:lstStyle/>
+          <a:p>
+            <a:pPr algn="ctr">
+              <a:lnSpc>
+                <a:spcPct val="135000"/>
+              </a:lnSpc>
+            </a:pPr>
+            <a:r>
+              <a:rPr sz="1500" b="1" i="0">
+                <a:solidFill>
+                  <a:srgbClr val="6B4FBB"/>
+                </a:solidFill>
+                <a:latin typeface="Verdana"/>
+              </a:rPr>
+              <a:t>6</a:t>
+            </a:r>
+          </a:p>
+        </p:txBody>
+      </p:sp>
+      <p:sp>
+        <p:nvSpPr>
+          <p:cNvPr id="31" name="TextBox 30"/>
+          <p:cNvSpPr txBox="1"/>
+          <p:nvPr/>
+        </p:nvSpPr>
+        <p:spPr>
+          <a:xfrm>
+            <a:off x="6937095" y="3848608"/>
+            <a:ext cx="4504791" cy="374396"/>
+          </a:xfrm>
+          <a:prstGeom prst="rect">
+            <a:avLst/>
+          </a:prstGeom>
+          <a:noFill/>
+        </p:spPr>
+        <p:txBody>
+          <a:bodyPr wrap="square" lIns="0" rIns="0" tIns="0" bIns="0" anchor="t">
+            <a:spAutoFit/>
+          </a:bodyPr>
+          <a:lstStyle/>
+          <a:p>
+            <a:pPr algn="l">
+              <a:lnSpc>
+                <a:spcPct val="140000"/>
+              </a:lnSpc>
+            </a:pPr>
+            <a:r>
+              <a:rPr sz="1900" b="0" i="0">
+                <a:solidFill>
+                  <a:srgbClr val="3A3D40"/>
+                </a:solidFill>
+                <a:latin typeface="Verdana"/>
+              </a:rPr>
+              <a:t>verglas</a:t>
+            </a:r>
+          </a:p>
+        </p:txBody>
+      </p:sp>
+      <p:sp>
+        <p:nvSpPr>
+          <p:cNvPr id="32" name="Rounded Rectangle 31"/>
+          <p:cNvSpPr/>
+          <p:nvPr/>
+        </p:nvSpPr>
+        <p:spPr>
+          <a:xfrm>
+            <a:off x="566928" y="4469892"/>
+            <a:ext cx="5464911" cy="648716"/>
+          </a:xfrm>
+          <a:prstGeom prst="roundRect">
+            <a:avLst>
+              <a:gd name="adj" fmla="val 22552"/>
+            </a:avLst>
+          </a:prstGeom>
+          <a:solidFill>
+            <a:srgbClr val="FFFFFF"/>
+          </a:solidFill>
+          <a:ln w="12700">
+            <a:solidFill>
+              <a:srgbClr val="EAEAE8"/>
+            </a:solidFill>
+          </a:ln>
+          <a:effectLst/>
+        </p:spPr>
+        <p:style>
+          <a:lnRef idx="1">
+            <a:schemeClr val="accent1"/>
+          </a:lnRef>
+          <a:fillRef idx="3">
+            <a:schemeClr val="accent1"/>
+          </a:fillRef>
+          <a:effectRef idx="2">
+            <a:schemeClr val="accent1"/>
+          </a:effectRef>
+          <a:fontRef idx="minor">
+            <a:schemeClr val="lt1"/>
+          </a:fontRef>
+        </p:style>
+        <p:txBody>
+          <a:bodyPr rtlCol="0" anchor="ctr"/>
+          <a:lstStyle/>
+          <a:p/>
+        </p:txBody>
+      </p:sp>
+      <p:sp>
+        <p:nvSpPr>
+          <p:cNvPr id="33" name="Rounded Rectangle 32"/>
+          <p:cNvSpPr/>
+          <p:nvPr/>
+        </p:nvSpPr>
+        <p:spPr>
+          <a:xfrm>
+            <a:off x="841247" y="4611370"/>
+            <a:ext cx="365760" cy="365760"/>
+          </a:xfrm>
+          <a:prstGeom prst="roundRect">
+            <a:avLst>
+              <a:gd name="adj" fmla="val 32500"/>
+            </a:avLst>
+          </a:prstGeom>
+          <a:solidFill>
+            <a:srgbClr val="EFEAFA"/>
+          </a:solidFill>
+          <a:ln>
+            <a:noFill/>
+          </a:ln>
+          <a:effectLst/>
+        </p:spPr>
+        <p:style>
+          <a:lnRef idx="1">
+            <a:schemeClr val="accent1"/>
+          </a:lnRef>
+          <a:fillRef idx="3">
+            <a:schemeClr val="accent1"/>
+          </a:fillRef>
+          <a:effectRef idx="2">
+            <a:schemeClr val="accent1"/>
+          </a:effectRef>
+          <a:fontRef idx="minor">
+            <a:schemeClr val="lt1"/>
+          </a:fontRef>
+        </p:style>
+        <p:txBody>
+          <a:bodyPr rtlCol="0" anchor="ctr"/>
+          <a:lstStyle/>
+          <a:p/>
+        </p:txBody>
+      </p:sp>
+      <p:sp>
+        <p:nvSpPr>
+          <p:cNvPr id="34" name="TextBox 33"/>
+          <p:cNvSpPr txBox="1"/>
+          <p:nvPr/>
+        </p:nvSpPr>
+        <p:spPr>
+          <a:xfrm>
+            <a:off x="841247" y="4675378"/>
+            <a:ext cx="365760" cy="256032"/>
+          </a:xfrm>
+          <a:prstGeom prst="rect">
+            <a:avLst/>
+          </a:prstGeom>
+          <a:noFill/>
+        </p:spPr>
+        <p:txBody>
+          <a:bodyPr wrap="square" lIns="0" rIns="0" tIns="0" bIns="0" anchor="t">
+            <a:spAutoFit/>
+          </a:bodyPr>
+          <a:lstStyle/>
+          <a:p>
+            <a:pPr algn="ctr">
+              <a:lnSpc>
+                <a:spcPct val="135000"/>
+              </a:lnSpc>
+            </a:pPr>
+            <a:r>
+              <a:rPr sz="1500" b="1" i="0">
+                <a:solidFill>
+                  <a:srgbClr val="6B4FBB"/>
+                </a:solidFill>
+                <a:latin typeface="Verdana"/>
+              </a:rPr>
+              <a:t>7</a:t>
+            </a:r>
+          </a:p>
+        </p:txBody>
+      </p:sp>
+      <p:sp>
+        <p:nvSpPr>
+          <p:cNvPr id="35" name="TextBox 34"/>
+          <p:cNvSpPr txBox="1"/>
+          <p:nvPr/>
+        </p:nvSpPr>
+        <p:spPr>
+          <a:xfrm>
+            <a:off x="1344168" y="4625340"/>
+            <a:ext cx="4504791" cy="374396"/>
+          </a:xfrm>
+          <a:prstGeom prst="rect">
+            <a:avLst/>
+          </a:prstGeom>
+          <a:noFill/>
+        </p:spPr>
+        <p:txBody>
+          <a:bodyPr wrap="square" lIns="0" rIns="0" tIns="0" bIns="0" anchor="t">
+            <a:spAutoFit/>
+          </a:bodyPr>
+          <a:lstStyle/>
+          <a:p>
+            <a:pPr algn="l">
+              <a:lnSpc>
+                <a:spcPct val="140000"/>
+              </a:lnSpc>
+            </a:pPr>
+            <a:r>
+              <a:rPr sz="1900" b="0" i="0">
+                <a:solidFill>
+                  <a:srgbClr val="3A3D40"/>
+                </a:solidFill>
+                <a:latin typeface="Verdana"/>
+              </a:rPr>
+              <a:t>journée</a:t>
+            </a:r>
+          </a:p>
+        </p:txBody>
+      </p:sp>
+      <p:sp>
+        <p:nvSpPr>
+          <p:cNvPr id="36" name="Rounded Rectangle 35"/>
+          <p:cNvSpPr/>
+          <p:nvPr/>
+        </p:nvSpPr>
+        <p:spPr>
+          <a:xfrm>
+            <a:off x="6159855" y="4469892"/>
+            <a:ext cx="5464911" cy="648716"/>
+          </a:xfrm>
+          <a:prstGeom prst="roundRect">
+            <a:avLst>
+              <a:gd name="adj" fmla="val 22552"/>
+            </a:avLst>
+          </a:prstGeom>
+          <a:solidFill>
+            <a:srgbClr val="FFFFFF"/>
+          </a:solidFill>
+          <a:ln w="12700">
+            <a:solidFill>
+              <a:srgbClr val="EAEAE8"/>
+            </a:solidFill>
+          </a:ln>
+          <a:effectLst/>
+        </p:spPr>
+        <p:style>
+          <a:lnRef idx="1">
+            <a:schemeClr val="accent1"/>
+          </a:lnRef>
+          <a:fillRef idx="3">
+            <a:schemeClr val="accent1"/>
+          </a:fillRef>
+          <a:effectRef idx="2">
+            <a:schemeClr val="accent1"/>
+          </a:effectRef>
+          <a:fontRef idx="minor">
+            <a:schemeClr val="lt1"/>
+          </a:fontRef>
+        </p:style>
+        <p:txBody>
+          <a:bodyPr rtlCol="0" anchor="ctr"/>
+          <a:lstStyle/>
+          <a:p/>
+        </p:txBody>
+      </p:sp>
+      <p:sp>
+        <p:nvSpPr>
+          <p:cNvPr id="37" name="Rounded Rectangle 36"/>
+          <p:cNvSpPr/>
+          <p:nvPr/>
+        </p:nvSpPr>
+        <p:spPr>
+          <a:xfrm>
+            <a:off x="6434175" y="4611370"/>
+            <a:ext cx="365760" cy="365760"/>
+          </a:xfrm>
+          <a:prstGeom prst="roundRect">
+            <a:avLst>
+              <a:gd name="adj" fmla="val 32500"/>
+            </a:avLst>
+          </a:prstGeom>
+          <a:solidFill>
+            <a:srgbClr val="EFEAFA"/>
+          </a:solidFill>
+          <a:ln>
+            <a:noFill/>
+          </a:ln>
+          <a:effectLst/>
+        </p:spPr>
+        <p:style>
+          <a:lnRef idx="1">
+            <a:schemeClr val="accent1"/>
+          </a:lnRef>
+          <a:fillRef idx="3">
+            <a:schemeClr val="accent1"/>
+          </a:fillRef>
+          <a:effectRef idx="2">
+            <a:schemeClr val="accent1"/>
+          </a:effectRef>
+          <a:fontRef idx="minor">
+            <a:schemeClr val="lt1"/>
+          </a:fontRef>
+        </p:style>
+        <p:txBody>
+          <a:bodyPr rtlCol="0" anchor="ctr"/>
+          <a:lstStyle/>
+          <a:p/>
+        </p:txBody>
+      </p:sp>
+      <p:sp>
+        <p:nvSpPr>
+          <p:cNvPr id="38" name="TextBox 37"/>
+          <p:cNvSpPr txBox="1"/>
+          <p:nvPr/>
+        </p:nvSpPr>
+        <p:spPr>
+          <a:xfrm>
+            <a:off x="6434175" y="4675378"/>
+            <a:ext cx="365760" cy="256032"/>
+          </a:xfrm>
+          <a:prstGeom prst="rect">
+            <a:avLst/>
+          </a:prstGeom>
+          <a:noFill/>
+        </p:spPr>
+        <p:txBody>
+          <a:bodyPr wrap="square" lIns="0" rIns="0" tIns="0" bIns="0" anchor="t">
+            <a:spAutoFit/>
+          </a:bodyPr>
+          <a:lstStyle/>
+          <a:p>
+            <a:pPr algn="ctr">
+              <a:lnSpc>
+                <a:spcPct val="135000"/>
+              </a:lnSpc>
+            </a:pPr>
+            <a:r>
+              <a:rPr sz="1500" b="1" i="0">
+                <a:solidFill>
+                  <a:srgbClr val="6B4FBB"/>
+                </a:solidFill>
+                <a:latin typeface="Verdana"/>
+              </a:rPr>
+              <a:t>8</a:t>
+            </a:r>
+          </a:p>
+        </p:txBody>
+      </p:sp>
+      <p:sp>
+        <p:nvSpPr>
+          <p:cNvPr id="39" name="TextBox 38"/>
+          <p:cNvSpPr txBox="1"/>
+          <p:nvPr/>
+        </p:nvSpPr>
+        <p:spPr>
+          <a:xfrm>
+            <a:off x="6937095" y="4625340"/>
+            <a:ext cx="4504791" cy="374396"/>
+          </a:xfrm>
+          <a:prstGeom prst="rect">
+            <a:avLst/>
+          </a:prstGeom>
+          <a:noFill/>
+        </p:spPr>
+        <p:txBody>
+          <a:bodyPr wrap="square" lIns="0" rIns="0" tIns="0" bIns="0" anchor="t">
+            <a:spAutoFit/>
+          </a:bodyPr>
+          <a:lstStyle/>
+          <a:p>
+            <a:pPr algn="l">
+              <a:lnSpc>
+                <a:spcPct val="140000"/>
+              </a:lnSpc>
+            </a:pPr>
+            <a:r>
+              <a:rPr sz="1900" b="0" i="0">
+                <a:solidFill>
+                  <a:srgbClr val="3A3D40"/>
+                </a:solidFill>
+                <a:latin typeface="Verdana"/>
+              </a:rPr>
+              <a:t>après</a:t>
             </a:r>
           </a:p>
         </p:txBody>
@@ -11041,7 +14310,3854 @@
                 </a:solidFill>
                 <a:latin typeface="Verdana"/>
               </a:rPr>
-              <a:t>écrire correctement un mot qu'on entend sans sa consonne finale.</a:t>
+              <a:t>écrire correctement un mot qu'on entend sans sa consonne finale ;</a:t>
+            </a:r>
+          </a:p>
+        </p:txBody>
+      </p:sp>
+      <p:sp>
+        <p:nvSpPr>
+          <p:cNvPr id="23" name="Rounded Rectangle 22"/>
+          <p:cNvSpPr/>
+          <p:nvPr/>
+        </p:nvSpPr>
+        <p:spPr>
+          <a:xfrm>
+            <a:off x="566928" y="5308600"/>
+            <a:ext cx="11057839" cy="757936"/>
+          </a:xfrm>
+          <a:prstGeom prst="roundRect">
+            <a:avLst>
+              <a:gd name="adj" fmla="val 19302"/>
+            </a:avLst>
+          </a:prstGeom>
+          <a:solidFill>
+            <a:srgbClr val="FFFFFF"/>
+          </a:solidFill>
+          <a:ln w="12700">
+            <a:solidFill>
+              <a:srgbClr val="EAEAE8"/>
+            </a:solidFill>
+          </a:ln>
+          <a:effectLst/>
+        </p:spPr>
+        <p:style>
+          <a:lnRef idx="1">
+            <a:schemeClr val="accent1"/>
+          </a:lnRef>
+          <a:fillRef idx="3">
+            <a:schemeClr val="accent1"/>
+          </a:fillRef>
+          <a:effectRef idx="2">
+            <a:schemeClr val="accent1"/>
+          </a:effectRef>
+          <a:fontRef idx="minor">
+            <a:schemeClr val="lt1"/>
+          </a:fontRef>
+        </p:style>
+        <p:txBody>
+          <a:bodyPr rtlCol="0" anchor="ctr"/>
+          <a:lstStyle/>
+          <a:p/>
+        </p:txBody>
+      </p:sp>
+      <p:sp>
+        <p:nvSpPr>
+          <p:cNvPr id="24" name="Rounded Rectangle 23"/>
+          <p:cNvSpPr/>
+          <p:nvPr/>
+        </p:nvSpPr>
+        <p:spPr>
+          <a:xfrm>
+            <a:off x="804672" y="5486400"/>
+            <a:ext cx="402336" cy="402336"/>
+          </a:xfrm>
+          <a:prstGeom prst="roundRect">
+            <a:avLst>
+              <a:gd name="adj" fmla="val 31818"/>
+            </a:avLst>
+          </a:prstGeom>
+          <a:solidFill>
+            <a:srgbClr val="EFEAFA"/>
+          </a:solidFill>
+          <a:ln>
+            <a:noFill/>
+          </a:ln>
+          <a:effectLst/>
+        </p:spPr>
+        <p:style>
+          <a:lnRef idx="1">
+            <a:schemeClr val="accent1"/>
+          </a:lnRef>
+          <a:fillRef idx="3">
+            <a:schemeClr val="accent1"/>
+          </a:fillRef>
+          <a:effectRef idx="2">
+            <a:schemeClr val="accent1"/>
+          </a:effectRef>
+          <a:fontRef idx="minor">
+            <a:schemeClr val="lt1"/>
+          </a:fontRef>
+        </p:style>
+        <p:txBody>
+          <a:bodyPr rtlCol="0" anchor="ctr"/>
+          <a:lstStyle/>
+          <a:p/>
+        </p:txBody>
+      </p:sp>
+      <p:sp>
+        <p:nvSpPr>
+          <p:cNvPr id="25" name="TextBox 24"/>
+          <p:cNvSpPr txBox="1"/>
+          <p:nvPr/>
+        </p:nvSpPr>
+        <p:spPr>
+          <a:xfrm>
+            <a:off x="804672" y="5568696"/>
+            <a:ext cx="402336" cy="274320"/>
+          </a:xfrm>
+          <a:prstGeom prst="rect">
+            <a:avLst/>
+          </a:prstGeom>
+          <a:noFill/>
+        </p:spPr>
+        <p:txBody>
+          <a:bodyPr wrap="square" lIns="0" rIns="0" tIns="0" bIns="0" anchor="t">
+            <a:spAutoFit/>
+          </a:bodyPr>
+          <a:lstStyle/>
+          <a:p>
+            <a:pPr algn="ctr">
+              <a:lnSpc>
+                <a:spcPct val="135000"/>
+              </a:lnSpc>
+            </a:pPr>
+            <a:r>
+              <a:rPr sz="1500" b="1" i="0">
+                <a:solidFill>
+                  <a:srgbClr val="6B4FBB"/>
+                </a:solidFill>
+                <a:latin typeface="Verdana"/>
+              </a:rPr>
+              <a:t>5</a:t>
+            </a:r>
+          </a:p>
+        </p:txBody>
+      </p:sp>
+      <p:sp>
+        <p:nvSpPr>
+          <p:cNvPr id="26" name="TextBox 25"/>
+          <p:cNvSpPr txBox="1"/>
+          <p:nvPr/>
+        </p:nvSpPr>
+        <p:spPr>
+          <a:xfrm>
+            <a:off x="1408176" y="5509768"/>
+            <a:ext cx="9549079" cy="392176"/>
+          </a:xfrm>
+          <a:prstGeom prst="rect">
+            <a:avLst/>
+          </a:prstGeom>
+          <a:noFill/>
+        </p:spPr>
+        <p:txBody>
+          <a:bodyPr wrap="square" lIns="0" rIns="0" tIns="0" bIns="0" anchor="t">
+            <a:spAutoFit/>
+          </a:bodyPr>
+          <a:lstStyle/>
+          <a:p>
+            <a:pPr algn="l">
+              <a:lnSpc>
+                <a:spcPct val="140000"/>
+              </a:lnSpc>
+            </a:pPr>
+            <a:r>
+              <a:rPr sz="2000" b="0" i="0">
+                <a:solidFill>
+                  <a:srgbClr val="3A3D40"/>
+                </a:solidFill>
+                <a:latin typeface="Verdana"/>
+              </a:rPr>
+              <a:t>distinguer le son « é » du son « è » dans le vocabulaire du bulletin.</a:t>
+            </a:r>
+          </a:p>
+        </p:txBody>
+      </p:sp>
+    </p:spTree>
+  </p:cSld>
+  <p:clrMapOvr>
+    <a:masterClrMapping/>
+  </p:clrMapOvr>
+</p:sld>
+</file>
+
+<file path=ppt/slides/slide20.xml><?xml version="1.0" encoding="utf-8"?>
+<p:sld xmlns:a="http://schemas.openxmlformats.org/drawingml/2006/main" xmlns:p="http://schemas.openxmlformats.org/presentationml/2006/main" xmlns:r="http://schemas.openxmlformats.org/officeDocument/2006/relationships">
+  <p:cSld>
+    <p:spTree>
+      <p:nvGrpSpPr>
+        <p:cNvPr id="1" name=""/>
+        <p:cNvGrpSpPr/>
+        <p:nvPr/>
+      </p:nvGrpSpPr>
+      <p:grpSpPr/>
+      <p:sp>
+        <p:nvSpPr>
+          <p:cNvPr id="2" name="Rectangle 1"/>
+          <p:cNvSpPr/>
+          <p:nvPr/>
+        </p:nvSpPr>
+        <p:spPr>
+          <a:xfrm>
+            <a:off x="0" y="0"/>
+            <a:ext cx="12191695" cy="6858000"/>
+          </a:xfrm>
+          <a:prstGeom prst="rect">
+            <a:avLst/>
+          </a:prstGeom>
+          <a:solidFill>
+            <a:srgbClr val="F7F7F5"/>
+          </a:solidFill>
+          <a:ln>
+            <a:noFill/>
+          </a:ln>
+          <a:effectLst/>
+        </p:spPr>
+        <p:style>
+          <a:lnRef idx="1">
+            <a:schemeClr val="accent1"/>
+          </a:lnRef>
+          <a:fillRef idx="3">
+            <a:schemeClr val="accent1"/>
+          </a:fillRef>
+          <a:effectRef idx="2">
+            <a:schemeClr val="accent1"/>
+          </a:effectRef>
+          <a:fontRef idx="minor">
+            <a:schemeClr val="lt1"/>
+          </a:fontRef>
+        </p:style>
+        <p:txBody>
+          <a:bodyPr rtlCol="0" anchor="ctr"/>
+          <a:lstStyle/>
+          <a:p/>
+        </p:txBody>
+      </p:sp>
+      <p:sp>
+        <p:nvSpPr>
+          <p:cNvPr id="3" name="TextBox 2"/>
+          <p:cNvSpPr txBox="1"/>
+          <p:nvPr/>
+        </p:nvSpPr>
+        <p:spPr>
+          <a:xfrm>
+            <a:off x="566928" y="6355080"/>
+            <a:ext cx="6400800" cy="219456"/>
+          </a:xfrm>
+          <a:prstGeom prst="rect">
+            <a:avLst/>
+          </a:prstGeom>
+          <a:noFill/>
+        </p:spPr>
+        <p:txBody>
+          <a:bodyPr wrap="square" lIns="0" rIns="0" tIns="0" bIns="0" anchor="t">
+            <a:spAutoFit/>
+          </a:bodyPr>
+          <a:lstStyle/>
+          <a:p>
+            <a:pPr algn="l">
+              <a:lnSpc>
+                <a:spcPct val="135000"/>
+              </a:lnSpc>
+            </a:pPr>
+            <a:r>
+              <a:rPr sz="1200" b="0" i="0">
+                <a:solidFill>
+                  <a:srgbClr val="6E7175"/>
+                </a:solidFill>
+                <a:latin typeface="Verdana"/>
+              </a:rPr>
+              <a:t>A2 · Quelles sont les prévisions ?</a:t>
+            </a:r>
+          </a:p>
+        </p:txBody>
+      </p:sp>
+      <p:sp>
+        <p:nvSpPr>
+          <p:cNvPr id="4" name="TextBox 3"/>
+          <p:cNvSpPr txBox="1"/>
+          <p:nvPr/>
+        </p:nvSpPr>
+        <p:spPr>
+          <a:xfrm>
+            <a:off x="10710367" y="6355080"/>
+            <a:ext cx="914400" cy="219456"/>
+          </a:xfrm>
+          <a:prstGeom prst="rect">
+            <a:avLst/>
+          </a:prstGeom>
+          <a:noFill/>
+        </p:spPr>
+        <p:txBody>
+          <a:bodyPr wrap="square" lIns="0" rIns="0" tIns="0" bIns="0" anchor="t">
+            <a:spAutoFit/>
+          </a:bodyPr>
+          <a:lstStyle/>
+          <a:p>
+            <a:pPr algn="r">
+              <a:lnSpc>
+                <a:spcPct val="135000"/>
+              </a:lnSpc>
+            </a:pPr>
+            <a:r>
+              <a:rPr sz="1200" b="0" i="0">
+                <a:solidFill>
+                  <a:srgbClr val="6E7175"/>
+                </a:solidFill>
+                <a:latin typeface="Verdana"/>
+              </a:rPr>
+              <a:t>20</a:t>
+            </a:r>
+          </a:p>
+        </p:txBody>
+      </p:sp>
+      <p:sp>
+        <p:nvSpPr>
+          <p:cNvPr id="5" name="TextBox 4"/>
+          <p:cNvSpPr txBox="1"/>
+          <p:nvPr/>
+        </p:nvSpPr>
+        <p:spPr>
+          <a:xfrm>
+            <a:off x="566928" y="420624"/>
+            <a:ext cx="11057839" cy="237744"/>
+          </a:xfrm>
+          <a:prstGeom prst="rect">
+            <a:avLst/>
+          </a:prstGeom>
+          <a:noFill/>
+        </p:spPr>
+        <p:txBody>
+          <a:bodyPr wrap="square" lIns="0" rIns="0" tIns="0" bIns="0" anchor="t">
+            <a:spAutoFit/>
+          </a:bodyPr>
+          <a:lstStyle/>
+          <a:p>
+            <a:pPr algn="l">
+              <a:lnSpc>
+                <a:spcPct val="135000"/>
+              </a:lnSpc>
+            </a:pPr>
+            <a:r>
+              <a:rPr sz="1300" b="1" i="0" spc="156">
+                <a:solidFill>
+                  <a:srgbClr val="6B4FBB"/>
+                </a:solidFill>
+                <a:latin typeface="Verdana"/>
+              </a:rPr>
+              <a:t>CORRECTION</a:t>
+            </a:r>
+          </a:p>
+        </p:txBody>
+      </p:sp>
+      <p:sp>
+        <p:nvSpPr>
+          <p:cNvPr id="6" name="TextBox 5"/>
+          <p:cNvSpPr txBox="1"/>
+          <p:nvPr/>
+        </p:nvSpPr>
+        <p:spPr>
+          <a:xfrm>
+            <a:off x="566928" y="749808"/>
+            <a:ext cx="11057839" cy="877824"/>
+          </a:xfrm>
+          <a:prstGeom prst="rect">
+            <a:avLst/>
+          </a:prstGeom>
+          <a:noFill/>
+        </p:spPr>
+        <p:txBody>
+          <a:bodyPr wrap="square" lIns="0" rIns="0" tIns="0" bIns="0" anchor="t">
+            <a:spAutoFit/>
+          </a:bodyPr>
+          <a:lstStyle/>
+          <a:p>
+            <a:pPr algn="l">
+              <a:lnSpc>
+                <a:spcPct val="115000"/>
+              </a:lnSpc>
+            </a:pPr>
+            <a:r>
+              <a:rPr sz="3400" b="1" i="0">
+                <a:solidFill>
+                  <a:srgbClr val="17181A"/>
+                </a:solidFill>
+                <a:latin typeface="Verdana"/>
+              </a:rPr>
+              <a:t>Quel son entendez-vous ?</a:t>
+            </a:r>
+          </a:p>
+        </p:txBody>
+      </p:sp>
+      <p:sp>
+        <p:nvSpPr>
+          <p:cNvPr id="7" name="TextBox 6"/>
+          <p:cNvSpPr txBox="1"/>
+          <p:nvPr/>
+        </p:nvSpPr>
+        <p:spPr>
+          <a:xfrm>
+            <a:off x="566928" y="1645920"/>
+            <a:ext cx="11057839" cy="329184"/>
+          </a:xfrm>
+          <a:prstGeom prst="rect">
+            <a:avLst/>
+          </a:prstGeom>
+          <a:noFill/>
+        </p:spPr>
+        <p:txBody>
+          <a:bodyPr wrap="square" lIns="0" rIns="0" tIns="0" bIns="0" anchor="t">
+            <a:spAutoFit/>
+          </a:bodyPr>
+          <a:lstStyle/>
+          <a:p>
+            <a:pPr algn="l">
+              <a:lnSpc>
+                <a:spcPct val="135000"/>
+              </a:lnSpc>
+            </a:pPr>
+            <a:r>
+              <a:rPr sz="1800" b="0" i="0">
+                <a:solidFill>
+                  <a:srgbClr val="6E7175"/>
+                </a:solidFill>
+                <a:latin typeface="Verdana"/>
+              </a:rPr>
+              <a:t>Correction — on lit la réponse, on ne commente pas l'erreur.</a:t>
+            </a:r>
+          </a:p>
+        </p:txBody>
+      </p:sp>
+      <p:sp>
+        <p:nvSpPr>
+          <p:cNvPr id="8" name="Rounded Rectangle 7"/>
+          <p:cNvSpPr/>
+          <p:nvPr/>
+        </p:nvSpPr>
+        <p:spPr>
+          <a:xfrm>
+            <a:off x="566928" y="2139696"/>
+            <a:ext cx="5464911" cy="648716"/>
+          </a:xfrm>
+          <a:prstGeom prst="roundRect">
+            <a:avLst>
+              <a:gd name="adj" fmla="val 22552"/>
+            </a:avLst>
+          </a:prstGeom>
+          <a:solidFill>
+            <a:srgbClr val="E6F5EE"/>
+          </a:solidFill>
+          <a:ln w="12700">
+            <a:solidFill>
+              <a:srgbClr val="EAEAE8"/>
+            </a:solidFill>
+          </a:ln>
+          <a:effectLst/>
+        </p:spPr>
+        <p:style>
+          <a:lnRef idx="1">
+            <a:schemeClr val="accent1"/>
+          </a:lnRef>
+          <a:fillRef idx="3">
+            <a:schemeClr val="accent1"/>
+          </a:fillRef>
+          <a:effectRef idx="2">
+            <a:schemeClr val="accent1"/>
+          </a:effectRef>
+          <a:fontRef idx="minor">
+            <a:schemeClr val="lt1"/>
+          </a:fontRef>
+        </p:style>
+        <p:txBody>
+          <a:bodyPr rtlCol="0" anchor="ctr"/>
+          <a:lstStyle/>
+          <a:p/>
+        </p:txBody>
+      </p:sp>
+      <p:sp>
+        <p:nvSpPr>
+          <p:cNvPr id="9" name="Rounded Rectangle 8"/>
+          <p:cNvSpPr/>
+          <p:nvPr/>
+        </p:nvSpPr>
+        <p:spPr>
+          <a:xfrm>
+            <a:off x="841247" y="2281174"/>
+            <a:ext cx="365760" cy="365760"/>
+          </a:xfrm>
+          <a:prstGeom prst="roundRect">
+            <a:avLst>
+              <a:gd name="adj" fmla="val 32500"/>
+            </a:avLst>
+          </a:prstGeom>
+          <a:solidFill>
+            <a:srgbClr val="EFEAFA"/>
+          </a:solidFill>
+          <a:ln>
+            <a:noFill/>
+          </a:ln>
+          <a:effectLst/>
+        </p:spPr>
+        <p:style>
+          <a:lnRef idx="1">
+            <a:schemeClr val="accent1"/>
+          </a:lnRef>
+          <a:fillRef idx="3">
+            <a:schemeClr val="accent1"/>
+          </a:fillRef>
+          <a:effectRef idx="2">
+            <a:schemeClr val="accent1"/>
+          </a:effectRef>
+          <a:fontRef idx="minor">
+            <a:schemeClr val="lt1"/>
+          </a:fontRef>
+        </p:style>
+        <p:txBody>
+          <a:bodyPr rtlCol="0" anchor="ctr"/>
+          <a:lstStyle/>
+          <a:p/>
+        </p:txBody>
+      </p:sp>
+      <p:sp>
+        <p:nvSpPr>
+          <p:cNvPr id="10" name="TextBox 9"/>
+          <p:cNvSpPr txBox="1"/>
+          <p:nvPr/>
+        </p:nvSpPr>
+        <p:spPr>
+          <a:xfrm>
+            <a:off x="841247" y="2345182"/>
+            <a:ext cx="365760" cy="256032"/>
+          </a:xfrm>
+          <a:prstGeom prst="rect">
+            <a:avLst/>
+          </a:prstGeom>
+          <a:noFill/>
+        </p:spPr>
+        <p:txBody>
+          <a:bodyPr wrap="square" lIns="0" rIns="0" tIns="0" bIns="0" anchor="t">
+            <a:spAutoFit/>
+          </a:bodyPr>
+          <a:lstStyle/>
+          <a:p>
+            <a:pPr algn="ctr">
+              <a:lnSpc>
+                <a:spcPct val="135000"/>
+              </a:lnSpc>
+            </a:pPr>
+            <a:r>
+              <a:rPr sz="1500" b="1" i="0">
+                <a:solidFill>
+                  <a:srgbClr val="6B4FBB"/>
+                </a:solidFill>
+                <a:latin typeface="Verdana"/>
+              </a:rPr>
+              <a:t>1</a:t>
+            </a:r>
+          </a:p>
+        </p:txBody>
+      </p:sp>
+      <p:sp>
+        <p:nvSpPr>
+          <p:cNvPr id="11" name="TextBox 10"/>
+          <p:cNvSpPr txBox="1"/>
+          <p:nvPr/>
+        </p:nvSpPr>
+        <p:spPr>
+          <a:xfrm>
+            <a:off x="1344168" y="2295144"/>
+            <a:ext cx="4504791" cy="374396"/>
+          </a:xfrm>
+          <a:prstGeom prst="rect">
+            <a:avLst/>
+          </a:prstGeom>
+          <a:noFill/>
+        </p:spPr>
+        <p:txBody>
+          <a:bodyPr wrap="square" lIns="0" rIns="0" tIns="0" bIns="0" anchor="t">
+            <a:spAutoFit/>
+          </a:bodyPr>
+          <a:lstStyle/>
+          <a:p>
+            <a:pPr algn="l">
+              <a:lnSpc>
+                <a:spcPct val="140000"/>
+              </a:lnSpc>
+            </a:pPr>
+            <a:r>
+              <a:rPr sz="1900" b="0" i="0">
+                <a:solidFill>
+                  <a:srgbClr val="3A3D40"/>
+                </a:solidFill>
+                <a:latin typeface="Verdana"/>
+              </a:rPr>
+              <a:t>météo   </a:t>
+            </a:r>
+            <a:r>
+              <a:rPr sz="1900" b="1" i="0">
+                <a:solidFill>
+                  <a:srgbClr val="07734A"/>
+                </a:solidFill>
+                <a:latin typeface="Verdana"/>
+              </a:rPr>
+              <a:t>» le son « é »</a:t>
+            </a:r>
+          </a:p>
+        </p:txBody>
+      </p:sp>
+      <p:sp>
+        <p:nvSpPr>
+          <p:cNvPr id="12" name="Rounded Rectangle 11"/>
+          <p:cNvSpPr/>
+          <p:nvPr/>
+        </p:nvSpPr>
+        <p:spPr>
+          <a:xfrm>
+            <a:off x="6159855" y="2139696"/>
+            <a:ext cx="5464911" cy="648716"/>
+          </a:xfrm>
+          <a:prstGeom prst="roundRect">
+            <a:avLst>
+              <a:gd name="adj" fmla="val 22552"/>
+            </a:avLst>
+          </a:prstGeom>
+          <a:solidFill>
+            <a:srgbClr val="E6F5EE"/>
+          </a:solidFill>
+          <a:ln w="12700">
+            <a:solidFill>
+              <a:srgbClr val="EAEAE8"/>
+            </a:solidFill>
+          </a:ln>
+          <a:effectLst/>
+        </p:spPr>
+        <p:style>
+          <a:lnRef idx="1">
+            <a:schemeClr val="accent1"/>
+          </a:lnRef>
+          <a:fillRef idx="3">
+            <a:schemeClr val="accent1"/>
+          </a:fillRef>
+          <a:effectRef idx="2">
+            <a:schemeClr val="accent1"/>
+          </a:effectRef>
+          <a:fontRef idx="minor">
+            <a:schemeClr val="lt1"/>
+          </a:fontRef>
+        </p:style>
+        <p:txBody>
+          <a:bodyPr rtlCol="0" anchor="ctr"/>
+          <a:lstStyle/>
+          <a:p/>
+        </p:txBody>
+      </p:sp>
+      <p:sp>
+        <p:nvSpPr>
+          <p:cNvPr id="13" name="Rounded Rectangle 12"/>
+          <p:cNvSpPr/>
+          <p:nvPr/>
+        </p:nvSpPr>
+        <p:spPr>
+          <a:xfrm>
+            <a:off x="6434175" y="2281174"/>
+            <a:ext cx="365760" cy="365760"/>
+          </a:xfrm>
+          <a:prstGeom prst="roundRect">
+            <a:avLst>
+              <a:gd name="adj" fmla="val 32500"/>
+            </a:avLst>
+          </a:prstGeom>
+          <a:solidFill>
+            <a:srgbClr val="EFEAFA"/>
+          </a:solidFill>
+          <a:ln>
+            <a:noFill/>
+          </a:ln>
+          <a:effectLst/>
+        </p:spPr>
+        <p:style>
+          <a:lnRef idx="1">
+            <a:schemeClr val="accent1"/>
+          </a:lnRef>
+          <a:fillRef idx="3">
+            <a:schemeClr val="accent1"/>
+          </a:fillRef>
+          <a:effectRef idx="2">
+            <a:schemeClr val="accent1"/>
+          </a:effectRef>
+          <a:fontRef idx="minor">
+            <a:schemeClr val="lt1"/>
+          </a:fontRef>
+        </p:style>
+        <p:txBody>
+          <a:bodyPr rtlCol="0" anchor="ctr"/>
+          <a:lstStyle/>
+          <a:p/>
+        </p:txBody>
+      </p:sp>
+      <p:sp>
+        <p:nvSpPr>
+          <p:cNvPr id="14" name="TextBox 13"/>
+          <p:cNvSpPr txBox="1"/>
+          <p:nvPr/>
+        </p:nvSpPr>
+        <p:spPr>
+          <a:xfrm>
+            <a:off x="6434175" y="2345182"/>
+            <a:ext cx="365760" cy="256032"/>
+          </a:xfrm>
+          <a:prstGeom prst="rect">
+            <a:avLst/>
+          </a:prstGeom>
+          <a:noFill/>
+        </p:spPr>
+        <p:txBody>
+          <a:bodyPr wrap="square" lIns="0" rIns="0" tIns="0" bIns="0" anchor="t">
+            <a:spAutoFit/>
+          </a:bodyPr>
+          <a:lstStyle/>
+          <a:p>
+            <a:pPr algn="ctr">
+              <a:lnSpc>
+                <a:spcPct val="135000"/>
+              </a:lnSpc>
+            </a:pPr>
+            <a:r>
+              <a:rPr sz="1500" b="1" i="0">
+                <a:solidFill>
+                  <a:srgbClr val="6B4FBB"/>
+                </a:solidFill>
+                <a:latin typeface="Verdana"/>
+              </a:rPr>
+              <a:t>2</a:t>
+            </a:r>
+          </a:p>
+        </p:txBody>
+      </p:sp>
+      <p:sp>
+        <p:nvSpPr>
+          <p:cNvPr id="15" name="TextBox 14"/>
+          <p:cNvSpPr txBox="1"/>
+          <p:nvPr/>
+        </p:nvSpPr>
+        <p:spPr>
+          <a:xfrm>
+            <a:off x="6937095" y="2295144"/>
+            <a:ext cx="4504791" cy="374396"/>
+          </a:xfrm>
+          <a:prstGeom prst="rect">
+            <a:avLst/>
+          </a:prstGeom>
+          <a:noFill/>
+        </p:spPr>
+        <p:txBody>
+          <a:bodyPr wrap="square" lIns="0" rIns="0" tIns="0" bIns="0" anchor="t">
+            <a:spAutoFit/>
+          </a:bodyPr>
+          <a:lstStyle/>
+          <a:p>
+            <a:pPr algn="l">
+              <a:lnSpc>
+                <a:spcPct val="140000"/>
+              </a:lnSpc>
+            </a:pPr>
+            <a:r>
+              <a:rPr sz="1900" b="0" i="0">
+                <a:solidFill>
+                  <a:srgbClr val="3A3D40"/>
+                </a:solidFill>
+                <a:latin typeface="Verdana"/>
+              </a:rPr>
+              <a:t>mètres   </a:t>
+            </a:r>
+            <a:r>
+              <a:rPr sz="1900" b="1" i="0">
+                <a:solidFill>
+                  <a:srgbClr val="07734A"/>
+                </a:solidFill>
+                <a:latin typeface="Verdana"/>
+              </a:rPr>
+              <a:t>» le son « è »</a:t>
+            </a:r>
+          </a:p>
+        </p:txBody>
+      </p:sp>
+      <p:sp>
+        <p:nvSpPr>
+          <p:cNvPr id="16" name="Rounded Rectangle 15"/>
+          <p:cNvSpPr/>
+          <p:nvPr/>
+        </p:nvSpPr>
+        <p:spPr>
+          <a:xfrm>
+            <a:off x="566928" y="2916428"/>
+            <a:ext cx="5464911" cy="648716"/>
+          </a:xfrm>
+          <a:prstGeom prst="roundRect">
+            <a:avLst>
+              <a:gd name="adj" fmla="val 22552"/>
+            </a:avLst>
+          </a:prstGeom>
+          <a:solidFill>
+            <a:srgbClr val="E6F5EE"/>
+          </a:solidFill>
+          <a:ln w="12700">
+            <a:solidFill>
+              <a:srgbClr val="EAEAE8"/>
+            </a:solidFill>
+          </a:ln>
+          <a:effectLst/>
+        </p:spPr>
+        <p:style>
+          <a:lnRef idx="1">
+            <a:schemeClr val="accent1"/>
+          </a:lnRef>
+          <a:fillRef idx="3">
+            <a:schemeClr val="accent1"/>
+          </a:fillRef>
+          <a:effectRef idx="2">
+            <a:schemeClr val="accent1"/>
+          </a:effectRef>
+          <a:fontRef idx="minor">
+            <a:schemeClr val="lt1"/>
+          </a:fontRef>
+        </p:style>
+        <p:txBody>
+          <a:bodyPr rtlCol="0" anchor="ctr"/>
+          <a:lstStyle/>
+          <a:p/>
+        </p:txBody>
+      </p:sp>
+      <p:sp>
+        <p:nvSpPr>
+          <p:cNvPr id="17" name="Rounded Rectangle 16"/>
+          <p:cNvSpPr/>
+          <p:nvPr/>
+        </p:nvSpPr>
+        <p:spPr>
+          <a:xfrm>
+            <a:off x="841247" y="3057905"/>
+            <a:ext cx="365760" cy="365760"/>
+          </a:xfrm>
+          <a:prstGeom prst="roundRect">
+            <a:avLst>
+              <a:gd name="adj" fmla="val 32500"/>
+            </a:avLst>
+          </a:prstGeom>
+          <a:solidFill>
+            <a:srgbClr val="EFEAFA"/>
+          </a:solidFill>
+          <a:ln>
+            <a:noFill/>
+          </a:ln>
+          <a:effectLst/>
+        </p:spPr>
+        <p:style>
+          <a:lnRef idx="1">
+            <a:schemeClr val="accent1"/>
+          </a:lnRef>
+          <a:fillRef idx="3">
+            <a:schemeClr val="accent1"/>
+          </a:fillRef>
+          <a:effectRef idx="2">
+            <a:schemeClr val="accent1"/>
+          </a:effectRef>
+          <a:fontRef idx="minor">
+            <a:schemeClr val="lt1"/>
+          </a:fontRef>
+        </p:style>
+        <p:txBody>
+          <a:bodyPr rtlCol="0" anchor="ctr"/>
+          <a:lstStyle/>
+          <a:p/>
+        </p:txBody>
+      </p:sp>
+      <p:sp>
+        <p:nvSpPr>
+          <p:cNvPr id="18" name="TextBox 17"/>
+          <p:cNvSpPr txBox="1"/>
+          <p:nvPr/>
+        </p:nvSpPr>
+        <p:spPr>
+          <a:xfrm>
+            <a:off x="841247" y="3121913"/>
+            <a:ext cx="365760" cy="256032"/>
+          </a:xfrm>
+          <a:prstGeom prst="rect">
+            <a:avLst/>
+          </a:prstGeom>
+          <a:noFill/>
+        </p:spPr>
+        <p:txBody>
+          <a:bodyPr wrap="square" lIns="0" rIns="0" tIns="0" bIns="0" anchor="t">
+            <a:spAutoFit/>
+          </a:bodyPr>
+          <a:lstStyle/>
+          <a:p>
+            <a:pPr algn="ctr">
+              <a:lnSpc>
+                <a:spcPct val="135000"/>
+              </a:lnSpc>
+            </a:pPr>
+            <a:r>
+              <a:rPr sz="1500" b="1" i="0">
+                <a:solidFill>
+                  <a:srgbClr val="6B4FBB"/>
+                </a:solidFill>
+                <a:latin typeface="Verdana"/>
+              </a:rPr>
+              <a:t>3</a:t>
+            </a:r>
+          </a:p>
+        </p:txBody>
+      </p:sp>
+      <p:sp>
+        <p:nvSpPr>
+          <p:cNvPr id="19" name="TextBox 18"/>
+          <p:cNvSpPr txBox="1"/>
+          <p:nvPr/>
+        </p:nvSpPr>
+        <p:spPr>
+          <a:xfrm>
+            <a:off x="1344168" y="3071876"/>
+            <a:ext cx="4504791" cy="374396"/>
+          </a:xfrm>
+          <a:prstGeom prst="rect">
+            <a:avLst/>
+          </a:prstGeom>
+          <a:noFill/>
+        </p:spPr>
+        <p:txBody>
+          <a:bodyPr wrap="square" lIns="0" rIns="0" tIns="0" bIns="0" anchor="t">
+            <a:spAutoFit/>
+          </a:bodyPr>
+          <a:lstStyle/>
+          <a:p>
+            <a:pPr algn="l">
+              <a:lnSpc>
+                <a:spcPct val="140000"/>
+              </a:lnSpc>
+            </a:pPr>
+            <a:r>
+              <a:rPr sz="1900" b="0" i="0">
+                <a:solidFill>
+                  <a:srgbClr val="3A3D40"/>
+                </a:solidFill>
+                <a:latin typeface="Verdana"/>
+              </a:rPr>
+              <a:t>degrés   </a:t>
+            </a:r>
+            <a:r>
+              <a:rPr sz="1900" b="1" i="0">
+                <a:solidFill>
+                  <a:srgbClr val="07734A"/>
+                </a:solidFill>
+                <a:latin typeface="Verdana"/>
+              </a:rPr>
+              <a:t>» le son « é »</a:t>
+            </a:r>
+          </a:p>
+        </p:txBody>
+      </p:sp>
+      <p:sp>
+        <p:nvSpPr>
+          <p:cNvPr id="20" name="Rounded Rectangle 19"/>
+          <p:cNvSpPr/>
+          <p:nvPr/>
+        </p:nvSpPr>
+        <p:spPr>
+          <a:xfrm>
+            <a:off x="6159855" y="2916428"/>
+            <a:ext cx="5464911" cy="648716"/>
+          </a:xfrm>
+          <a:prstGeom prst="roundRect">
+            <a:avLst>
+              <a:gd name="adj" fmla="val 22552"/>
+            </a:avLst>
+          </a:prstGeom>
+          <a:solidFill>
+            <a:srgbClr val="E6F5EE"/>
+          </a:solidFill>
+          <a:ln w="12700">
+            <a:solidFill>
+              <a:srgbClr val="EAEAE8"/>
+            </a:solidFill>
+          </a:ln>
+          <a:effectLst/>
+        </p:spPr>
+        <p:style>
+          <a:lnRef idx="1">
+            <a:schemeClr val="accent1"/>
+          </a:lnRef>
+          <a:fillRef idx="3">
+            <a:schemeClr val="accent1"/>
+          </a:fillRef>
+          <a:effectRef idx="2">
+            <a:schemeClr val="accent1"/>
+          </a:effectRef>
+          <a:fontRef idx="minor">
+            <a:schemeClr val="lt1"/>
+          </a:fontRef>
+        </p:style>
+        <p:txBody>
+          <a:bodyPr rtlCol="0" anchor="ctr"/>
+          <a:lstStyle/>
+          <a:p/>
+        </p:txBody>
+      </p:sp>
+      <p:sp>
+        <p:nvSpPr>
+          <p:cNvPr id="21" name="Rounded Rectangle 20"/>
+          <p:cNvSpPr/>
+          <p:nvPr/>
+        </p:nvSpPr>
+        <p:spPr>
+          <a:xfrm>
+            <a:off x="6434175" y="3057905"/>
+            <a:ext cx="365760" cy="365760"/>
+          </a:xfrm>
+          <a:prstGeom prst="roundRect">
+            <a:avLst>
+              <a:gd name="adj" fmla="val 32500"/>
+            </a:avLst>
+          </a:prstGeom>
+          <a:solidFill>
+            <a:srgbClr val="EFEAFA"/>
+          </a:solidFill>
+          <a:ln>
+            <a:noFill/>
+          </a:ln>
+          <a:effectLst/>
+        </p:spPr>
+        <p:style>
+          <a:lnRef idx="1">
+            <a:schemeClr val="accent1"/>
+          </a:lnRef>
+          <a:fillRef idx="3">
+            <a:schemeClr val="accent1"/>
+          </a:fillRef>
+          <a:effectRef idx="2">
+            <a:schemeClr val="accent1"/>
+          </a:effectRef>
+          <a:fontRef idx="minor">
+            <a:schemeClr val="lt1"/>
+          </a:fontRef>
+        </p:style>
+        <p:txBody>
+          <a:bodyPr rtlCol="0" anchor="ctr"/>
+          <a:lstStyle/>
+          <a:p/>
+        </p:txBody>
+      </p:sp>
+      <p:sp>
+        <p:nvSpPr>
+          <p:cNvPr id="22" name="TextBox 21"/>
+          <p:cNvSpPr txBox="1"/>
+          <p:nvPr/>
+        </p:nvSpPr>
+        <p:spPr>
+          <a:xfrm>
+            <a:off x="6434175" y="3121913"/>
+            <a:ext cx="365760" cy="256032"/>
+          </a:xfrm>
+          <a:prstGeom prst="rect">
+            <a:avLst/>
+          </a:prstGeom>
+          <a:noFill/>
+        </p:spPr>
+        <p:txBody>
+          <a:bodyPr wrap="square" lIns="0" rIns="0" tIns="0" bIns="0" anchor="t">
+            <a:spAutoFit/>
+          </a:bodyPr>
+          <a:lstStyle/>
+          <a:p>
+            <a:pPr algn="ctr">
+              <a:lnSpc>
+                <a:spcPct val="135000"/>
+              </a:lnSpc>
+            </a:pPr>
+            <a:r>
+              <a:rPr sz="1500" b="1" i="0">
+                <a:solidFill>
+                  <a:srgbClr val="6B4FBB"/>
+                </a:solidFill>
+                <a:latin typeface="Verdana"/>
+              </a:rPr>
+              <a:t>4</a:t>
+            </a:r>
+          </a:p>
+        </p:txBody>
+      </p:sp>
+      <p:sp>
+        <p:nvSpPr>
+          <p:cNvPr id="23" name="TextBox 22"/>
+          <p:cNvSpPr txBox="1"/>
+          <p:nvPr/>
+        </p:nvSpPr>
+        <p:spPr>
+          <a:xfrm>
+            <a:off x="6937095" y="3071876"/>
+            <a:ext cx="4504791" cy="374396"/>
+          </a:xfrm>
+          <a:prstGeom prst="rect">
+            <a:avLst/>
+          </a:prstGeom>
+          <a:noFill/>
+        </p:spPr>
+        <p:txBody>
+          <a:bodyPr wrap="square" lIns="0" rIns="0" tIns="0" bIns="0" anchor="t">
+            <a:spAutoFit/>
+          </a:bodyPr>
+          <a:lstStyle/>
+          <a:p>
+            <a:pPr algn="l">
+              <a:lnSpc>
+                <a:spcPct val="140000"/>
+              </a:lnSpc>
+            </a:pPr>
+            <a:r>
+              <a:rPr sz="1900" b="0" i="0">
+                <a:solidFill>
+                  <a:srgbClr val="3A3D40"/>
+                </a:solidFill>
+                <a:latin typeface="Verdana"/>
+              </a:rPr>
+              <a:t>neige   </a:t>
+            </a:r>
+            <a:r>
+              <a:rPr sz="1900" b="1" i="0">
+                <a:solidFill>
+                  <a:srgbClr val="07734A"/>
+                </a:solidFill>
+                <a:latin typeface="Verdana"/>
+              </a:rPr>
+              <a:t>» le son « è »</a:t>
+            </a:r>
+          </a:p>
+        </p:txBody>
+      </p:sp>
+      <p:sp>
+        <p:nvSpPr>
+          <p:cNvPr id="24" name="Rounded Rectangle 23"/>
+          <p:cNvSpPr/>
+          <p:nvPr/>
+        </p:nvSpPr>
+        <p:spPr>
+          <a:xfrm>
+            <a:off x="566928" y="3693160"/>
+            <a:ext cx="5464911" cy="648716"/>
+          </a:xfrm>
+          <a:prstGeom prst="roundRect">
+            <a:avLst>
+              <a:gd name="adj" fmla="val 22552"/>
+            </a:avLst>
+          </a:prstGeom>
+          <a:solidFill>
+            <a:srgbClr val="E6F5EE"/>
+          </a:solidFill>
+          <a:ln w="12700">
+            <a:solidFill>
+              <a:srgbClr val="EAEAE8"/>
+            </a:solidFill>
+          </a:ln>
+          <a:effectLst/>
+        </p:spPr>
+        <p:style>
+          <a:lnRef idx="1">
+            <a:schemeClr val="accent1"/>
+          </a:lnRef>
+          <a:fillRef idx="3">
+            <a:schemeClr val="accent1"/>
+          </a:fillRef>
+          <a:effectRef idx="2">
+            <a:schemeClr val="accent1"/>
+          </a:effectRef>
+          <a:fontRef idx="minor">
+            <a:schemeClr val="lt1"/>
+          </a:fontRef>
+        </p:style>
+        <p:txBody>
+          <a:bodyPr rtlCol="0" anchor="ctr"/>
+          <a:lstStyle/>
+          <a:p/>
+        </p:txBody>
+      </p:sp>
+      <p:sp>
+        <p:nvSpPr>
+          <p:cNvPr id="25" name="Rounded Rectangle 24"/>
+          <p:cNvSpPr/>
+          <p:nvPr/>
+        </p:nvSpPr>
+        <p:spPr>
+          <a:xfrm>
+            <a:off x="841247" y="3834638"/>
+            <a:ext cx="365760" cy="365760"/>
+          </a:xfrm>
+          <a:prstGeom prst="roundRect">
+            <a:avLst>
+              <a:gd name="adj" fmla="val 32500"/>
+            </a:avLst>
+          </a:prstGeom>
+          <a:solidFill>
+            <a:srgbClr val="EFEAFA"/>
+          </a:solidFill>
+          <a:ln>
+            <a:noFill/>
+          </a:ln>
+          <a:effectLst/>
+        </p:spPr>
+        <p:style>
+          <a:lnRef idx="1">
+            <a:schemeClr val="accent1"/>
+          </a:lnRef>
+          <a:fillRef idx="3">
+            <a:schemeClr val="accent1"/>
+          </a:fillRef>
+          <a:effectRef idx="2">
+            <a:schemeClr val="accent1"/>
+          </a:effectRef>
+          <a:fontRef idx="minor">
+            <a:schemeClr val="lt1"/>
+          </a:fontRef>
+        </p:style>
+        <p:txBody>
+          <a:bodyPr rtlCol="0" anchor="ctr"/>
+          <a:lstStyle/>
+          <a:p/>
+        </p:txBody>
+      </p:sp>
+      <p:sp>
+        <p:nvSpPr>
+          <p:cNvPr id="26" name="TextBox 25"/>
+          <p:cNvSpPr txBox="1"/>
+          <p:nvPr/>
+        </p:nvSpPr>
+        <p:spPr>
+          <a:xfrm>
+            <a:off x="841247" y="3898646"/>
+            <a:ext cx="365760" cy="256032"/>
+          </a:xfrm>
+          <a:prstGeom prst="rect">
+            <a:avLst/>
+          </a:prstGeom>
+          <a:noFill/>
+        </p:spPr>
+        <p:txBody>
+          <a:bodyPr wrap="square" lIns="0" rIns="0" tIns="0" bIns="0" anchor="t">
+            <a:spAutoFit/>
+          </a:bodyPr>
+          <a:lstStyle/>
+          <a:p>
+            <a:pPr algn="ctr">
+              <a:lnSpc>
+                <a:spcPct val="135000"/>
+              </a:lnSpc>
+            </a:pPr>
+            <a:r>
+              <a:rPr sz="1500" b="1" i="0">
+                <a:solidFill>
+                  <a:srgbClr val="6B4FBB"/>
+                </a:solidFill>
+                <a:latin typeface="Verdana"/>
+              </a:rPr>
+              <a:t>5</a:t>
+            </a:r>
+          </a:p>
+        </p:txBody>
+      </p:sp>
+      <p:sp>
+        <p:nvSpPr>
+          <p:cNvPr id="27" name="TextBox 26"/>
+          <p:cNvSpPr txBox="1"/>
+          <p:nvPr/>
+        </p:nvSpPr>
+        <p:spPr>
+          <a:xfrm>
+            <a:off x="1344168" y="3848608"/>
+            <a:ext cx="4504791" cy="374396"/>
+          </a:xfrm>
+          <a:prstGeom prst="rect">
+            <a:avLst/>
+          </a:prstGeom>
+          <a:noFill/>
+        </p:spPr>
+        <p:txBody>
+          <a:bodyPr wrap="square" lIns="0" rIns="0" tIns="0" bIns="0" anchor="t">
+            <a:spAutoFit/>
+          </a:bodyPr>
+          <a:lstStyle/>
+          <a:p>
+            <a:pPr algn="l">
+              <a:lnSpc>
+                <a:spcPct val="140000"/>
+              </a:lnSpc>
+            </a:pPr>
+            <a:r>
+              <a:rPr sz="1900" b="0" i="0">
+                <a:solidFill>
+                  <a:srgbClr val="3A3D40"/>
+                </a:solidFill>
+                <a:latin typeface="Verdana"/>
+              </a:rPr>
+              <a:t>préparer   </a:t>
+            </a:r>
+            <a:r>
+              <a:rPr sz="1900" b="1" i="0">
+                <a:solidFill>
+                  <a:srgbClr val="07734A"/>
+                </a:solidFill>
+                <a:latin typeface="Verdana"/>
+              </a:rPr>
+              <a:t>» le son « é »</a:t>
+            </a:r>
+          </a:p>
+        </p:txBody>
+      </p:sp>
+      <p:sp>
+        <p:nvSpPr>
+          <p:cNvPr id="28" name="Rounded Rectangle 27"/>
+          <p:cNvSpPr/>
+          <p:nvPr/>
+        </p:nvSpPr>
+        <p:spPr>
+          <a:xfrm>
+            <a:off x="6159855" y="3693160"/>
+            <a:ext cx="5464911" cy="648716"/>
+          </a:xfrm>
+          <a:prstGeom prst="roundRect">
+            <a:avLst>
+              <a:gd name="adj" fmla="val 22552"/>
+            </a:avLst>
+          </a:prstGeom>
+          <a:solidFill>
+            <a:srgbClr val="E6F5EE"/>
+          </a:solidFill>
+          <a:ln w="12700">
+            <a:solidFill>
+              <a:srgbClr val="EAEAE8"/>
+            </a:solidFill>
+          </a:ln>
+          <a:effectLst/>
+        </p:spPr>
+        <p:style>
+          <a:lnRef idx="1">
+            <a:schemeClr val="accent1"/>
+          </a:lnRef>
+          <a:fillRef idx="3">
+            <a:schemeClr val="accent1"/>
+          </a:fillRef>
+          <a:effectRef idx="2">
+            <a:schemeClr val="accent1"/>
+          </a:effectRef>
+          <a:fontRef idx="minor">
+            <a:schemeClr val="lt1"/>
+          </a:fontRef>
+        </p:style>
+        <p:txBody>
+          <a:bodyPr rtlCol="0" anchor="ctr"/>
+          <a:lstStyle/>
+          <a:p/>
+        </p:txBody>
+      </p:sp>
+      <p:sp>
+        <p:nvSpPr>
+          <p:cNvPr id="29" name="Rounded Rectangle 28"/>
+          <p:cNvSpPr/>
+          <p:nvPr/>
+        </p:nvSpPr>
+        <p:spPr>
+          <a:xfrm>
+            <a:off x="6434175" y="3834638"/>
+            <a:ext cx="365760" cy="365760"/>
+          </a:xfrm>
+          <a:prstGeom prst="roundRect">
+            <a:avLst>
+              <a:gd name="adj" fmla="val 32500"/>
+            </a:avLst>
+          </a:prstGeom>
+          <a:solidFill>
+            <a:srgbClr val="EFEAFA"/>
+          </a:solidFill>
+          <a:ln>
+            <a:noFill/>
+          </a:ln>
+          <a:effectLst/>
+        </p:spPr>
+        <p:style>
+          <a:lnRef idx="1">
+            <a:schemeClr val="accent1"/>
+          </a:lnRef>
+          <a:fillRef idx="3">
+            <a:schemeClr val="accent1"/>
+          </a:fillRef>
+          <a:effectRef idx="2">
+            <a:schemeClr val="accent1"/>
+          </a:effectRef>
+          <a:fontRef idx="minor">
+            <a:schemeClr val="lt1"/>
+          </a:fontRef>
+        </p:style>
+        <p:txBody>
+          <a:bodyPr rtlCol="0" anchor="ctr"/>
+          <a:lstStyle/>
+          <a:p/>
+        </p:txBody>
+      </p:sp>
+      <p:sp>
+        <p:nvSpPr>
+          <p:cNvPr id="30" name="TextBox 29"/>
+          <p:cNvSpPr txBox="1"/>
+          <p:nvPr/>
+        </p:nvSpPr>
+        <p:spPr>
+          <a:xfrm>
+            <a:off x="6434175" y="3898646"/>
+            <a:ext cx="365760" cy="256032"/>
+          </a:xfrm>
+          <a:prstGeom prst="rect">
+            <a:avLst/>
+          </a:prstGeom>
+          <a:noFill/>
+        </p:spPr>
+        <p:txBody>
+          <a:bodyPr wrap="square" lIns="0" rIns="0" tIns="0" bIns="0" anchor="t">
+            <a:spAutoFit/>
+          </a:bodyPr>
+          <a:lstStyle/>
+          <a:p>
+            <a:pPr algn="ctr">
+              <a:lnSpc>
+                <a:spcPct val="135000"/>
+              </a:lnSpc>
+            </a:pPr>
+            <a:r>
+              <a:rPr sz="1500" b="1" i="0">
+                <a:solidFill>
+                  <a:srgbClr val="6B4FBB"/>
+                </a:solidFill>
+                <a:latin typeface="Verdana"/>
+              </a:rPr>
+              <a:t>6</a:t>
+            </a:r>
+          </a:p>
+        </p:txBody>
+      </p:sp>
+      <p:sp>
+        <p:nvSpPr>
+          <p:cNvPr id="31" name="TextBox 30"/>
+          <p:cNvSpPr txBox="1"/>
+          <p:nvPr/>
+        </p:nvSpPr>
+        <p:spPr>
+          <a:xfrm>
+            <a:off x="6937095" y="3848608"/>
+            <a:ext cx="4504791" cy="374396"/>
+          </a:xfrm>
+          <a:prstGeom prst="rect">
+            <a:avLst/>
+          </a:prstGeom>
+          <a:noFill/>
+        </p:spPr>
+        <p:txBody>
+          <a:bodyPr wrap="square" lIns="0" rIns="0" tIns="0" bIns="0" anchor="t">
+            <a:spAutoFit/>
+          </a:bodyPr>
+          <a:lstStyle/>
+          <a:p>
+            <a:pPr algn="l">
+              <a:lnSpc>
+                <a:spcPct val="140000"/>
+              </a:lnSpc>
+            </a:pPr>
+            <a:r>
+              <a:rPr sz="1900" b="0" i="0">
+                <a:solidFill>
+                  <a:srgbClr val="3A3D40"/>
+                </a:solidFill>
+                <a:latin typeface="Verdana"/>
+              </a:rPr>
+              <a:t>verglas   </a:t>
+            </a:r>
+            <a:r>
+              <a:rPr sz="1900" b="1" i="0">
+                <a:solidFill>
+                  <a:srgbClr val="07734A"/>
+                </a:solidFill>
+                <a:latin typeface="Verdana"/>
+              </a:rPr>
+              <a:t>» le son « è »</a:t>
+            </a:r>
+          </a:p>
+        </p:txBody>
+      </p:sp>
+      <p:sp>
+        <p:nvSpPr>
+          <p:cNvPr id="32" name="Rounded Rectangle 31"/>
+          <p:cNvSpPr/>
+          <p:nvPr/>
+        </p:nvSpPr>
+        <p:spPr>
+          <a:xfrm>
+            <a:off x="566928" y="4469892"/>
+            <a:ext cx="5464911" cy="648716"/>
+          </a:xfrm>
+          <a:prstGeom prst="roundRect">
+            <a:avLst>
+              <a:gd name="adj" fmla="val 22552"/>
+            </a:avLst>
+          </a:prstGeom>
+          <a:solidFill>
+            <a:srgbClr val="E6F5EE"/>
+          </a:solidFill>
+          <a:ln w="12700">
+            <a:solidFill>
+              <a:srgbClr val="EAEAE8"/>
+            </a:solidFill>
+          </a:ln>
+          <a:effectLst/>
+        </p:spPr>
+        <p:style>
+          <a:lnRef idx="1">
+            <a:schemeClr val="accent1"/>
+          </a:lnRef>
+          <a:fillRef idx="3">
+            <a:schemeClr val="accent1"/>
+          </a:fillRef>
+          <a:effectRef idx="2">
+            <a:schemeClr val="accent1"/>
+          </a:effectRef>
+          <a:fontRef idx="minor">
+            <a:schemeClr val="lt1"/>
+          </a:fontRef>
+        </p:style>
+        <p:txBody>
+          <a:bodyPr rtlCol="0" anchor="ctr"/>
+          <a:lstStyle/>
+          <a:p/>
+        </p:txBody>
+      </p:sp>
+      <p:sp>
+        <p:nvSpPr>
+          <p:cNvPr id="33" name="Rounded Rectangle 32"/>
+          <p:cNvSpPr/>
+          <p:nvPr/>
+        </p:nvSpPr>
+        <p:spPr>
+          <a:xfrm>
+            <a:off x="841247" y="4611370"/>
+            <a:ext cx="365760" cy="365760"/>
+          </a:xfrm>
+          <a:prstGeom prst="roundRect">
+            <a:avLst>
+              <a:gd name="adj" fmla="val 32500"/>
+            </a:avLst>
+          </a:prstGeom>
+          <a:solidFill>
+            <a:srgbClr val="EFEAFA"/>
+          </a:solidFill>
+          <a:ln>
+            <a:noFill/>
+          </a:ln>
+          <a:effectLst/>
+        </p:spPr>
+        <p:style>
+          <a:lnRef idx="1">
+            <a:schemeClr val="accent1"/>
+          </a:lnRef>
+          <a:fillRef idx="3">
+            <a:schemeClr val="accent1"/>
+          </a:fillRef>
+          <a:effectRef idx="2">
+            <a:schemeClr val="accent1"/>
+          </a:effectRef>
+          <a:fontRef idx="minor">
+            <a:schemeClr val="lt1"/>
+          </a:fontRef>
+        </p:style>
+        <p:txBody>
+          <a:bodyPr rtlCol="0" anchor="ctr"/>
+          <a:lstStyle/>
+          <a:p/>
+        </p:txBody>
+      </p:sp>
+      <p:sp>
+        <p:nvSpPr>
+          <p:cNvPr id="34" name="TextBox 33"/>
+          <p:cNvSpPr txBox="1"/>
+          <p:nvPr/>
+        </p:nvSpPr>
+        <p:spPr>
+          <a:xfrm>
+            <a:off x="841247" y="4675378"/>
+            <a:ext cx="365760" cy="256032"/>
+          </a:xfrm>
+          <a:prstGeom prst="rect">
+            <a:avLst/>
+          </a:prstGeom>
+          <a:noFill/>
+        </p:spPr>
+        <p:txBody>
+          <a:bodyPr wrap="square" lIns="0" rIns="0" tIns="0" bIns="0" anchor="t">
+            <a:spAutoFit/>
+          </a:bodyPr>
+          <a:lstStyle/>
+          <a:p>
+            <a:pPr algn="ctr">
+              <a:lnSpc>
+                <a:spcPct val="135000"/>
+              </a:lnSpc>
+            </a:pPr>
+            <a:r>
+              <a:rPr sz="1500" b="1" i="0">
+                <a:solidFill>
+                  <a:srgbClr val="6B4FBB"/>
+                </a:solidFill>
+                <a:latin typeface="Verdana"/>
+              </a:rPr>
+              <a:t>7</a:t>
+            </a:r>
+          </a:p>
+        </p:txBody>
+      </p:sp>
+      <p:sp>
+        <p:nvSpPr>
+          <p:cNvPr id="35" name="TextBox 34"/>
+          <p:cNvSpPr txBox="1"/>
+          <p:nvPr/>
+        </p:nvSpPr>
+        <p:spPr>
+          <a:xfrm>
+            <a:off x="1344168" y="4625340"/>
+            <a:ext cx="4504791" cy="374396"/>
+          </a:xfrm>
+          <a:prstGeom prst="rect">
+            <a:avLst/>
+          </a:prstGeom>
+          <a:noFill/>
+        </p:spPr>
+        <p:txBody>
+          <a:bodyPr wrap="square" lIns="0" rIns="0" tIns="0" bIns="0" anchor="t">
+            <a:spAutoFit/>
+          </a:bodyPr>
+          <a:lstStyle/>
+          <a:p>
+            <a:pPr algn="l">
+              <a:lnSpc>
+                <a:spcPct val="140000"/>
+              </a:lnSpc>
+            </a:pPr>
+            <a:r>
+              <a:rPr sz="1900" b="0" i="0">
+                <a:solidFill>
+                  <a:srgbClr val="3A3D40"/>
+                </a:solidFill>
+                <a:latin typeface="Verdana"/>
+              </a:rPr>
+              <a:t>journée   </a:t>
+            </a:r>
+            <a:r>
+              <a:rPr sz="1900" b="1" i="0">
+                <a:solidFill>
+                  <a:srgbClr val="07734A"/>
+                </a:solidFill>
+                <a:latin typeface="Verdana"/>
+              </a:rPr>
+              <a:t>» le son « é »</a:t>
+            </a:r>
+          </a:p>
+        </p:txBody>
+      </p:sp>
+      <p:sp>
+        <p:nvSpPr>
+          <p:cNvPr id="36" name="Rounded Rectangle 35"/>
+          <p:cNvSpPr/>
+          <p:nvPr/>
+        </p:nvSpPr>
+        <p:spPr>
+          <a:xfrm>
+            <a:off x="6159855" y="4469892"/>
+            <a:ext cx="5464911" cy="648716"/>
+          </a:xfrm>
+          <a:prstGeom prst="roundRect">
+            <a:avLst>
+              <a:gd name="adj" fmla="val 22552"/>
+            </a:avLst>
+          </a:prstGeom>
+          <a:solidFill>
+            <a:srgbClr val="E6F5EE"/>
+          </a:solidFill>
+          <a:ln w="12700">
+            <a:solidFill>
+              <a:srgbClr val="EAEAE8"/>
+            </a:solidFill>
+          </a:ln>
+          <a:effectLst/>
+        </p:spPr>
+        <p:style>
+          <a:lnRef idx="1">
+            <a:schemeClr val="accent1"/>
+          </a:lnRef>
+          <a:fillRef idx="3">
+            <a:schemeClr val="accent1"/>
+          </a:fillRef>
+          <a:effectRef idx="2">
+            <a:schemeClr val="accent1"/>
+          </a:effectRef>
+          <a:fontRef idx="minor">
+            <a:schemeClr val="lt1"/>
+          </a:fontRef>
+        </p:style>
+        <p:txBody>
+          <a:bodyPr rtlCol="0" anchor="ctr"/>
+          <a:lstStyle/>
+          <a:p/>
+        </p:txBody>
+      </p:sp>
+      <p:sp>
+        <p:nvSpPr>
+          <p:cNvPr id="37" name="Rounded Rectangle 36"/>
+          <p:cNvSpPr/>
+          <p:nvPr/>
+        </p:nvSpPr>
+        <p:spPr>
+          <a:xfrm>
+            <a:off x="6434175" y="4611370"/>
+            <a:ext cx="365760" cy="365760"/>
+          </a:xfrm>
+          <a:prstGeom prst="roundRect">
+            <a:avLst>
+              <a:gd name="adj" fmla="val 32500"/>
+            </a:avLst>
+          </a:prstGeom>
+          <a:solidFill>
+            <a:srgbClr val="EFEAFA"/>
+          </a:solidFill>
+          <a:ln>
+            <a:noFill/>
+          </a:ln>
+          <a:effectLst/>
+        </p:spPr>
+        <p:style>
+          <a:lnRef idx="1">
+            <a:schemeClr val="accent1"/>
+          </a:lnRef>
+          <a:fillRef idx="3">
+            <a:schemeClr val="accent1"/>
+          </a:fillRef>
+          <a:effectRef idx="2">
+            <a:schemeClr val="accent1"/>
+          </a:effectRef>
+          <a:fontRef idx="minor">
+            <a:schemeClr val="lt1"/>
+          </a:fontRef>
+        </p:style>
+        <p:txBody>
+          <a:bodyPr rtlCol="0" anchor="ctr"/>
+          <a:lstStyle/>
+          <a:p/>
+        </p:txBody>
+      </p:sp>
+      <p:sp>
+        <p:nvSpPr>
+          <p:cNvPr id="38" name="TextBox 37"/>
+          <p:cNvSpPr txBox="1"/>
+          <p:nvPr/>
+        </p:nvSpPr>
+        <p:spPr>
+          <a:xfrm>
+            <a:off x="6434175" y="4675378"/>
+            <a:ext cx="365760" cy="256032"/>
+          </a:xfrm>
+          <a:prstGeom prst="rect">
+            <a:avLst/>
+          </a:prstGeom>
+          <a:noFill/>
+        </p:spPr>
+        <p:txBody>
+          <a:bodyPr wrap="square" lIns="0" rIns="0" tIns="0" bIns="0" anchor="t">
+            <a:spAutoFit/>
+          </a:bodyPr>
+          <a:lstStyle/>
+          <a:p>
+            <a:pPr algn="ctr">
+              <a:lnSpc>
+                <a:spcPct val="135000"/>
+              </a:lnSpc>
+            </a:pPr>
+            <a:r>
+              <a:rPr sz="1500" b="1" i="0">
+                <a:solidFill>
+                  <a:srgbClr val="6B4FBB"/>
+                </a:solidFill>
+                <a:latin typeface="Verdana"/>
+              </a:rPr>
+              <a:t>8</a:t>
+            </a:r>
+          </a:p>
+        </p:txBody>
+      </p:sp>
+      <p:sp>
+        <p:nvSpPr>
+          <p:cNvPr id="39" name="TextBox 38"/>
+          <p:cNvSpPr txBox="1"/>
+          <p:nvPr/>
+        </p:nvSpPr>
+        <p:spPr>
+          <a:xfrm>
+            <a:off x="6937095" y="4625340"/>
+            <a:ext cx="4504791" cy="374396"/>
+          </a:xfrm>
+          <a:prstGeom prst="rect">
+            <a:avLst/>
+          </a:prstGeom>
+          <a:noFill/>
+        </p:spPr>
+        <p:txBody>
+          <a:bodyPr wrap="square" lIns="0" rIns="0" tIns="0" bIns="0" anchor="t">
+            <a:spAutoFit/>
+          </a:bodyPr>
+          <a:lstStyle/>
+          <a:p>
+            <a:pPr algn="l">
+              <a:lnSpc>
+                <a:spcPct val="140000"/>
+              </a:lnSpc>
+            </a:pPr>
+            <a:r>
+              <a:rPr sz="1900" b="0" i="0">
+                <a:solidFill>
+                  <a:srgbClr val="3A3D40"/>
+                </a:solidFill>
+                <a:latin typeface="Verdana"/>
+              </a:rPr>
+              <a:t>après   </a:t>
+            </a:r>
+            <a:r>
+              <a:rPr sz="1900" b="1" i="0">
+                <a:solidFill>
+                  <a:srgbClr val="07734A"/>
+                </a:solidFill>
+                <a:latin typeface="Verdana"/>
+              </a:rPr>
+              <a:t>» le son « è »</a:t>
+            </a:r>
+          </a:p>
+        </p:txBody>
+      </p:sp>
+    </p:spTree>
+  </p:cSld>
+  <p:clrMapOvr>
+    <a:masterClrMapping/>
+  </p:clrMapOvr>
+</p:sld>
+</file>
+
+<file path=ppt/slides/slide21.xml><?xml version="1.0" encoding="utf-8"?>
+<p:sld xmlns:a="http://schemas.openxmlformats.org/drawingml/2006/main" xmlns:p="http://schemas.openxmlformats.org/presentationml/2006/main" xmlns:r="http://schemas.openxmlformats.org/officeDocument/2006/relationships">
+  <p:cSld>
+    <p:spTree>
+      <p:nvGrpSpPr>
+        <p:cNvPr id="1" name=""/>
+        <p:cNvGrpSpPr/>
+        <p:nvPr/>
+      </p:nvGrpSpPr>
+      <p:grpSpPr/>
+      <p:sp>
+        <p:nvSpPr>
+          <p:cNvPr id="2" name="Rectangle 1"/>
+          <p:cNvSpPr/>
+          <p:nvPr/>
+        </p:nvSpPr>
+        <p:spPr>
+          <a:xfrm>
+            <a:off x="0" y="0"/>
+            <a:ext cx="12191695" cy="6858000"/>
+          </a:xfrm>
+          <a:prstGeom prst="rect">
+            <a:avLst/>
+          </a:prstGeom>
+          <a:solidFill>
+            <a:srgbClr val="F7F7F5"/>
+          </a:solidFill>
+          <a:ln>
+            <a:noFill/>
+          </a:ln>
+          <a:effectLst/>
+        </p:spPr>
+        <p:style>
+          <a:lnRef idx="1">
+            <a:schemeClr val="accent1"/>
+          </a:lnRef>
+          <a:fillRef idx="3">
+            <a:schemeClr val="accent1"/>
+          </a:fillRef>
+          <a:effectRef idx="2">
+            <a:schemeClr val="accent1"/>
+          </a:effectRef>
+          <a:fontRef idx="minor">
+            <a:schemeClr val="lt1"/>
+          </a:fontRef>
+        </p:style>
+        <p:txBody>
+          <a:bodyPr rtlCol="0" anchor="ctr"/>
+          <a:lstStyle/>
+          <a:p/>
+        </p:txBody>
+      </p:sp>
+      <p:sp>
+        <p:nvSpPr>
+          <p:cNvPr id="3" name="TextBox 2"/>
+          <p:cNvSpPr txBox="1"/>
+          <p:nvPr/>
+        </p:nvSpPr>
+        <p:spPr>
+          <a:xfrm>
+            <a:off x="566928" y="6355080"/>
+            <a:ext cx="6400800" cy="219456"/>
+          </a:xfrm>
+          <a:prstGeom prst="rect">
+            <a:avLst/>
+          </a:prstGeom>
+          <a:noFill/>
+        </p:spPr>
+        <p:txBody>
+          <a:bodyPr wrap="square" lIns="0" rIns="0" tIns="0" bIns="0" anchor="t">
+            <a:spAutoFit/>
+          </a:bodyPr>
+          <a:lstStyle/>
+          <a:p>
+            <a:pPr algn="l">
+              <a:lnSpc>
+                <a:spcPct val="135000"/>
+              </a:lnSpc>
+            </a:pPr>
+            <a:r>
+              <a:rPr sz="1200" b="0" i="0">
+                <a:solidFill>
+                  <a:srgbClr val="6E7175"/>
+                </a:solidFill>
+                <a:latin typeface="Verdana"/>
+              </a:rPr>
+              <a:t>A2 · Quelles sont les prévisions ?</a:t>
+            </a:r>
+          </a:p>
+        </p:txBody>
+      </p:sp>
+      <p:sp>
+        <p:nvSpPr>
+          <p:cNvPr id="4" name="TextBox 3"/>
+          <p:cNvSpPr txBox="1"/>
+          <p:nvPr/>
+        </p:nvSpPr>
+        <p:spPr>
+          <a:xfrm>
+            <a:off x="10710367" y="6355080"/>
+            <a:ext cx="914400" cy="219456"/>
+          </a:xfrm>
+          <a:prstGeom prst="rect">
+            <a:avLst/>
+          </a:prstGeom>
+          <a:noFill/>
+        </p:spPr>
+        <p:txBody>
+          <a:bodyPr wrap="square" lIns="0" rIns="0" tIns="0" bIns="0" anchor="t">
+            <a:spAutoFit/>
+          </a:bodyPr>
+          <a:lstStyle/>
+          <a:p>
+            <a:pPr algn="r">
+              <a:lnSpc>
+                <a:spcPct val="135000"/>
+              </a:lnSpc>
+            </a:pPr>
+            <a:r>
+              <a:rPr sz="1200" b="0" i="0">
+                <a:solidFill>
+                  <a:srgbClr val="6E7175"/>
+                </a:solidFill>
+                <a:latin typeface="Verdana"/>
+              </a:rPr>
+              <a:t>21</a:t>
+            </a:r>
+          </a:p>
+        </p:txBody>
+      </p:sp>
+      <p:sp>
+        <p:nvSpPr>
+          <p:cNvPr id="5" name="TextBox 4"/>
+          <p:cNvSpPr txBox="1"/>
+          <p:nvPr/>
+        </p:nvSpPr>
+        <p:spPr>
+          <a:xfrm>
+            <a:off x="566928" y="420624"/>
+            <a:ext cx="11057839" cy="237744"/>
+          </a:xfrm>
+          <a:prstGeom prst="rect">
+            <a:avLst/>
+          </a:prstGeom>
+          <a:noFill/>
+        </p:spPr>
+        <p:txBody>
+          <a:bodyPr wrap="square" lIns="0" rIns="0" tIns="0" bIns="0" anchor="t">
+            <a:spAutoFit/>
+          </a:bodyPr>
+          <a:lstStyle/>
+          <a:p>
+            <a:pPr algn="l">
+              <a:lnSpc>
+                <a:spcPct val="135000"/>
+              </a:lnSpc>
+            </a:pPr>
+            <a:r>
+              <a:rPr sz="1300" b="1" i="0" spc="156">
+                <a:solidFill>
+                  <a:srgbClr val="6B4FBB"/>
+                </a:solidFill>
+                <a:latin typeface="Verdana"/>
+              </a:rPr>
+              <a:t>PRATIQUE · 6 DE 6</a:t>
+            </a:r>
+          </a:p>
+        </p:txBody>
+      </p:sp>
+      <p:sp>
+        <p:nvSpPr>
+          <p:cNvPr id="6" name="TextBox 5"/>
+          <p:cNvSpPr txBox="1"/>
+          <p:nvPr/>
+        </p:nvSpPr>
+        <p:spPr>
+          <a:xfrm>
+            <a:off x="566928" y="749808"/>
+            <a:ext cx="11057839" cy="877824"/>
+          </a:xfrm>
+          <a:prstGeom prst="rect">
+            <a:avLst/>
+          </a:prstGeom>
+          <a:noFill/>
+        </p:spPr>
+        <p:txBody>
+          <a:bodyPr wrap="square" lIns="0" rIns="0" tIns="0" bIns="0" anchor="t">
+            <a:spAutoFit/>
+          </a:bodyPr>
+          <a:lstStyle/>
+          <a:p>
+            <a:pPr algn="l">
+              <a:lnSpc>
+                <a:spcPct val="115000"/>
+              </a:lnSpc>
+            </a:pPr>
+            <a:r>
+              <a:rPr sz="3400" b="1" i="0">
+                <a:solidFill>
+                  <a:srgbClr val="17181A"/>
+                </a:solidFill>
+                <a:latin typeface="Verdana"/>
+              </a:rPr>
+              <a:t>Trois phrases de bulletin à lire à voix haute</a:t>
+            </a:r>
+          </a:p>
+        </p:txBody>
+      </p:sp>
+      <p:sp>
+        <p:nvSpPr>
+          <p:cNvPr id="7" name="TextBox 6"/>
+          <p:cNvSpPr txBox="1"/>
+          <p:nvPr/>
+        </p:nvSpPr>
+        <p:spPr>
+          <a:xfrm>
+            <a:off x="566928" y="1645920"/>
+            <a:ext cx="11057839" cy="329184"/>
+          </a:xfrm>
+          <a:prstGeom prst="rect">
+            <a:avLst/>
+          </a:prstGeom>
+          <a:noFill/>
+        </p:spPr>
+        <p:txBody>
+          <a:bodyPr wrap="square" lIns="0" rIns="0" tIns="0" bIns="0" anchor="t">
+            <a:spAutoFit/>
+          </a:bodyPr>
+          <a:lstStyle/>
+          <a:p>
+            <a:pPr algn="l">
+              <a:lnSpc>
+                <a:spcPct val="135000"/>
+              </a:lnSpc>
+            </a:pPr>
+            <a:r>
+              <a:rPr sz="1800" b="0" i="0">
+                <a:solidFill>
+                  <a:srgbClr val="6E7175"/>
+                </a:solidFill>
+                <a:latin typeface="Verdana"/>
+              </a:rPr>
+              <a:t>Chacun lit une phrase. Le groupe ne corrige que les é et les è.</a:t>
+            </a:r>
+          </a:p>
+        </p:txBody>
+      </p:sp>
+      <p:sp>
+        <p:nvSpPr>
+          <p:cNvPr id="8" name="Rounded Rectangle 7"/>
+          <p:cNvSpPr/>
+          <p:nvPr/>
+        </p:nvSpPr>
+        <p:spPr>
+          <a:xfrm>
+            <a:off x="566928" y="2139696"/>
+            <a:ext cx="11057839" cy="648716"/>
+          </a:xfrm>
+          <a:prstGeom prst="roundRect">
+            <a:avLst>
+              <a:gd name="adj" fmla="val 22552"/>
+            </a:avLst>
+          </a:prstGeom>
+          <a:solidFill>
+            <a:srgbClr val="FFFFFF"/>
+          </a:solidFill>
+          <a:ln w="12700">
+            <a:solidFill>
+              <a:srgbClr val="EAEAE8"/>
+            </a:solidFill>
+          </a:ln>
+          <a:effectLst/>
+        </p:spPr>
+        <p:style>
+          <a:lnRef idx="1">
+            <a:schemeClr val="accent1"/>
+          </a:lnRef>
+          <a:fillRef idx="3">
+            <a:schemeClr val="accent1"/>
+          </a:fillRef>
+          <a:effectRef idx="2">
+            <a:schemeClr val="accent1"/>
+          </a:effectRef>
+          <a:fontRef idx="minor">
+            <a:schemeClr val="lt1"/>
+          </a:fontRef>
+        </p:style>
+        <p:txBody>
+          <a:bodyPr rtlCol="0" anchor="ctr"/>
+          <a:lstStyle/>
+          <a:p/>
+        </p:txBody>
+      </p:sp>
+      <p:sp>
+        <p:nvSpPr>
+          <p:cNvPr id="9" name="Rounded Rectangle 8"/>
+          <p:cNvSpPr/>
+          <p:nvPr/>
+        </p:nvSpPr>
+        <p:spPr>
+          <a:xfrm>
+            <a:off x="841247" y="2281174"/>
+            <a:ext cx="365760" cy="365760"/>
+          </a:xfrm>
+          <a:prstGeom prst="roundRect">
+            <a:avLst>
+              <a:gd name="adj" fmla="val 32500"/>
+            </a:avLst>
+          </a:prstGeom>
+          <a:solidFill>
+            <a:srgbClr val="EFEAFA"/>
+          </a:solidFill>
+          <a:ln>
+            <a:noFill/>
+          </a:ln>
+          <a:effectLst/>
+        </p:spPr>
+        <p:style>
+          <a:lnRef idx="1">
+            <a:schemeClr val="accent1"/>
+          </a:lnRef>
+          <a:fillRef idx="3">
+            <a:schemeClr val="accent1"/>
+          </a:fillRef>
+          <a:effectRef idx="2">
+            <a:schemeClr val="accent1"/>
+          </a:effectRef>
+          <a:fontRef idx="minor">
+            <a:schemeClr val="lt1"/>
+          </a:fontRef>
+        </p:style>
+        <p:txBody>
+          <a:bodyPr rtlCol="0" anchor="ctr"/>
+          <a:lstStyle/>
+          <a:p/>
+        </p:txBody>
+      </p:sp>
+      <p:sp>
+        <p:nvSpPr>
+          <p:cNvPr id="10" name="TextBox 9"/>
+          <p:cNvSpPr txBox="1"/>
+          <p:nvPr/>
+        </p:nvSpPr>
+        <p:spPr>
+          <a:xfrm>
+            <a:off x="841247" y="2345182"/>
+            <a:ext cx="365760" cy="256032"/>
+          </a:xfrm>
+          <a:prstGeom prst="rect">
+            <a:avLst/>
+          </a:prstGeom>
+          <a:noFill/>
+        </p:spPr>
+        <p:txBody>
+          <a:bodyPr wrap="square" lIns="0" rIns="0" tIns="0" bIns="0" anchor="t">
+            <a:spAutoFit/>
+          </a:bodyPr>
+          <a:lstStyle/>
+          <a:p>
+            <a:pPr algn="ctr">
+              <a:lnSpc>
+                <a:spcPct val="135000"/>
+              </a:lnSpc>
+            </a:pPr>
+            <a:r>
+              <a:rPr sz="1500" b="1" i="0">
+                <a:solidFill>
+                  <a:srgbClr val="6B4FBB"/>
+                </a:solidFill>
+                <a:latin typeface="Verdana"/>
+              </a:rPr>
+              <a:t>1</a:t>
+            </a:r>
+          </a:p>
+        </p:txBody>
+      </p:sp>
+      <p:sp>
+        <p:nvSpPr>
+          <p:cNvPr id="11" name="TextBox 10"/>
+          <p:cNvSpPr txBox="1"/>
+          <p:nvPr/>
+        </p:nvSpPr>
+        <p:spPr>
+          <a:xfrm>
+            <a:off x="1344168" y="2295144"/>
+            <a:ext cx="10097719" cy="374396"/>
+          </a:xfrm>
+          <a:prstGeom prst="rect">
+            <a:avLst/>
+          </a:prstGeom>
+          <a:noFill/>
+        </p:spPr>
+        <p:txBody>
+          <a:bodyPr wrap="square" lIns="0" rIns="0" tIns="0" bIns="0" anchor="t">
+            <a:spAutoFit/>
+          </a:bodyPr>
+          <a:lstStyle/>
+          <a:p>
+            <a:pPr algn="l">
+              <a:lnSpc>
+                <a:spcPct val="140000"/>
+              </a:lnSpc>
+            </a:pPr>
+            <a:r>
+              <a:rPr sz="1900" b="0" i="0">
+                <a:solidFill>
+                  <a:srgbClr val="3A3D40"/>
+                </a:solidFill>
+                <a:latin typeface="Verdana"/>
+              </a:rPr>
+              <a:t>La météo annonce dix degrés sous zéro.</a:t>
+            </a:r>
+          </a:p>
+        </p:txBody>
+      </p:sp>
+      <p:sp>
+        <p:nvSpPr>
+          <p:cNvPr id="12" name="Rounded Rectangle 11"/>
+          <p:cNvSpPr/>
+          <p:nvPr/>
+        </p:nvSpPr>
+        <p:spPr>
+          <a:xfrm>
+            <a:off x="566928" y="2916428"/>
+            <a:ext cx="11057839" cy="648716"/>
+          </a:xfrm>
+          <a:prstGeom prst="roundRect">
+            <a:avLst>
+              <a:gd name="adj" fmla="val 22552"/>
+            </a:avLst>
+          </a:prstGeom>
+          <a:solidFill>
+            <a:srgbClr val="FFFFFF"/>
+          </a:solidFill>
+          <a:ln w="12700">
+            <a:solidFill>
+              <a:srgbClr val="EAEAE8"/>
+            </a:solidFill>
+          </a:ln>
+          <a:effectLst/>
+        </p:spPr>
+        <p:style>
+          <a:lnRef idx="1">
+            <a:schemeClr val="accent1"/>
+          </a:lnRef>
+          <a:fillRef idx="3">
+            <a:schemeClr val="accent1"/>
+          </a:fillRef>
+          <a:effectRef idx="2">
+            <a:schemeClr val="accent1"/>
+          </a:effectRef>
+          <a:fontRef idx="minor">
+            <a:schemeClr val="lt1"/>
+          </a:fontRef>
+        </p:style>
+        <p:txBody>
+          <a:bodyPr rtlCol="0" anchor="ctr"/>
+          <a:lstStyle/>
+          <a:p/>
+        </p:txBody>
+      </p:sp>
+      <p:sp>
+        <p:nvSpPr>
+          <p:cNvPr id="13" name="Rounded Rectangle 12"/>
+          <p:cNvSpPr/>
+          <p:nvPr/>
+        </p:nvSpPr>
+        <p:spPr>
+          <a:xfrm>
+            <a:off x="841247" y="3057905"/>
+            <a:ext cx="365760" cy="365760"/>
+          </a:xfrm>
+          <a:prstGeom prst="roundRect">
+            <a:avLst>
+              <a:gd name="adj" fmla="val 32500"/>
+            </a:avLst>
+          </a:prstGeom>
+          <a:solidFill>
+            <a:srgbClr val="EFEAFA"/>
+          </a:solidFill>
+          <a:ln>
+            <a:noFill/>
+          </a:ln>
+          <a:effectLst/>
+        </p:spPr>
+        <p:style>
+          <a:lnRef idx="1">
+            <a:schemeClr val="accent1"/>
+          </a:lnRef>
+          <a:fillRef idx="3">
+            <a:schemeClr val="accent1"/>
+          </a:fillRef>
+          <a:effectRef idx="2">
+            <a:schemeClr val="accent1"/>
+          </a:effectRef>
+          <a:fontRef idx="minor">
+            <a:schemeClr val="lt1"/>
+          </a:fontRef>
+        </p:style>
+        <p:txBody>
+          <a:bodyPr rtlCol="0" anchor="ctr"/>
+          <a:lstStyle/>
+          <a:p/>
+        </p:txBody>
+      </p:sp>
+      <p:sp>
+        <p:nvSpPr>
+          <p:cNvPr id="14" name="TextBox 13"/>
+          <p:cNvSpPr txBox="1"/>
+          <p:nvPr/>
+        </p:nvSpPr>
+        <p:spPr>
+          <a:xfrm>
+            <a:off x="841247" y="3121913"/>
+            <a:ext cx="365760" cy="256032"/>
+          </a:xfrm>
+          <a:prstGeom prst="rect">
+            <a:avLst/>
+          </a:prstGeom>
+          <a:noFill/>
+        </p:spPr>
+        <p:txBody>
+          <a:bodyPr wrap="square" lIns="0" rIns="0" tIns="0" bIns="0" anchor="t">
+            <a:spAutoFit/>
+          </a:bodyPr>
+          <a:lstStyle/>
+          <a:p>
+            <a:pPr algn="ctr">
+              <a:lnSpc>
+                <a:spcPct val="135000"/>
+              </a:lnSpc>
+            </a:pPr>
+            <a:r>
+              <a:rPr sz="1500" b="1" i="0">
+                <a:solidFill>
+                  <a:srgbClr val="6B4FBB"/>
+                </a:solidFill>
+                <a:latin typeface="Verdana"/>
+              </a:rPr>
+              <a:t>2</a:t>
+            </a:r>
+          </a:p>
+        </p:txBody>
+      </p:sp>
+      <p:sp>
+        <p:nvSpPr>
+          <p:cNvPr id="15" name="TextBox 14"/>
+          <p:cNvSpPr txBox="1"/>
+          <p:nvPr/>
+        </p:nvSpPr>
+        <p:spPr>
+          <a:xfrm>
+            <a:off x="1344168" y="3071876"/>
+            <a:ext cx="10097719" cy="374396"/>
+          </a:xfrm>
+          <a:prstGeom prst="rect">
+            <a:avLst/>
+          </a:prstGeom>
+          <a:noFill/>
+        </p:spPr>
+        <p:txBody>
+          <a:bodyPr wrap="square" lIns="0" rIns="0" tIns="0" bIns="0" anchor="t">
+            <a:spAutoFit/>
+          </a:bodyPr>
+          <a:lstStyle/>
+          <a:p>
+            <a:pPr algn="l">
+              <a:lnSpc>
+                <a:spcPct val="140000"/>
+              </a:lnSpc>
+            </a:pPr>
+            <a:r>
+              <a:rPr sz="1900" b="0" i="0">
+                <a:solidFill>
+                  <a:srgbClr val="3A3D40"/>
+                </a:solidFill>
+                <a:latin typeface="Verdana"/>
+              </a:rPr>
+              <a:t>La neige tombe et la visibilité est de cent mètres.</a:t>
+            </a:r>
+          </a:p>
+        </p:txBody>
+      </p:sp>
+      <p:sp>
+        <p:nvSpPr>
+          <p:cNvPr id="16" name="Rounded Rectangle 15"/>
+          <p:cNvSpPr/>
+          <p:nvPr/>
+        </p:nvSpPr>
+        <p:spPr>
+          <a:xfrm>
+            <a:off x="566928" y="3693160"/>
+            <a:ext cx="11057839" cy="648716"/>
+          </a:xfrm>
+          <a:prstGeom prst="roundRect">
+            <a:avLst>
+              <a:gd name="adj" fmla="val 22552"/>
+            </a:avLst>
+          </a:prstGeom>
+          <a:solidFill>
+            <a:srgbClr val="FFFFFF"/>
+          </a:solidFill>
+          <a:ln w="12700">
+            <a:solidFill>
+              <a:srgbClr val="EAEAE8"/>
+            </a:solidFill>
+          </a:ln>
+          <a:effectLst/>
+        </p:spPr>
+        <p:style>
+          <a:lnRef idx="1">
+            <a:schemeClr val="accent1"/>
+          </a:lnRef>
+          <a:fillRef idx="3">
+            <a:schemeClr val="accent1"/>
+          </a:fillRef>
+          <a:effectRef idx="2">
+            <a:schemeClr val="accent1"/>
+          </a:effectRef>
+          <a:fontRef idx="minor">
+            <a:schemeClr val="lt1"/>
+          </a:fontRef>
+        </p:style>
+        <p:txBody>
+          <a:bodyPr rtlCol="0" anchor="ctr"/>
+          <a:lstStyle/>
+          <a:p/>
+        </p:txBody>
+      </p:sp>
+      <p:sp>
+        <p:nvSpPr>
+          <p:cNvPr id="17" name="Rounded Rectangle 16"/>
+          <p:cNvSpPr/>
+          <p:nvPr/>
+        </p:nvSpPr>
+        <p:spPr>
+          <a:xfrm>
+            <a:off x="841247" y="3834638"/>
+            <a:ext cx="365760" cy="365760"/>
+          </a:xfrm>
+          <a:prstGeom prst="roundRect">
+            <a:avLst>
+              <a:gd name="adj" fmla="val 32500"/>
+            </a:avLst>
+          </a:prstGeom>
+          <a:solidFill>
+            <a:srgbClr val="EFEAFA"/>
+          </a:solidFill>
+          <a:ln>
+            <a:noFill/>
+          </a:ln>
+          <a:effectLst/>
+        </p:spPr>
+        <p:style>
+          <a:lnRef idx="1">
+            <a:schemeClr val="accent1"/>
+          </a:lnRef>
+          <a:fillRef idx="3">
+            <a:schemeClr val="accent1"/>
+          </a:fillRef>
+          <a:effectRef idx="2">
+            <a:schemeClr val="accent1"/>
+          </a:effectRef>
+          <a:fontRef idx="minor">
+            <a:schemeClr val="lt1"/>
+          </a:fontRef>
+        </p:style>
+        <p:txBody>
+          <a:bodyPr rtlCol="0" anchor="ctr"/>
+          <a:lstStyle/>
+          <a:p/>
+        </p:txBody>
+      </p:sp>
+      <p:sp>
+        <p:nvSpPr>
+          <p:cNvPr id="18" name="TextBox 17"/>
+          <p:cNvSpPr txBox="1"/>
+          <p:nvPr/>
+        </p:nvSpPr>
+        <p:spPr>
+          <a:xfrm>
+            <a:off x="841247" y="3898646"/>
+            <a:ext cx="365760" cy="256032"/>
+          </a:xfrm>
+          <a:prstGeom prst="rect">
+            <a:avLst/>
+          </a:prstGeom>
+          <a:noFill/>
+        </p:spPr>
+        <p:txBody>
+          <a:bodyPr wrap="square" lIns="0" rIns="0" tIns="0" bIns="0" anchor="t">
+            <a:spAutoFit/>
+          </a:bodyPr>
+          <a:lstStyle/>
+          <a:p>
+            <a:pPr algn="ctr">
+              <a:lnSpc>
+                <a:spcPct val="135000"/>
+              </a:lnSpc>
+            </a:pPr>
+            <a:r>
+              <a:rPr sz="1500" b="1" i="0">
+                <a:solidFill>
+                  <a:srgbClr val="6B4FBB"/>
+                </a:solidFill>
+                <a:latin typeface="Verdana"/>
+              </a:rPr>
+              <a:t>3</a:t>
+            </a:r>
+          </a:p>
+        </p:txBody>
+      </p:sp>
+      <p:sp>
+        <p:nvSpPr>
+          <p:cNvPr id="19" name="TextBox 18"/>
+          <p:cNvSpPr txBox="1"/>
+          <p:nvPr/>
+        </p:nvSpPr>
+        <p:spPr>
+          <a:xfrm>
+            <a:off x="1344168" y="3848608"/>
+            <a:ext cx="10097719" cy="374396"/>
+          </a:xfrm>
+          <a:prstGeom prst="rect">
+            <a:avLst/>
+          </a:prstGeom>
+          <a:noFill/>
+        </p:spPr>
+        <p:txBody>
+          <a:bodyPr wrap="square" lIns="0" rIns="0" tIns="0" bIns="0" anchor="t">
+            <a:spAutoFit/>
+          </a:bodyPr>
+          <a:lstStyle/>
+          <a:p>
+            <a:pPr algn="l">
+              <a:lnSpc>
+                <a:spcPct val="140000"/>
+              </a:lnSpc>
+            </a:pPr>
+            <a:r>
+              <a:rPr sz="1900" b="0" i="0">
+                <a:solidFill>
+                  <a:srgbClr val="3A3D40"/>
+                </a:solidFill>
+                <a:latin typeface="Verdana"/>
+              </a:rPr>
+              <a:t>Il faut préparer les crampons après le dîner.</a:t>
+            </a:r>
+          </a:p>
+        </p:txBody>
+      </p:sp>
+    </p:spTree>
+  </p:cSld>
+  <p:clrMapOvr>
+    <a:masterClrMapping/>
+  </p:clrMapOvr>
+</p:sld>
+</file>
+
+<file path=ppt/slides/slide22.xml><?xml version="1.0" encoding="utf-8"?>
+<p:sld xmlns:a="http://schemas.openxmlformats.org/drawingml/2006/main" xmlns:p="http://schemas.openxmlformats.org/presentationml/2006/main" xmlns:r="http://schemas.openxmlformats.org/officeDocument/2006/relationships">
+  <p:cSld>
+    <p:spTree>
+      <p:nvGrpSpPr>
+        <p:cNvPr id="1" name=""/>
+        <p:cNvGrpSpPr/>
+        <p:nvPr/>
+      </p:nvGrpSpPr>
+      <p:grpSpPr/>
+      <p:sp>
+        <p:nvSpPr>
+          <p:cNvPr id="2" name="Rectangle 1"/>
+          <p:cNvSpPr/>
+          <p:nvPr/>
+        </p:nvSpPr>
+        <p:spPr>
+          <a:xfrm>
+            <a:off x="0" y="0"/>
+            <a:ext cx="12191695" cy="6858000"/>
+          </a:xfrm>
+          <a:prstGeom prst="rect">
+            <a:avLst/>
+          </a:prstGeom>
+          <a:solidFill>
+            <a:srgbClr val="F7F7F5"/>
+          </a:solidFill>
+          <a:ln>
+            <a:noFill/>
+          </a:ln>
+          <a:effectLst/>
+        </p:spPr>
+        <p:style>
+          <a:lnRef idx="1">
+            <a:schemeClr val="accent1"/>
+          </a:lnRef>
+          <a:fillRef idx="3">
+            <a:schemeClr val="accent1"/>
+          </a:fillRef>
+          <a:effectRef idx="2">
+            <a:schemeClr val="accent1"/>
+          </a:effectRef>
+          <a:fontRef idx="minor">
+            <a:schemeClr val="lt1"/>
+          </a:fontRef>
+        </p:style>
+        <p:txBody>
+          <a:bodyPr rtlCol="0" anchor="ctr"/>
+          <a:lstStyle/>
+          <a:p/>
+        </p:txBody>
+      </p:sp>
+      <p:sp>
+        <p:nvSpPr>
+          <p:cNvPr id="3" name="TextBox 2"/>
+          <p:cNvSpPr txBox="1"/>
+          <p:nvPr/>
+        </p:nvSpPr>
+        <p:spPr>
+          <a:xfrm>
+            <a:off x="566928" y="6355080"/>
+            <a:ext cx="6400800" cy="219456"/>
+          </a:xfrm>
+          <a:prstGeom prst="rect">
+            <a:avLst/>
+          </a:prstGeom>
+          <a:noFill/>
+        </p:spPr>
+        <p:txBody>
+          <a:bodyPr wrap="square" lIns="0" rIns="0" tIns="0" bIns="0" anchor="t">
+            <a:spAutoFit/>
+          </a:bodyPr>
+          <a:lstStyle/>
+          <a:p>
+            <a:pPr algn="l">
+              <a:lnSpc>
+                <a:spcPct val="135000"/>
+              </a:lnSpc>
+            </a:pPr>
+            <a:r>
+              <a:rPr sz="1200" b="0" i="0">
+                <a:solidFill>
+                  <a:srgbClr val="6E7175"/>
+                </a:solidFill>
+                <a:latin typeface="Verdana"/>
+              </a:rPr>
+              <a:t>A2 · Quelles sont les prévisions ?</a:t>
+            </a:r>
+          </a:p>
+        </p:txBody>
+      </p:sp>
+      <p:sp>
+        <p:nvSpPr>
+          <p:cNvPr id="4" name="TextBox 3"/>
+          <p:cNvSpPr txBox="1"/>
+          <p:nvPr/>
+        </p:nvSpPr>
+        <p:spPr>
+          <a:xfrm>
+            <a:off x="10710367" y="6355080"/>
+            <a:ext cx="914400" cy="219456"/>
+          </a:xfrm>
+          <a:prstGeom prst="rect">
+            <a:avLst/>
+          </a:prstGeom>
+          <a:noFill/>
+        </p:spPr>
+        <p:txBody>
+          <a:bodyPr wrap="square" lIns="0" rIns="0" tIns="0" bIns="0" anchor="t">
+            <a:spAutoFit/>
+          </a:bodyPr>
+          <a:lstStyle/>
+          <a:p>
+            <a:pPr algn="r">
+              <a:lnSpc>
+                <a:spcPct val="135000"/>
+              </a:lnSpc>
+            </a:pPr>
+            <a:r>
+              <a:rPr sz="1200" b="0" i="0">
+                <a:solidFill>
+                  <a:srgbClr val="6E7175"/>
+                </a:solidFill>
+                <a:latin typeface="Verdana"/>
+              </a:rPr>
+              <a:t>22</a:t>
+            </a:r>
+          </a:p>
+        </p:txBody>
+      </p:sp>
+      <p:sp>
+        <p:nvSpPr>
+          <p:cNvPr id="5" name="TextBox 4"/>
+          <p:cNvSpPr txBox="1"/>
+          <p:nvPr/>
+        </p:nvSpPr>
+        <p:spPr>
+          <a:xfrm>
+            <a:off x="566928" y="420624"/>
+            <a:ext cx="11057839" cy="237744"/>
+          </a:xfrm>
+          <a:prstGeom prst="rect">
+            <a:avLst/>
+          </a:prstGeom>
+          <a:noFill/>
+        </p:spPr>
+        <p:txBody>
+          <a:bodyPr wrap="square" lIns="0" rIns="0" tIns="0" bIns="0" anchor="t">
+            <a:spAutoFit/>
+          </a:bodyPr>
+          <a:lstStyle/>
+          <a:p>
+            <a:pPr algn="l">
+              <a:lnSpc>
+                <a:spcPct val="135000"/>
+              </a:lnSpc>
+            </a:pPr>
+            <a:r>
+              <a:rPr sz="1300" b="1" i="0" spc="156">
+                <a:solidFill>
+                  <a:srgbClr val="6B4FBB"/>
+                </a:solidFill>
+                <a:latin typeface="Verdana"/>
+              </a:rPr>
+              <a:t>CORRECTION</a:t>
+            </a:r>
+          </a:p>
+        </p:txBody>
+      </p:sp>
+      <p:sp>
+        <p:nvSpPr>
+          <p:cNvPr id="6" name="TextBox 5"/>
+          <p:cNvSpPr txBox="1"/>
+          <p:nvPr/>
+        </p:nvSpPr>
+        <p:spPr>
+          <a:xfrm>
+            <a:off x="566928" y="749808"/>
+            <a:ext cx="11057839" cy="877824"/>
+          </a:xfrm>
+          <a:prstGeom prst="rect">
+            <a:avLst/>
+          </a:prstGeom>
+          <a:noFill/>
+        </p:spPr>
+        <p:txBody>
+          <a:bodyPr wrap="square" lIns="0" rIns="0" tIns="0" bIns="0" anchor="t">
+            <a:spAutoFit/>
+          </a:bodyPr>
+          <a:lstStyle/>
+          <a:p>
+            <a:pPr algn="l">
+              <a:lnSpc>
+                <a:spcPct val="115000"/>
+              </a:lnSpc>
+            </a:pPr>
+            <a:r>
+              <a:rPr sz="3400" b="1" i="0">
+                <a:solidFill>
+                  <a:srgbClr val="17181A"/>
+                </a:solidFill>
+                <a:latin typeface="Verdana"/>
+              </a:rPr>
+              <a:t>Trois phrases de bulletin à lire à voix haute</a:t>
+            </a:r>
+          </a:p>
+        </p:txBody>
+      </p:sp>
+      <p:sp>
+        <p:nvSpPr>
+          <p:cNvPr id="7" name="TextBox 6"/>
+          <p:cNvSpPr txBox="1"/>
+          <p:nvPr/>
+        </p:nvSpPr>
+        <p:spPr>
+          <a:xfrm>
+            <a:off x="566928" y="1645920"/>
+            <a:ext cx="11057839" cy="329184"/>
+          </a:xfrm>
+          <a:prstGeom prst="rect">
+            <a:avLst/>
+          </a:prstGeom>
+          <a:noFill/>
+        </p:spPr>
+        <p:txBody>
+          <a:bodyPr wrap="square" lIns="0" rIns="0" tIns="0" bIns="0" anchor="t">
+            <a:spAutoFit/>
+          </a:bodyPr>
+          <a:lstStyle/>
+          <a:p>
+            <a:pPr algn="l">
+              <a:lnSpc>
+                <a:spcPct val="135000"/>
+              </a:lnSpc>
+            </a:pPr>
+            <a:r>
+              <a:rPr sz="1800" b="0" i="0">
+                <a:solidFill>
+                  <a:srgbClr val="6E7175"/>
+                </a:solidFill>
+                <a:latin typeface="Verdana"/>
+              </a:rPr>
+              <a:t>Correction — on lit la réponse, on ne commente pas l'erreur.</a:t>
+            </a:r>
+          </a:p>
+        </p:txBody>
+      </p:sp>
+      <p:sp>
+        <p:nvSpPr>
+          <p:cNvPr id="8" name="Rounded Rectangle 7"/>
+          <p:cNvSpPr/>
+          <p:nvPr/>
+        </p:nvSpPr>
+        <p:spPr>
+          <a:xfrm>
+            <a:off x="566928" y="2139696"/>
+            <a:ext cx="11057839" cy="648716"/>
+          </a:xfrm>
+          <a:prstGeom prst="roundRect">
+            <a:avLst>
+              <a:gd name="adj" fmla="val 22552"/>
+            </a:avLst>
+          </a:prstGeom>
+          <a:solidFill>
+            <a:srgbClr val="E6F5EE"/>
+          </a:solidFill>
+          <a:ln w="12700">
+            <a:solidFill>
+              <a:srgbClr val="EAEAE8"/>
+            </a:solidFill>
+          </a:ln>
+          <a:effectLst/>
+        </p:spPr>
+        <p:style>
+          <a:lnRef idx="1">
+            <a:schemeClr val="accent1"/>
+          </a:lnRef>
+          <a:fillRef idx="3">
+            <a:schemeClr val="accent1"/>
+          </a:fillRef>
+          <a:effectRef idx="2">
+            <a:schemeClr val="accent1"/>
+          </a:effectRef>
+          <a:fontRef idx="minor">
+            <a:schemeClr val="lt1"/>
+          </a:fontRef>
+        </p:style>
+        <p:txBody>
+          <a:bodyPr rtlCol="0" anchor="ctr"/>
+          <a:lstStyle/>
+          <a:p/>
+        </p:txBody>
+      </p:sp>
+      <p:sp>
+        <p:nvSpPr>
+          <p:cNvPr id="9" name="Rounded Rectangle 8"/>
+          <p:cNvSpPr/>
+          <p:nvPr/>
+        </p:nvSpPr>
+        <p:spPr>
+          <a:xfrm>
+            <a:off x="841247" y="2281174"/>
+            <a:ext cx="365760" cy="365760"/>
+          </a:xfrm>
+          <a:prstGeom prst="roundRect">
+            <a:avLst>
+              <a:gd name="adj" fmla="val 32500"/>
+            </a:avLst>
+          </a:prstGeom>
+          <a:solidFill>
+            <a:srgbClr val="EFEAFA"/>
+          </a:solidFill>
+          <a:ln>
+            <a:noFill/>
+          </a:ln>
+          <a:effectLst/>
+        </p:spPr>
+        <p:style>
+          <a:lnRef idx="1">
+            <a:schemeClr val="accent1"/>
+          </a:lnRef>
+          <a:fillRef idx="3">
+            <a:schemeClr val="accent1"/>
+          </a:fillRef>
+          <a:effectRef idx="2">
+            <a:schemeClr val="accent1"/>
+          </a:effectRef>
+          <a:fontRef idx="minor">
+            <a:schemeClr val="lt1"/>
+          </a:fontRef>
+        </p:style>
+        <p:txBody>
+          <a:bodyPr rtlCol="0" anchor="ctr"/>
+          <a:lstStyle/>
+          <a:p/>
+        </p:txBody>
+      </p:sp>
+      <p:sp>
+        <p:nvSpPr>
+          <p:cNvPr id="10" name="TextBox 9"/>
+          <p:cNvSpPr txBox="1"/>
+          <p:nvPr/>
+        </p:nvSpPr>
+        <p:spPr>
+          <a:xfrm>
+            <a:off x="841247" y="2345182"/>
+            <a:ext cx="365760" cy="256032"/>
+          </a:xfrm>
+          <a:prstGeom prst="rect">
+            <a:avLst/>
+          </a:prstGeom>
+          <a:noFill/>
+        </p:spPr>
+        <p:txBody>
+          <a:bodyPr wrap="square" lIns="0" rIns="0" tIns="0" bIns="0" anchor="t">
+            <a:spAutoFit/>
+          </a:bodyPr>
+          <a:lstStyle/>
+          <a:p>
+            <a:pPr algn="ctr">
+              <a:lnSpc>
+                <a:spcPct val="135000"/>
+              </a:lnSpc>
+            </a:pPr>
+            <a:r>
+              <a:rPr sz="1500" b="1" i="0">
+                <a:solidFill>
+                  <a:srgbClr val="6B4FBB"/>
+                </a:solidFill>
+                <a:latin typeface="Verdana"/>
+              </a:rPr>
+              <a:t>1</a:t>
+            </a:r>
+          </a:p>
+        </p:txBody>
+      </p:sp>
+      <p:sp>
+        <p:nvSpPr>
+          <p:cNvPr id="11" name="TextBox 10"/>
+          <p:cNvSpPr txBox="1"/>
+          <p:nvPr/>
+        </p:nvSpPr>
+        <p:spPr>
+          <a:xfrm>
+            <a:off x="1344168" y="2295144"/>
+            <a:ext cx="10097719" cy="374396"/>
+          </a:xfrm>
+          <a:prstGeom prst="rect">
+            <a:avLst/>
+          </a:prstGeom>
+          <a:noFill/>
+        </p:spPr>
+        <p:txBody>
+          <a:bodyPr wrap="square" lIns="0" rIns="0" tIns="0" bIns="0" anchor="t">
+            <a:spAutoFit/>
+          </a:bodyPr>
+          <a:lstStyle/>
+          <a:p>
+            <a:pPr algn="l">
+              <a:lnSpc>
+                <a:spcPct val="140000"/>
+              </a:lnSpc>
+            </a:pPr>
+            <a:r>
+              <a:rPr sz="1900" b="0" i="0">
+                <a:solidFill>
+                  <a:srgbClr val="3A3D40"/>
+                </a:solidFill>
+                <a:latin typeface="Verdana"/>
+              </a:rPr>
+              <a:t>La météo annonce dix degrés sous zéro.   </a:t>
+            </a:r>
+            <a:r>
+              <a:rPr sz="1900" b="1" i="0">
+                <a:solidFill>
+                  <a:srgbClr val="07734A"/>
+                </a:solidFill>
+                <a:latin typeface="Verdana"/>
+              </a:rPr>
+              <a:t>» é · é · é</a:t>
+            </a:r>
+          </a:p>
+        </p:txBody>
+      </p:sp>
+      <p:sp>
+        <p:nvSpPr>
+          <p:cNvPr id="12" name="Rounded Rectangle 11"/>
+          <p:cNvSpPr/>
+          <p:nvPr/>
+        </p:nvSpPr>
+        <p:spPr>
+          <a:xfrm>
+            <a:off x="566928" y="2916428"/>
+            <a:ext cx="11057839" cy="648716"/>
+          </a:xfrm>
+          <a:prstGeom prst="roundRect">
+            <a:avLst>
+              <a:gd name="adj" fmla="val 22552"/>
+            </a:avLst>
+          </a:prstGeom>
+          <a:solidFill>
+            <a:srgbClr val="E6F5EE"/>
+          </a:solidFill>
+          <a:ln w="12700">
+            <a:solidFill>
+              <a:srgbClr val="EAEAE8"/>
+            </a:solidFill>
+          </a:ln>
+          <a:effectLst/>
+        </p:spPr>
+        <p:style>
+          <a:lnRef idx="1">
+            <a:schemeClr val="accent1"/>
+          </a:lnRef>
+          <a:fillRef idx="3">
+            <a:schemeClr val="accent1"/>
+          </a:fillRef>
+          <a:effectRef idx="2">
+            <a:schemeClr val="accent1"/>
+          </a:effectRef>
+          <a:fontRef idx="minor">
+            <a:schemeClr val="lt1"/>
+          </a:fontRef>
+        </p:style>
+        <p:txBody>
+          <a:bodyPr rtlCol="0" anchor="ctr"/>
+          <a:lstStyle/>
+          <a:p/>
+        </p:txBody>
+      </p:sp>
+      <p:sp>
+        <p:nvSpPr>
+          <p:cNvPr id="13" name="Rounded Rectangle 12"/>
+          <p:cNvSpPr/>
+          <p:nvPr/>
+        </p:nvSpPr>
+        <p:spPr>
+          <a:xfrm>
+            <a:off x="841247" y="3057905"/>
+            <a:ext cx="365760" cy="365760"/>
+          </a:xfrm>
+          <a:prstGeom prst="roundRect">
+            <a:avLst>
+              <a:gd name="adj" fmla="val 32500"/>
+            </a:avLst>
+          </a:prstGeom>
+          <a:solidFill>
+            <a:srgbClr val="EFEAFA"/>
+          </a:solidFill>
+          <a:ln>
+            <a:noFill/>
+          </a:ln>
+          <a:effectLst/>
+        </p:spPr>
+        <p:style>
+          <a:lnRef idx="1">
+            <a:schemeClr val="accent1"/>
+          </a:lnRef>
+          <a:fillRef idx="3">
+            <a:schemeClr val="accent1"/>
+          </a:fillRef>
+          <a:effectRef idx="2">
+            <a:schemeClr val="accent1"/>
+          </a:effectRef>
+          <a:fontRef idx="minor">
+            <a:schemeClr val="lt1"/>
+          </a:fontRef>
+        </p:style>
+        <p:txBody>
+          <a:bodyPr rtlCol="0" anchor="ctr"/>
+          <a:lstStyle/>
+          <a:p/>
+        </p:txBody>
+      </p:sp>
+      <p:sp>
+        <p:nvSpPr>
+          <p:cNvPr id="14" name="TextBox 13"/>
+          <p:cNvSpPr txBox="1"/>
+          <p:nvPr/>
+        </p:nvSpPr>
+        <p:spPr>
+          <a:xfrm>
+            <a:off x="841247" y="3121913"/>
+            <a:ext cx="365760" cy="256032"/>
+          </a:xfrm>
+          <a:prstGeom prst="rect">
+            <a:avLst/>
+          </a:prstGeom>
+          <a:noFill/>
+        </p:spPr>
+        <p:txBody>
+          <a:bodyPr wrap="square" lIns="0" rIns="0" tIns="0" bIns="0" anchor="t">
+            <a:spAutoFit/>
+          </a:bodyPr>
+          <a:lstStyle/>
+          <a:p>
+            <a:pPr algn="ctr">
+              <a:lnSpc>
+                <a:spcPct val="135000"/>
+              </a:lnSpc>
+            </a:pPr>
+            <a:r>
+              <a:rPr sz="1500" b="1" i="0">
+                <a:solidFill>
+                  <a:srgbClr val="6B4FBB"/>
+                </a:solidFill>
+                <a:latin typeface="Verdana"/>
+              </a:rPr>
+              <a:t>2</a:t>
+            </a:r>
+          </a:p>
+        </p:txBody>
+      </p:sp>
+      <p:sp>
+        <p:nvSpPr>
+          <p:cNvPr id="15" name="TextBox 14"/>
+          <p:cNvSpPr txBox="1"/>
+          <p:nvPr/>
+        </p:nvSpPr>
+        <p:spPr>
+          <a:xfrm>
+            <a:off x="1344168" y="3071876"/>
+            <a:ext cx="10097719" cy="374396"/>
+          </a:xfrm>
+          <a:prstGeom prst="rect">
+            <a:avLst/>
+          </a:prstGeom>
+          <a:noFill/>
+        </p:spPr>
+        <p:txBody>
+          <a:bodyPr wrap="square" lIns="0" rIns="0" tIns="0" bIns="0" anchor="t">
+            <a:spAutoFit/>
+          </a:bodyPr>
+          <a:lstStyle/>
+          <a:p>
+            <a:pPr algn="l">
+              <a:lnSpc>
+                <a:spcPct val="140000"/>
+              </a:lnSpc>
+            </a:pPr>
+            <a:r>
+              <a:rPr sz="1900" b="0" i="0">
+                <a:solidFill>
+                  <a:srgbClr val="3A3D40"/>
+                </a:solidFill>
+                <a:latin typeface="Verdana"/>
+              </a:rPr>
+              <a:t>La neige tombe et la visibilité est de cent mètres.   </a:t>
+            </a:r>
+            <a:r>
+              <a:rPr sz="1900" b="1" i="0">
+                <a:solidFill>
+                  <a:srgbClr val="07734A"/>
+                </a:solidFill>
+                <a:latin typeface="Verdana"/>
+              </a:rPr>
+              <a:t>» è · è</a:t>
+            </a:r>
+          </a:p>
+        </p:txBody>
+      </p:sp>
+      <p:sp>
+        <p:nvSpPr>
+          <p:cNvPr id="16" name="Rounded Rectangle 15"/>
+          <p:cNvSpPr/>
+          <p:nvPr/>
+        </p:nvSpPr>
+        <p:spPr>
+          <a:xfrm>
+            <a:off x="566928" y="3693160"/>
+            <a:ext cx="11057839" cy="648716"/>
+          </a:xfrm>
+          <a:prstGeom prst="roundRect">
+            <a:avLst>
+              <a:gd name="adj" fmla="val 22552"/>
+            </a:avLst>
+          </a:prstGeom>
+          <a:solidFill>
+            <a:srgbClr val="E6F5EE"/>
+          </a:solidFill>
+          <a:ln w="12700">
+            <a:solidFill>
+              <a:srgbClr val="EAEAE8"/>
+            </a:solidFill>
+          </a:ln>
+          <a:effectLst/>
+        </p:spPr>
+        <p:style>
+          <a:lnRef idx="1">
+            <a:schemeClr val="accent1"/>
+          </a:lnRef>
+          <a:fillRef idx="3">
+            <a:schemeClr val="accent1"/>
+          </a:fillRef>
+          <a:effectRef idx="2">
+            <a:schemeClr val="accent1"/>
+          </a:effectRef>
+          <a:fontRef idx="minor">
+            <a:schemeClr val="lt1"/>
+          </a:fontRef>
+        </p:style>
+        <p:txBody>
+          <a:bodyPr rtlCol="0" anchor="ctr"/>
+          <a:lstStyle/>
+          <a:p/>
+        </p:txBody>
+      </p:sp>
+      <p:sp>
+        <p:nvSpPr>
+          <p:cNvPr id="17" name="Rounded Rectangle 16"/>
+          <p:cNvSpPr/>
+          <p:nvPr/>
+        </p:nvSpPr>
+        <p:spPr>
+          <a:xfrm>
+            <a:off x="841247" y="3834638"/>
+            <a:ext cx="365760" cy="365760"/>
+          </a:xfrm>
+          <a:prstGeom prst="roundRect">
+            <a:avLst>
+              <a:gd name="adj" fmla="val 32500"/>
+            </a:avLst>
+          </a:prstGeom>
+          <a:solidFill>
+            <a:srgbClr val="EFEAFA"/>
+          </a:solidFill>
+          <a:ln>
+            <a:noFill/>
+          </a:ln>
+          <a:effectLst/>
+        </p:spPr>
+        <p:style>
+          <a:lnRef idx="1">
+            <a:schemeClr val="accent1"/>
+          </a:lnRef>
+          <a:fillRef idx="3">
+            <a:schemeClr val="accent1"/>
+          </a:fillRef>
+          <a:effectRef idx="2">
+            <a:schemeClr val="accent1"/>
+          </a:effectRef>
+          <a:fontRef idx="minor">
+            <a:schemeClr val="lt1"/>
+          </a:fontRef>
+        </p:style>
+        <p:txBody>
+          <a:bodyPr rtlCol="0" anchor="ctr"/>
+          <a:lstStyle/>
+          <a:p/>
+        </p:txBody>
+      </p:sp>
+      <p:sp>
+        <p:nvSpPr>
+          <p:cNvPr id="18" name="TextBox 17"/>
+          <p:cNvSpPr txBox="1"/>
+          <p:nvPr/>
+        </p:nvSpPr>
+        <p:spPr>
+          <a:xfrm>
+            <a:off x="841247" y="3898646"/>
+            <a:ext cx="365760" cy="256032"/>
+          </a:xfrm>
+          <a:prstGeom prst="rect">
+            <a:avLst/>
+          </a:prstGeom>
+          <a:noFill/>
+        </p:spPr>
+        <p:txBody>
+          <a:bodyPr wrap="square" lIns="0" rIns="0" tIns="0" bIns="0" anchor="t">
+            <a:spAutoFit/>
+          </a:bodyPr>
+          <a:lstStyle/>
+          <a:p>
+            <a:pPr algn="ctr">
+              <a:lnSpc>
+                <a:spcPct val="135000"/>
+              </a:lnSpc>
+            </a:pPr>
+            <a:r>
+              <a:rPr sz="1500" b="1" i="0">
+                <a:solidFill>
+                  <a:srgbClr val="6B4FBB"/>
+                </a:solidFill>
+                <a:latin typeface="Verdana"/>
+              </a:rPr>
+              <a:t>3</a:t>
+            </a:r>
+          </a:p>
+        </p:txBody>
+      </p:sp>
+      <p:sp>
+        <p:nvSpPr>
+          <p:cNvPr id="19" name="TextBox 18"/>
+          <p:cNvSpPr txBox="1"/>
+          <p:nvPr/>
+        </p:nvSpPr>
+        <p:spPr>
+          <a:xfrm>
+            <a:off x="1344168" y="3848608"/>
+            <a:ext cx="10097719" cy="374396"/>
+          </a:xfrm>
+          <a:prstGeom prst="rect">
+            <a:avLst/>
+          </a:prstGeom>
+          <a:noFill/>
+        </p:spPr>
+        <p:txBody>
+          <a:bodyPr wrap="square" lIns="0" rIns="0" tIns="0" bIns="0" anchor="t">
+            <a:spAutoFit/>
+          </a:bodyPr>
+          <a:lstStyle/>
+          <a:p>
+            <a:pPr algn="l">
+              <a:lnSpc>
+                <a:spcPct val="140000"/>
+              </a:lnSpc>
+            </a:pPr>
+            <a:r>
+              <a:rPr sz="1900" b="0" i="0">
+                <a:solidFill>
+                  <a:srgbClr val="3A3D40"/>
+                </a:solidFill>
+                <a:latin typeface="Verdana"/>
+              </a:rPr>
+              <a:t>Il faut préparer les crampons après le dîner.   </a:t>
+            </a:r>
+            <a:r>
+              <a:rPr sz="1900" b="1" i="0">
+                <a:solidFill>
+                  <a:srgbClr val="07734A"/>
+                </a:solidFill>
+                <a:latin typeface="Verdana"/>
+              </a:rPr>
+              <a:t>» é · è</a:t>
+            </a:r>
+          </a:p>
+        </p:txBody>
+      </p:sp>
+    </p:spTree>
+  </p:cSld>
+  <p:clrMapOvr>
+    <a:masterClrMapping/>
+  </p:clrMapOvr>
+</p:sld>
+</file>
+
+<file path=ppt/slides/slide23.xml><?xml version="1.0" encoding="utf-8"?>
+<p:sld xmlns:a="http://schemas.openxmlformats.org/drawingml/2006/main" xmlns:p="http://schemas.openxmlformats.org/presentationml/2006/main" xmlns:r="http://schemas.openxmlformats.org/officeDocument/2006/relationships">
+  <p:cSld>
+    <p:spTree>
+      <p:nvGrpSpPr>
+        <p:cNvPr id="1" name=""/>
+        <p:cNvGrpSpPr/>
+        <p:nvPr/>
+      </p:nvGrpSpPr>
+      <p:grpSpPr/>
+      <p:sp>
+        <p:nvSpPr>
+          <p:cNvPr id="2" name="Rectangle 1"/>
+          <p:cNvSpPr/>
+          <p:nvPr/>
+        </p:nvSpPr>
+        <p:spPr>
+          <a:xfrm>
+            <a:off x="0" y="0"/>
+            <a:ext cx="12191695" cy="6858000"/>
+          </a:xfrm>
+          <a:prstGeom prst="rect">
+            <a:avLst/>
+          </a:prstGeom>
+          <a:solidFill>
+            <a:srgbClr val="F7F7F5"/>
+          </a:solidFill>
+          <a:ln>
+            <a:noFill/>
+          </a:ln>
+          <a:effectLst/>
+        </p:spPr>
+        <p:style>
+          <a:lnRef idx="1">
+            <a:schemeClr val="accent1"/>
+          </a:lnRef>
+          <a:fillRef idx="3">
+            <a:schemeClr val="accent1"/>
+          </a:fillRef>
+          <a:effectRef idx="2">
+            <a:schemeClr val="accent1"/>
+          </a:effectRef>
+          <a:fontRef idx="minor">
+            <a:schemeClr val="lt1"/>
+          </a:fontRef>
+        </p:style>
+        <p:txBody>
+          <a:bodyPr rtlCol="0" anchor="ctr"/>
+          <a:lstStyle/>
+          <a:p/>
+        </p:txBody>
+      </p:sp>
+      <p:sp>
+        <p:nvSpPr>
+          <p:cNvPr id="3" name="TextBox 2"/>
+          <p:cNvSpPr txBox="1"/>
+          <p:nvPr/>
+        </p:nvSpPr>
+        <p:spPr>
+          <a:xfrm>
+            <a:off x="566928" y="6355080"/>
+            <a:ext cx="6400800" cy="219456"/>
+          </a:xfrm>
+          <a:prstGeom prst="rect">
+            <a:avLst/>
+          </a:prstGeom>
+          <a:noFill/>
+        </p:spPr>
+        <p:txBody>
+          <a:bodyPr wrap="square" lIns="0" rIns="0" tIns="0" bIns="0" anchor="t">
+            <a:spAutoFit/>
+          </a:bodyPr>
+          <a:lstStyle/>
+          <a:p>
+            <a:pPr algn="l">
+              <a:lnSpc>
+                <a:spcPct val="135000"/>
+              </a:lnSpc>
+            </a:pPr>
+            <a:r>
+              <a:rPr sz="1200" b="0" i="0">
+                <a:solidFill>
+                  <a:srgbClr val="6E7175"/>
+                </a:solidFill>
+                <a:latin typeface="Verdana"/>
+              </a:rPr>
+              <a:t>A2 · Quelles sont les prévisions ?</a:t>
+            </a:r>
+          </a:p>
+        </p:txBody>
+      </p:sp>
+      <p:sp>
+        <p:nvSpPr>
+          <p:cNvPr id="4" name="TextBox 3"/>
+          <p:cNvSpPr txBox="1"/>
+          <p:nvPr/>
+        </p:nvSpPr>
+        <p:spPr>
+          <a:xfrm>
+            <a:off x="10710367" y="6355080"/>
+            <a:ext cx="914400" cy="219456"/>
+          </a:xfrm>
+          <a:prstGeom prst="rect">
+            <a:avLst/>
+          </a:prstGeom>
+          <a:noFill/>
+        </p:spPr>
+        <p:txBody>
+          <a:bodyPr wrap="square" lIns="0" rIns="0" tIns="0" bIns="0" anchor="t">
+            <a:spAutoFit/>
+          </a:bodyPr>
+          <a:lstStyle/>
+          <a:p>
+            <a:pPr algn="r">
+              <a:lnSpc>
+                <a:spcPct val="135000"/>
+              </a:lnSpc>
+            </a:pPr>
+            <a:r>
+              <a:rPr sz="1200" b="0" i="0">
+                <a:solidFill>
+                  <a:srgbClr val="6E7175"/>
+                </a:solidFill>
+                <a:latin typeface="Verdana"/>
+              </a:rPr>
+              <a:t>23</a:t>
+            </a:r>
+          </a:p>
+        </p:txBody>
+      </p:sp>
+      <p:sp>
+        <p:nvSpPr>
+          <p:cNvPr id="5" name="Rectangle 4"/>
+          <p:cNvSpPr/>
+          <p:nvPr/>
+        </p:nvSpPr>
+        <p:spPr>
+          <a:xfrm>
+            <a:off x="0" y="0"/>
+            <a:ext cx="12191695" cy="6858000"/>
+          </a:xfrm>
+          <a:prstGeom prst="rect">
+            <a:avLst/>
+          </a:prstGeom>
+          <a:solidFill>
+            <a:srgbClr val="17181A"/>
+          </a:solidFill>
+          <a:ln>
+            <a:noFill/>
+          </a:ln>
+          <a:effectLst/>
+        </p:spPr>
+        <p:style>
+          <a:lnRef idx="1">
+            <a:schemeClr val="accent1"/>
+          </a:lnRef>
+          <a:fillRef idx="3">
+            <a:schemeClr val="accent1"/>
+          </a:fillRef>
+          <a:effectRef idx="2">
+            <a:schemeClr val="accent1"/>
+          </a:effectRef>
+          <a:fontRef idx="minor">
+            <a:schemeClr val="lt1"/>
+          </a:fontRef>
+        </p:style>
+        <p:txBody>
+          <a:bodyPr rtlCol="0" anchor="ctr"/>
+          <a:lstStyle/>
+          <a:p/>
+        </p:txBody>
+      </p:sp>
+      <p:sp>
+        <p:nvSpPr>
+          <p:cNvPr id="6" name="TextBox 5"/>
+          <p:cNvSpPr txBox="1"/>
+          <p:nvPr/>
+        </p:nvSpPr>
+        <p:spPr>
+          <a:xfrm>
+            <a:off x="566928" y="1051560"/>
+            <a:ext cx="11057839" cy="274320"/>
+          </a:xfrm>
+          <a:prstGeom prst="rect">
+            <a:avLst/>
+          </a:prstGeom>
+          <a:noFill/>
+        </p:spPr>
+        <p:txBody>
+          <a:bodyPr wrap="square" lIns="0" rIns="0" tIns="0" bIns="0" anchor="t">
+            <a:spAutoFit/>
+          </a:bodyPr>
+          <a:lstStyle/>
+          <a:p>
+            <a:pPr algn="l">
+              <a:lnSpc>
+                <a:spcPct val="135000"/>
+              </a:lnSpc>
+            </a:pPr>
+            <a:r>
+              <a:rPr sz="1300" b="1" i="0" spc="156">
+                <a:solidFill>
+                  <a:srgbClr val="FFFFFF"/>
+                </a:solidFill>
+                <a:latin typeface="Verdana"/>
+              </a:rPr>
+              <a:t>BILLET DE SORTIE</a:t>
+            </a:r>
+          </a:p>
+        </p:txBody>
+      </p:sp>
+      <p:sp>
+        <p:nvSpPr>
+          <p:cNvPr id="7" name="TextBox 6"/>
+          <p:cNvSpPr txBox="1"/>
+          <p:nvPr/>
+        </p:nvSpPr>
+        <p:spPr>
+          <a:xfrm>
+            <a:off x="566928" y="1572768"/>
+            <a:ext cx="9777679" cy="2103120"/>
+          </a:xfrm>
+          <a:prstGeom prst="rect">
+            <a:avLst/>
+          </a:prstGeom>
+          <a:noFill/>
+        </p:spPr>
+        <p:txBody>
+          <a:bodyPr wrap="square" lIns="0" rIns="0" tIns="0" bIns="0" anchor="t">
+            <a:spAutoFit/>
+          </a:bodyPr>
+          <a:lstStyle/>
+          <a:p>
+            <a:pPr algn="l">
+              <a:lnSpc>
+                <a:spcPct val="125000"/>
+              </a:lnSpc>
+            </a:pPr>
+            <a:r>
+              <a:rPr sz="3400" b="1" i="0">
+                <a:solidFill>
+                  <a:srgbClr val="FFFFFF"/>
+                </a:solidFill>
+                <a:latin typeface="Verdana"/>
+              </a:rPr>
+              <a:t>Écrivez quatre mots dont la consonne finale tombe souvent à l'oral.</a:t>
+            </a:r>
+          </a:p>
+        </p:txBody>
+      </p:sp>
+      <p:sp>
+        <p:nvSpPr>
+          <p:cNvPr id="8" name="Rounded Rectangle 7"/>
+          <p:cNvSpPr/>
+          <p:nvPr/>
+        </p:nvSpPr>
+        <p:spPr>
+          <a:xfrm>
+            <a:off x="566928" y="3931920"/>
+            <a:ext cx="11057839" cy="666496"/>
+          </a:xfrm>
+          <a:prstGeom prst="roundRect">
+            <a:avLst>
+              <a:gd name="adj" fmla="val 13719"/>
+            </a:avLst>
+          </a:prstGeom>
+          <a:solidFill>
+            <a:srgbClr val="2A2C2F"/>
+          </a:solidFill>
+          <a:ln>
+            <a:noFill/>
+          </a:ln>
+          <a:effectLst/>
+        </p:spPr>
+        <p:style>
+          <a:lnRef idx="1">
+            <a:schemeClr val="accent1"/>
+          </a:lnRef>
+          <a:fillRef idx="3">
+            <a:schemeClr val="accent1"/>
+          </a:fillRef>
+          <a:effectRef idx="2">
+            <a:schemeClr val="accent1"/>
+          </a:effectRef>
+          <a:fontRef idx="minor">
+            <a:schemeClr val="lt1"/>
+          </a:fontRef>
+        </p:style>
+        <p:txBody>
+          <a:bodyPr rtlCol="0" anchor="ctr"/>
+          <a:lstStyle/>
+          <a:p/>
+        </p:txBody>
+      </p:sp>
+      <p:sp>
+        <p:nvSpPr>
+          <p:cNvPr id="9" name="TextBox 8"/>
+          <p:cNvSpPr txBox="1"/>
+          <p:nvPr/>
+        </p:nvSpPr>
+        <p:spPr>
+          <a:xfrm>
+            <a:off x="932688" y="4087368"/>
+            <a:ext cx="10051999" cy="392176"/>
+          </a:xfrm>
+          <a:prstGeom prst="rect">
+            <a:avLst/>
+          </a:prstGeom>
+          <a:noFill/>
+        </p:spPr>
+        <p:txBody>
+          <a:bodyPr wrap="square" lIns="0" rIns="0" tIns="0" bIns="0" anchor="t">
+            <a:spAutoFit/>
+          </a:bodyPr>
+          <a:lstStyle/>
+          <a:p>
+            <a:pPr algn="l">
+              <a:lnSpc>
+                <a:spcPct val="140000"/>
+              </a:lnSpc>
+            </a:pPr>
+            <a:r>
+              <a:rPr sz="2000" b="0" i="0">
+                <a:solidFill>
+                  <a:srgbClr val="FFFFFF"/>
+                </a:solidFill>
+                <a:latin typeface="Verdana"/>
+              </a:rPr>
+              <a:t>Écrivez la forme entière, puis la forme entendue à côté.</a:t>
+            </a:r>
+          </a:p>
+        </p:txBody>
+      </p:sp>
+      <p:sp>
+        <p:nvSpPr>
+          <p:cNvPr id="10" name="Rounded Rectangle 9"/>
+          <p:cNvSpPr/>
+          <p:nvPr/>
+        </p:nvSpPr>
+        <p:spPr>
+          <a:xfrm>
+            <a:off x="566928" y="4680712"/>
+            <a:ext cx="11057839" cy="666496"/>
+          </a:xfrm>
+          <a:prstGeom prst="roundRect">
+            <a:avLst>
+              <a:gd name="adj" fmla="val 13719"/>
+            </a:avLst>
+          </a:prstGeom>
+          <a:solidFill>
+            <a:srgbClr val="2A2C2F"/>
+          </a:solidFill>
+          <a:ln>
+            <a:noFill/>
+          </a:ln>
+          <a:effectLst/>
+        </p:spPr>
+        <p:style>
+          <a:lnRef idx="1">
+            <a:schemeClr val="accent1"/>
+          </a:lnRef>
+          <a:fillRef idx="3">
+            <a:schemeClr val="accent1"/>
+          </a:fillRef>
+          <a:effectRef idx="2">
+            <a:schemeClr val="accent1"/>
+          </a:effectRef>
+          <a:fontRef idx="minor">
+            <a:schemeClr val="lt1"/>
+          </a:fontRef>
+        </p:style>
+        <p:txBody>
+          <a:bodyPr rtlCol="0" anchor="ctr"/>
+          <a:lstStyle/>
+          <a:p/>
+        </p:txBody>
+      </p:sp>
+      <p:sp>
+        <p:nvSpPr>
+          <p:cNvPr id="11" name="TextBox 10"/>
+          <p:cNvSpPr txBox="1"/>
+          <p:nvPr/>
+        </p:nvSpPr>
+        <p:spPr>
+          <a:xfrm>
+            <a:off x="932688" y="4836160"/>
+            <a:ext cx="10051999" cy="392176"/>
+          </a:xfrm>
+          <a:prstGeom prst="rect">
+            <a:avLst/>
+          </a:prstGeom>
+          <a:noFill/>
+        </p:spPr>
+        <p:txBody>
+          <a:bodyPr wrap="square" lIns="0" rIns="0" tIns="0" bIns="0" anchor="t">
+            <a:spAutoFit/>
+          </a:bodyPr>
+          <a:lstStyle/>
+          <a:p>
+            <a:pPr algn="l">
+              <a:lnSpc>
+                <a:spcPct val="140000"/>
+              </a:lnSpc>
+            </a:pPr>
+            <a:r>
+              <a:rPr sz="2000" b="0" i="0">
+                <a:solidFill>
+                  <a:srgbClr val="FFFFFF"/>
+                </a:solidFill>
+                <a:latin typeface="Verdana"/>
+              </a:rPr>
+              <a:t>Exemple : « quatre » — on entend « quat' ».</a:t>
+            </a:r>
+          </a:p>
+        </p:txBody>
+      </p:sp>
+      <p:sp>
+        <p:nvSpPr>
+          <p:cNvPr id="12" name="TextBox 11"/>
+          <p:cNvSpPr txBox="1"/>
+          <p:nvPr/>
+        </p:nvSpPr>
+        <p:spPr>
+          <a:xfrm>
+            <a:off x="566928" y="6355080"/>
+            <a:ext cx="6400800" cy="219456"/>
+          </a:xfrm>
+          <a:prstGeom prst="rect">
+            <a:avLst/>
+          </a:prstGeom>
+          <a:noFill/>
+        </p:spPr>
+        <p:txBody>
+          <a:bodyPr wrap="square" lIns="0" rIns="0" tIns="0" bIns="0" anchor="t">
+            <a:spAutoFit/>
+          </a:bodyPr>
+          <a:lstStyle/>
+          <a:p>
+            <a:pPr algn="l">
+              <a:lnSpc>
+                <a:spcPct val="135000"/>
+              </a:lnSpc>
+            </a:pPr>
+            <a:r>
+              <a:rPr sz="1200" b="0" i="0">
+                <a:solidFill>
+                  <a:srgbClr val="6E7175"/>
+                </a:solidFill>
+                <a:latin typeface="Verdana"/>
+              </a:rPr>
+              <a:t>A2 · Quelles sont les prévisions ?</a:t>
             </a:r>
           </a:p>
         </p:txBody>
@@ -13260,7 +20376,7 @@
                 </a:solidFill>
                 <a:latin typeface="Verdana"/>
               </a:rPr>
-              <a:t>PRATIQUE · 1 DE 4</a:t>
+              <a:t>PRATIQUE · 1 DE 6</a:t>
             </a:r>
           </a:p>
         </p:txBody>
@@ -15840,7 +22956,7 @@
                 </a:solidFill>
                 <a:latin typeface="Verdana"/>
               </a:rPr>
-              <a:t>PRATIQUE · 2 DE 4</a:t>
+              <a:t>PRATIQUE · 2 DE 6</a:t>
             </a:r>
           </a:p>
         </p:txBody>

--- a/assets/powerpoints/module-meteo/A2-les-consonnes-qui-tombent.pptx
+++ b/assets/powerpoints/module-meteo/A2-les-consonnes-qui-tombent.pptx
@@ -5142,7 +5142,7 @@
             <a:r>
               <a:rPr sz="1300" b="1" i="0" spc="156">
                 <a:solidFill>
-                  <a:srgbClr val="6B4FBB"/>
+                  <a:srgbClr val="3B49A0"/>
                 </a:solidFill>
                 <a:latin typeface="Verdana"/>
               </a:rPr>
@@ -5482,7 +5482,7 @@
             <a:r>
               <a:rPr sz="1300" b="1" i="0" spc="156">
                 <a:solidFill>
-                  <a:srgbClr val="6B4FBB"/>
+                  <a:srgbClr val="3B49A0"/>
                 </a:solidFill>
                 <a:latin typeface="Verdana"/>
               </a:rPr>
@@ -6031,7 +6031,7 @@
             <a:r>
               <a:rPr sz="1300" b="1" i="0" spc="156">
                 <a:solidFill>
-                  <a:srgbClr val="6B4FBB"/>
+                  <a:srgbClr val="3B49A0"/>
                 </a:solidFill>
                 <a:latin typeface="Verdana"/>
               </a:rPr>
@@ -6580,7 +6580,7 @@
             <a:r>
               <a:rPr sz="1300" b="1" i="0" spc="156">
                 <a:solidFill>
-                  <a:srgbClr val="6B4FBB"/>
+                  <a:srgbClr val="3B49A0"/>
                 </a:solidFill>
                 <a:latin typeface="Verdana"/>
               </a:rPr>
@@ -6730,7 +6730,7 @@
             </a:avLst>
           </a:prstGeom>
           <a:solidFill>
-            <a:srgbClr val="EFEAFA"/>
+            <a:srgbClr val="E8EAFA"/>
           </a:solidFill>
           <a:ln>
             <a:noFill/>
@@ -6787,7 +6787,7 @@
             <a:r>
               <a:rPr sz="1500" b="1" i="0">
                 <a:solidFill>
-                  <a:srgbClr val="6B4FBB"/>
+                  <a:srgbClr val="3B49A0"/>
                 </a:solidFill>
                 <a:latin typeface="Verdana"/>
               </a:rPr>
@@ -6898,7 +6898,7 @@
             </a:avLst>
           </a:prstGeom>
           <a:solidFill>
-            <a:srgbClr val="EFEAFA"/>
+            <a:srgbClr val="E8EAFA"/>
           </a:solidFill>
           <a:ln>
             <a:noFill/>
@@ -6955,7 +6955,7 @@
             <a:r>
               <a:rPr sz="1500" b="1" i="0">
                 <a:solidFill>
-                  <a:srgbClr val="6B4FBB"/>
+                  <a:srgbClr val="3B49A0"/>
                 </a:solidFill>
                 <a:latin typeface="Verdana"/>
               </a:rPr>
@@ -7066,7 +7066,7 @@
             </a:avLst>
           </a:prstGeom>
           <a:solidFill>
-            <a:srgbClr val="EFEAFA"/>
+            <a:srgbClr val="E8EAFA"/>
           </a:solidFill>
           <a:ln>
             <a:noFill/>
@@ -7123,7 +7123,7 @@
             <a:r>
               <a:rPr sz="1500" b="1" i="0">
                 <a:solidFill>
-                  <a:srgbClr val="6B4FBB"/>
+                  <a:srgbClr val="3B49A0"/>
                 </a:solidFill>
                 <a:latin typeface="Verdana"/>
               </a:rPr>
@@ -7234,7 +7234,7 @@
             </a:avLst>
           </a:prstGeom>
           <a:solidFill>
-            <a:srgbClr val="EFEAFA"/>
+            <a:srgbClr val="E8EAFA"/>
           </a:solidFill>
           <a:ln>
             <a:noFill/>
@@ -7291,7 +7291,7 @@
             <a:r>
               <a:rPr sz="1500" b="1" i="0">
                 <a:solidFill>
-                  <a:srgbClr val="6B4FBB"/>
+                  <a:srgbClr val="3B49A0"/>
                 </a:solidFill>
                 <a:latin typeface="Verdana"/>
               </a:rPr>
@@ -7507,7 +7507,7 @@
             <a:r>
               <a:rPr sz="1300" b="1" i="0" spc="156">
                 <a:solidFill>
-                  <a:srgbClr val="6B4FBB"/>
+                  <a:srgbClr val="3B49A0"/>
                 </a:solidFill>
                 <a:latin typeface="Verdana"/>
               </a:rPr>
@@ -7657,7 +7657,7 @@
             </a:avLst>
           </a:prstGeom>
           <a:solidFill>
-            <a:srgbClr val="EFEAFA"/>
+            <a:srgbClr val="E8EAFA"/>
           </a:solidFill>
           <a:ln>
             <a:noFill/>
@@ -7714,7 +7714,7 @@
             <a:r>
               <a:rPr sz="1500" b="1" i="0">
                 <a:solidFill>
-                  <a:srgbClr val="6B4FBB"/>
+                  <a:srgbClr val="3B49A0"/>
                 </a:solidFill>
                 <a:latin typeface="Verdana"/>
               </a:rPr>
@@ -7834,7 +7834,7 @@
             </a:avLst>
           </a:prstGeom>
           <a:solidFill>
-            <a:srgbClr val="EFEAFA"/>
+            <a:srgbClr val="E8EAFA"/>
           </a:solidFill>
           <a:ln>
             <a:noFill/>
@@ -7891,7 +7891,7 @@
             <a:r>
               <a:rPr sz="1500" b="1" i="0">
                 <a:solidFill>
-                  <a:srgbClr val="6B4FBB"/>
+                  <a:srgbClr val="3B49A0"/>
                 </a:solidFill>
                 <a:latin typeface="Verdana"/>
               </a:rPr>
@@ -8011,7 +8011,7 @@
             </a:avLst>
           </a:prstGeom>
           <a:solidFill>
-            <a:srgbClr val="EFEAFA"/>
+            <a:srgbClr val="E8EAFA"/>
           </a:solidFill>
           <a:ln>
             <a:noFill/>
@@ -8068,7 +8068,7 @@
             <a:r>
               <a:rPr sz="1500" b="1" i="0">
                 <a:solidFill>
-                  <a:srgbClr val="6B4FBB"/>
+                  <a:srgbClr val="3B49A0"/>
                 </a:solidFill>
                 <a:latin typeface="Verdana"/>
               </a:rPr>
@@ -8188,7 +8188,7 @@
             </a:avLst>
           </a:prstGeom>
           <a:solidFill>
-            <a:srgbClr val="EFEAFA"/>
+            <a:srgbClr val="E8EAFA"/>
           </a:solidFill>
           <a:ln>
             <a:noFill/>
@@ -8245,7 +8245,7 @@
             <a:r>
               <a:rPr sz="1500" b="1" i="0">
                 <a:solidFill>
-                  <a:srgbClr val="6B4FBB"/>
+                  <a:srgbClr val="3B49A0"/>
                 </a:solidFill>
                 <a:latin typeface="Verdana"/>
               </a:rPr>
@@ -8470,7 +8470,7 @@
             <a:r>
               <a:rPr sz="1300" b="1" i="0" spc="156">
                 <a:solidFill>
-                  <a:srgbClr val="6B4FBB"/>
+                  <a:srgbClr val="3B49A0"/>
                 </a:solidFill>
                 <a:latin typeface="Verdana"/>
               </a:rPr>
@@ -8620,7 +8620,7 @@
             </a:avLst>
           </a:prstGeom>
           <a:solidFill>
-            <a:srgbClr val="EFEAFA"/>
+            <a:srgbClr val="E8EAFA"/>
           </a:solidFill>
           <a:ln>
             <a:noFill/>
@@ -8677,7 +8677,7 @@
             <a:r>
               <a:rPr sz="1500" b="1" i="0">
                 <a:solidFill>
-                  <a:srgbClr val="6B4FBB"/>
+                  <a:srgbClr val="3B49A0"/>
                 </a:solidFill>
                 <a:latin typeface="Verdana"/>
               </a:rPr>
@@ -8788,7 +8788,7 @@
             </a:avLst>
           </a:prstGeom>
           <a:solidFill>
-            <a:srgbClr val="EFEAFA"/>
+            <a:srgbClr val="E8EAFA"/>
           </a:solidFill>
           <a:ln>
             <a:noFill/>
@@ -8845,7 +8845,7 @@
             <a:r>
               <a:rPr sz="1500" b="1" i="0">
                 <a:solidFill>
-                  <a:srgbClr val="6B4FBB"/>
+                  <a:srgbClr val="3B49A0"/>
                 </a:solidFill>
                 <a:latin typeface="Verdana"/>
               </a:rPr>
@@ -8956,7 +8956,7 @@
             </a:avLst>
           </a:prstGeom>
           <a:solidFill>
-            <a:srgbClr val="EFEAFA"/>
+            <a:srgbClr val="E8EAFA"/>
           </a:solidFill>
           <a:ln>
             <a:noFill/>
@@ -9013,7 +9013,7 @@
             <a:r>
               <a:rPr sz="1500" b="1" i="0">
                 <a:solidFill>
-                  <a:srgbClr val="6B4FBB"/>
+                  <a:srgbClr val="3B49A0"/>
                 </a:solidFill>
                 <a:latin typeface="Verdana"/>
               </a:rPr>
@@ -9124,7 +9124,7 @@
             </a:avLst>
           </a:prstGeom>
           <a:solidFill>
-            <a:srgbClr val="EFEAFA"/>
+            <a:srgbClr val="E8EAFA"/>
           </a:solidFill>
           <a:ln>
             <a:noFill/>
@@ -9181,7 +9181,7 @@
             <a:r>
               <a:rPr sz="1500" b="1" i="0">
                 <a:solidFill>
-                  <a:srgbClr val="6B4FBB"/>
+                  <a:srgbClr val="3B49A0"/>
                 </a:solidFill>
                 <a:latin typeface="Verdana"/>
               </a:rPr>
@@ -9397,7 +9397,7 @@
             <a:r>
               <a:rPr sz="1300" b="1" i="0" spc="156">
                 <a:solidFill>
-                  <a:srgbClr val="6B4FBB"/>
+                  <a:srgbClr val="3B49A0"/>
                 </a:solidFill>
                 <a:latin typeface="Verdana"/>
               </a:rPr>
@@ -9547,7 +9547,7 @@
             </a:avLst>
           </a:prstGeom>
           <a:solidFill>
-            <a:srgbClr val="EFEAFA"/>
+            <a:srgbClr val="E8EAFA"/>
           </a:solidFill>
           <a:ln>
             <a:noFill/>
@@ -9604,7 +9604,7 @@
             <a:r>
               <a:rPr sz="1500" b="1" i="0">
                 <a:solidFill>
-                  <a:srgbClr val="6B4FBB"/>
+                  <a:srgbClr val="3B49A0"/>
                 </a:solidFill>
                 <a:latin typeface="Verdana"/>
               </a:rPr>
@@ -9724,7 +9724,7 @@
             </a:avLst>
           </a:prstGeom>
           <a:solidFill>
-            <a:srgbClr val="EFEAFA"/>
+            <a:srgbClr val="E8EAFA"/>
           </a:solidFill>
           <a:ln>
             <a:noFill/>
@@ -9781,7 +9781,7 @@
             <a:r>
               <a:rPr sz="1500" b="1" i="0">
                 <a:solidFill>
-                  <a:srgbClr val="6B4FBB"/>
+                  <a:srgbClr val="3B49A0"/>
                 </a:solidFill>
                 <a:latin typeface="Verdana"/>
               </a:rPr>
@@ -9901,7 +9901,7 @@
             </a:avLst>
           </a:prstGeom>
           <a:solidFill>
-            <a:srgbClr val="EFEAFA"/>
+            <a:srgbClr val="E8EAFA"/>
           </a:solidFill>
           <a:ln>
             <a:noFill/>
@@ -9958,7 +9958,7 @@
             <a:r>
               <a:rPr sz="1500" b="1" i="0">
                 <a:solidFill>
-                  <a:srgbClr val="6B4FBB"/>
+                  <a:srgbClr val="3B49A0"/>
                 </a:solidFill>
                 <a:latin typeface="Verdana"/>
               </a:rPr>
@@ -10078,7 +10078,7 @@
             </a:avLst>
           </a:prstGeom>
           <a:solidFill>
-            <a:srgbClr val="EFEAFA"/>
+            <a:srgbClr val="E8EAFA"/>
           </a:solidFill>
           <a:ln>
             <a:noFill/>
@@ -10135,7 +10135,7 @@
             <a:r>
               <a:rPr sz="1500" b="1" i="0">
                 <a:solidFill>
-                  <a:srgbClr val="6B4FBB"/>
+                  <a:srgbClr val="3B49A0"/>
                 </a:solidFill>
                 <a:latin typeface="Verdana"/>
               </a:rPr>
@@ -10360,7 +10360,7 @@
             <a:r>
               <a:rPr sz="1300" b="1" i="0" spc="156">
                 <a:solidFill>
-                  <a:srgbClr val="6B4FBB"/>
+                  <a:srgbClr val="3B49A0"/>
                 </a:solidFill>
                 <a:latin typeface="Verdana"/>
               </a:rPr>
@@ -10386,7 +10386,7 @@
             </a:avLst>
           </a:prstGeom>
           <a:solidFill>
-            <a:srgbClr val="EFEAFA"/>
+            <a:srgbClr val="E8EAFA"/>
           </a:solidFill>
           <a:ln w="12700">
             <a:solidFill>
@@ -10707,7 +10707,7 @@
             <a:r>
               <a:rPr sz="1300" b="1" i="0" spc="156">
                 <a:solidFill>
-                  <a:srgbClr val="6B4FBB"/>
+                  <a:srgbClr val="3B49A0"/>
                 </a:solidFill>
                 <a:latin typeface="Verdana"/>
               </a:rPr>
@@ -10948,7 +10948,7 @@
             <a:r>
               <a:rPr sz="1800" b="1" i="0">
                 <a:solidFill>
-                  <a:srgbClr val="6B4FBB"/>
+                  <a:srgbClr val="3B49A0"/>
                 </a:solidFill>
                 <a:latin typeface="Verdana"/>
               </a:rPr>
@@ -11107,7 +11107,7 @@
             <a:r>
               <a:rPr sz="1800" b="1" i="0">
                 <a:solidFill>
-                  <a:srgbClr val="6B4FBB"/>
+                  <a:srgbClr val="3B49A0"/>
                 </a:solidFill>
                 <a:latin typeface="Verdana"/>
               </a:rPr>
@@ -11447,7 +11447,7 @@
             <a:r>
               <a:rPr sz="1300" b="1" i="0" spc="156">
                 <a:solidFill>
-                  <a:srgbClr val="6B4FBB"/>
+                  <a:srgbClr val="3B49A0"/>
                 </a:solidFill>
                 <a:latin typeface="Verdana"/>
               </a:rPr>
@@ -11996,7 +11996,7 @@
             <a:r>
               <a:rPr sz="1300" b="1" i="0" spc="156">
                 <a:solidFill>
-                  <a:srgbClr val="6B4FBB"/>
+                  <a:srgbClr val="3B49A0"/>
                 </a:solidFill>
                 <a:latin typeface="Verdana"/>
               </a:rPr>
@@ -12146,7 +12146,7 @@
             </a:avLst>
           </a:prstGeom>
           <a:solidFill>
-            <a:srgbClr val="EFEAFA"/>
+            <a:srgbClr val="E8EAFA"/>
           </a:solidFill>
           <a:ln>
             <a:noFill/>
@@ -12203,7 +12203,7 @@
             <a:r>
               <a:rPr sz="1500" b="1" i="0">
                 <a:solidFill>
-                  <a:srgbClr val="6B4FBB"/>
+                  <a:srgbClr val="3B49A0"/>
                 </a:solidFill>
                 <a:latin typeface="Verdana"/>
               </a:rPr>
@@ -12314,7 +12314,7 @@
             </a:avLst>
           </a:prstGeom>
           <a:solidFill>
-            <a:srgbClr val="EFEAFA"/>
+            <a:srgbClr val="E8EAFA"/>
           </a:solidFill>
           <a:ln>
             <a:noFill/>
@@ -12371,7 +12371,7 @@
             <a:r>
               <a:rPr sz="1500" b="1" i="0">
                 <a:solidFill>
-                  <a:srgbClr val="6B4FBB"/>
+                  <a:srgbClr val="3B49A0"/>
                 </a:solidFill>
                 <a:latin typeface="Verdana"/>
               </a:rPr>
@@ -12482,7 +12482,7 @@
             </a:avLst>
           </a:prstGeom>
           <a:solidFill>
-            <a:srgbClr val="EFEAFA"/>
+            <a:srgbClr val="E8EAFA"/>
           </a:solidFill>
           <a:ln>
             <a:noFill/>
@@ -12539,7 +12539,7 @@
             <a:r>
               <a:rPr sz="1500" b="1" i="0">
                 <a:solidFill>
-                  <a:srgbClr val="6B4FBB"/>
+                  <a:srgbClr val="3B49A0"/>
                 </a:solidFill>
                 <a:latin typeface="Verdana"/>
               </a:rPr>
@@ -12650,7 +12650,7 @@
             </a:avLst>
           </a:prstGeom>
           <a:solidFill>
-            <a:srgbClr val="EFEAFA"/>
+            <a:srgbClr val="E8EAFA"/>
           </a:solidFill>
           <a:ln>
             <a:noFill/>
@@ -12707,7 +12707,7 @@
             <a:r>
               <a:rPr sz="1500" b="1" i="0">
                 <a:solidFill>
-                  <a:srgbClr val="6B4FBB"/>
+                  <a:srgbClr val="3B49A0"/>
                 </a:solidFill>
                 <a:latin typeface="Verdana"/>
               </a:rPr>
@@ -12818,7 +12818,7 @@
             </a:avLst>
           </a:prstGeom>
           <a:solidFill>
-            <a:srgbClr val="EFEAFA"/>
+            <a:srgbClr val="E8EAFA"/>
           </a:solidFill>
           <a:ln>
             <a:noFill/>
@@ -12875,7 +12875,7 @@
             <a:r>
               <a:rPr sz="1500" b="1" i="0">
                 <a:solidFill>
-                  <a:srgbClr val="6B4FBB"/>
+                  <a:srgbClr val="3B49A0"/>
                 </a:solidFill>
                 <a:latin typeface="Verdana"/>
               </a:rPr>
@@ -12986,7 +12986,7 @@
             </a:avLst>
           </a:prstGeom>
           <a:solidFill>
-            <a:srgbClr val="EFEAFA"/>
+            <a:srgbClr val="E8EAFA"/>
           </a:solidFill>
           <a:ln>
             <a:noFill/>
@@ -13043,7 +13043,7 @@
             <a:r>
               <a:rPr sz="1500" b="1" i="0">
                 <a:solidFill>
-                  <a:srgbClr val="6B4FBB"/>
+                  <a:srgbClr val="3B49A0"/>
                 </a:solidFill>
                 <a:latin typeface="Verdana"/>
               </a:rPr>
@@ -13154,7 +13154,7 @@
             </a:avLst>
           </a:prstGeom>
           <a:solidFill>
-            <a:srgbClr val="EFEAFA"/>
+            <a:srgbClr val="E8EAFA"/>
           </a:solidFill>
           <a:ln>
             <a:noFill/>
@@ -13211,7 +13211,7 @@
             <a:r>
               <a:rPr sz="1500" b="1" i="0">
                 <a:solidFill>
-                  <a:srgbClr val="6B4FBB"/>
+                  <a:srgbClr val="3B49A0"/>
                 </a:solidFill>
                 <a:latin typeface="Verdana"/>
               </a:rPr>
@@ -13322,7 +13322,7 @@
             </a:avLst>
           </a:prstGeom>
           <a:solidFill>
-            <a:srgbClr val="EFEAFA"/>
+            <a:srgbClr val="E8EAFA"/>
           </a:solidFill>
           <a:ln>
             <a:noFill/>
@@ -13379,7 +13379,7 @@
             <a:r>
               <a:rPr sz="1500" b="1" i="0">
                 <a:solidFill>
-                  <a:srgbClr val="6B4FBB"/>
+                  <a:srgbClr val="3B49A0"/>
                 </a:solidFill>
                 <a:latin typeface="Verdana"/>
               </a:rPr>
@@ -13595,7 +13595,7 @@
             <a:r>
               <a:rPr sz="1300" b="1" i="0" spc="156">
                 <a:solidFill>
-                  <a:srgbClr val="6B4FBB"/>
+                  <a:srgbClr val="3B49A0"/>
                 </a:solidFill>
                 <a:latin typeface="Verdana"/>
               </a:rPr>
@@ -13706,7 +13706,7 @@
             </a:avLst>
           </a:prstGeom>
           <a:solidFill>
-            <a:srgbClr val="EFEAFA"/>
+            <a:srgbClr val="E8EAFA"/>
           </a:solidFill>
           <a:ln>
             <a:noFill/>
@@ -13763,7 +13763,7 @@
             <a:r>
               <a:rPr sz="1500" b="1" i="0">
                 <a:solidFill>
-                  <a:srgbClr val="6B4FBB"/>
+                  <a:srgbClr val="3B49A0"/>
                 </a:solidFill>
                 <a:latin typeface="Verdana"/>
               </a:rPr>
@@ -13874,7 +13874,7 @@
             </a:avLst>
           </a:prstGeom>
           <a:solidFill>
-            <a:srgbClr val="EFEAFA"/>
+            <a:srgbClr val="E8EAFA"/>
           </a:solidFill>
           <a:ln>
             <a:noFill/>
@@ -13931,7 +13931,7 @@
             <a:r>
               <a:rPr sz="1500" b="1" i="0">
                 <a:solidFill>
-                  <a:srgbClr val="6B4FBB"/>
+                  <a:srgbClr val="3B49A0"/>
                 </a:solidFill>
                 <a:latin typeface="Verdana"/>
               </a:rPr>
@@ -14042,7 +14042,7 @@
             </a:avLst>
           </a:prstGeom>
           <a:solidFill>
-            <a:srgbClr val="EFEAFA"/>
+            <a:srgbClr val="E8EAFA"/>
           </a:solidFill>
           <a:ln>
             <a:noFill/>
@@ -14099,7 +14099,7 @@
             <a:r>
               <a:rPr sz="1500" b="1" i="0">
                 <a:solidFill>
-                  <a:srgbClr val="6B4FBB"/>
+                  <a:srgbClr val="3B49A0"/>
                 </a:solidFill>
                 <a:latin typeface="Verdana"/>
               </a:rPr>
@@ -14210,7 +14210,7 @@
             </a:avLst>
           </a:prstGeom>
           <a:solidFill>
-            <a:srgbClr val="EFEAFA"/>
+            <a:srgbClr val="E8EAFA"/>
           </a:solidFill>
           <a:ln>
             <a:noFill/>
@@ -14267,7 +14267,7 @@
             <a:r>
               <a:rPr sz="1500" b="1" i="0">
                 <a:solidFill>
-                  <a:srgbClr val="6B4FBB"/>
+                  <a:srgbClr val="3B49A0"/>
                 </a:solidFill>
                 <a:latin typeface="Verdana"/>
               </a:rPr>
@@ -14378,7 +14378,7 @@
             </a:avLst>
           </a:prstGeom>
           <a:solidFill>
-            <a:srgbClr val="EFEAFA"/>
+            <a:srgbClr val="E8EAFA"/>
           </a:solidFill>
           <a:ln>
             <a:noFill/>
@@ -14435,7 +14435,7 @@
             <a:r>
               <a:rPr sz="1500" b="1" i="0">
                 <a:solidFill>
-                  <a:srgbClr val="6B4FBB"/>
+                  <a:srgbClr val="3B49A0"/>
                 </a:solidFill>
                 <a:latin typeface="Verdana"/>
               </a:rPr>
@@ -14651,7 +14651,7 @@
             <a:r>
               <a:rPr sz="1300" b="1" i="0" spc="156">
                 <a:solidFill>
-                  <a:srgbClr val="6B4FBB"/>
+                  <a:srgbClr val="3B49A0"/>
                 </a:solidFill>
                 <a:latin typeface="Verdana"/>
               </a:rPr>
@@ -14801,7 +14801,7 @@
             </a:avLst>
           </a:prstGeom>
           <a:solidFill>
-            <a:srgbClr val="EFEAFA"/>
+            <a:srgbClr val="E8EAFA"/>
           </a:solidFill>
           <a:ln>
             <a:noFill/>
@@ -14858,7 +14858,7 @@
             <a:r>
               <a:rPr sz="1500" b="1" i="0">
                 <a:solidFill>
-                  <a:srgbClr val="6B4FBB"/>
+                  <a:srgbClr val="3B49A0"/>
                 </a:solidFill>
                 <a:latin typeface="Verdana"/>
               </a:rPr>
@@ -14978,7 +14978,7 @@
             </a:avLst>
           </a:prstGeom>
           <a:solidFill>
-            <a:srgbClr val="EFEAFA"/>
+            <a:srgbClr val="E8EAFA"/>
           </a:solidFill>
           <a:ln>
             <a:noFill/>
@@ -15035,7 +15035,7 @@
             <a:r>
               <a:rPr sz="1500" b="1" i="0">
                 <a:solidFill>
-                  <a:srgbClr val="6B4FBB"/>
+                  <a:srgbClr val="3B49A0"/>
                 </a:solidFill>
                 <a:latin typeface="Verdana"/>
               </a:rPr>
@@ -15155,7 +15155,7 @@
             </a:avLst>
           </a:prstGeom>
           <a:solidFill>
-            <a:srgbClr val="EFEAFA"/>
+            <a:srgbClr val="E8EAFA"/>
           </a:solidFill>
           <a:ln>
             <a:noFill/>
@@ -15212,7 +15212,7 @@
             <a:r>
               <a:rPr sz="1500" b="1" i="0">
                 <a:solidFill>
-                  <a:srgbClr val="6B4FBB"/>
+                  <a:srgbClr val="3B49A0"/>
                 </a:solidFill>
                 <a:latin typeface="Verdana"/>
               </a:rPr>
@@ -15332,7 +15332,7 @@
             </a:avLst>
           </a:prstGeom>
           <a:solidFill>
-            <a:srgbClr val="EFEAFA"/>
+            <a:srgbClr val="E8EAFA"/>
           </a:solidFill>
           <a:ln>
             <a:noFill/>
@@ -15389,7 +15389,7 @@
             <a:r>
               <a:rPr sz="1500" b="1" i="0">
                 <a:solidFill>
-                  <a:srgbClr val="6B4FBB"/>
+                  <a:srgbClr val="3B49A0"/>
                 </a:solidFill>
                 <a:latin typeface="Verdana"/>
               </a:rPr>
@@ -15509,7 +15509,7 @@
             </a:avLst>
           </a:prstGeom>
           <a:solidFill>
-            <a:srgbClr val="EFEAFA"/>
+            <a:srgbClr val="E8EAFA"/>
           </a:solidFill>
           <a:ln>
             <a:noFill/>
@@ -15566,7 +15566,7 @@
             <a:r>
               <a:rPr sz="1500" b="1" i="0">
                 <a:solidFill>
-                  <a:srgbClr val="6B4FBB"/>
+                  <a:srgbClr val="3B49A0"/>
                 </a:solidFill>
                 <a:latin typeface="Verdana"/>
               </a:rPr>
@@ -15686,7 +15686,7 @@
             </a:avLst>
           </a:prstGeom>
           <a:solidFill>
-            <a:srgbClr val="EFEAFA"/>
+            <a:srgbClr val="E8EAFA"/>
           </a:solidFill>
           <a:ln>
             <a:noFill/>
@@ -15743,7 +15743,7 @@
             <a:r>
               <a:rPr sz="1500" b="1" i="0">
                 <a:solidFill>
-                  <a:srgbClr val="6B4FBB"/>
+                  <a:srgbClr val="3B49A0"/>
                 </a:solidFill>
                 <a:latin typeface="Verdana"/>
               </a:rPr>
@@ -15863,7 +15863,7 @@
             </a:avLst>
           </a:prstGeom>
           <a:solidFill>
-            <a:srgbClr val="EFEAFA"/>
+            <a:srgbClr val="E8EAFA"/>
           </a:solidFill>
           <a:ln>
             <a:noFill/>
@@ -15920,7 +15920,7 @@
             <a:r>
               <a:rPr sz="1500" b="1" i="0">
                 <a:solidFill>
-                  <a:srgbClr val="6B4FBB"/>
+                  <a:srgbClr val="3B49A0"/>
                 </a:solidFill>
                 <a:latin typeface="Verdana"/>
               </a:rPr>
@@ -16040,7 +16040,7 @@
             </a:avLst>
           </a:prstGeom>
           <a:solidFill>
-            <a:srgbClr val="EFEAFA"/>
+            <a:srgbClr val="E8EAFA"/>
           </a:solidFill>
           <a:ln>
             <a:noFill/>
@@ -16097,7 +16097,7 @@
             <a:r>
               <a:rPr sz="1500" b="1" i="0">
                 <a:solidFill>
-                  <a:srgbClr val="6B4FBB"/>
+                  <a:srgbClr val="3B49A0"/>
                 </a:solidFill>
                 <a:latin typeface="Verdana"/>
               </a:rPr>
@@ -16322,7 +16322,7 @@
             <a:r>
               <a:rPr sz="1300" b="1" i="0" spc="156">
                 <a:solidFill>
-                  <a:srgbClr val="6B4FBB"/>
+                  <a:srgbClr val="3B49A0"/>
                 </a:solidFill>
                 <a:latin typeface="Verdana"/>
               </a:rPr>
@@ -16472,7 +16472,7 @@
             </a:avLst>
           </a:prstGeom>
           <a:solidFill>
-            <a:srgbClr val="EFEAFA"/>
+            <a:srgbClr val="E8EAFA"/>
           </a:solidFill>
           <a:ln>
             <a:noFill/>
@@ -16529,7 +16529,7 @@
             <a:r>
               <a:rPr sz="1500" b="1" i="0">
                 <a:solidFill>
-                  <a:srgbClr val="6B4FBB"/>
+                  <a:srgbClr val="3B49A0"/>
                 </a:solidFill>
                 <a:latin typeface="Verdana"/>
               </a:rPr>
@@ -16640,7 +16640,7 @@
             </a:avLst>
           </a:prstGeom>
           <a:solidFill>
-            <a:srgbClr val="EFEAFA"/>
+            <a:srgbClr val="E8EAFA"/>
           </a:solidFill>
           <a:ln>
             <a:noFill/>
@@ -16697,7 +16697,7 @@
             <a:r>
               <a:rPr sz="1500" b="1" i="0">
                 <a:solidFill>
-                  <a:srgbClr val="6B4FBB"/>
+                  <a:srgbClr val="3B49A0"/>
                 </a:solidFill>
                 <a:latin typeface="Verdana"/>
               </a:rPr>
@@ -16808,7 +16808,7 @@
             </a:avLst>
           </a:prstGeom>
           <a:solidFill>
-            <a:srgbClr val="EFEAFA"/>
+            <a:srgbClr val="E8EAFA"/>
           </a:solidFill>
           <a:ln>
             <a:noFill/>
@@ -16865,7 +16865,7 @@
             <a:r>
               <a:rPr sz="1500" b="1" i="0">
                 <a:solidFill>
-                  <a:srgbClr val="6B4FBB"/>
+                  <a:srgbClr val="3B49A0"/>
                 </a:solidFill>
                 <a:latin typeface="Verdana"/>
               </a:rPr>
@@ -17081,7 +17081,7 @@
             <a:r>
               <a:rPr sz="1300" b="1" i="0" spc="156">
                 <a:solidFill>
-                  <a:srgbClr val="6B4FBB"/>
+                  <a:srgbClr val="3B49A0"/>
                 </a:solidFill>
                 <a:latin typeface="Verdana"/>
               </a:rPr>
@@ -17231,7 +17231,7 @@
             </a:avLst>
           </a:prstGeom>
           <a:solidFill>
-            <a:srgbClr val="EFEAFA"/>
+            <a:srgbClr val="E8EAFA"/>
           </a:solidFill>
           <a:ln>
             <a:noFill/>
@@ -17288,7 +17288,7 @@
             <a:r>
               <a:rPr sz="1500" b="1" i="0">
                 <a:solidFill>
-                  <a:srgbClr val="6B4FBB"/>
+                  <a:srgbClr val="3B49A0"/>
                 </a:solidFill>
                 <a:latin typeface="Verdana"/>
               </a:rPr>
@@ -17408,7 +17408,7 @@
             </a:avLst>
           </a:prstGeom>
           <a:solidFill>
-            <a:srgbClr val="EFEAFA"/>
+            <a:srgbClr val="E8EAFA"/>
           </a:solidFill>
           <a:ln>
             <a:noFill/>
@@ -17465,7 +17465,7 @@
             <a:r>
               <a:rPr sz="1500" b="1" i="0">
                 <a:solidFill>
-                  <a:srgbClr val="6B4FBB"/>
+                  <a:srgbClr val="3B49A0"/>
                 </a:solidFill>
                 <a:latin typeface="Verdana"/>
               </a:rPr>
@@ -17585,7 +17585,7 @@
             </a:avLst>
           </a:prstGeom>
           <a:solidFill>
-            <a:srgbClr val="EFEAFA"/>
+            <a:srgbClr val="E8EAFA"/>
           </a:solidFill>
           <a:ln>
             <a:noFill/>
@@ -17642,7 +17642,7 @@
             <a:r>
               <a:rPr sz="1500" b="1" i="0">
                 <a:solidFill>
-                  <a:srgbClr val="6B4FBB"/>
+                  <a:srgbClr val="3B49A0"/>
                 </a:solidFill>
                 <a:latin typeface="Verdana"/>
               </a:rPr>
@@ -18330,7 +18330,7 @@
             <a:r>
               <a:rPr sz="1300" b="1" i="0" spc="156">
                 <a:solidFill>
-                  <a:srgbClr val="6B4FBB"/>
+                  <a:srgbClr val="3B49A0"/>
                 </a:solidFill>
                 <a:latin typeface="Verdana"/>
               </a:rPr>
@@ -18356,7 +18356,7 @@
             </a:avLst>
           </a:prstGeom>
           <a:solidFill>
-            <a:srgbClr val="EFEAFA"/>
+            <a:srgbClr val="E8EAFA"/>
           </a:solidFill>
           <a:ln w="12700">
             <a:solidFill>
@@ -18677,7 +18677,7 @@
             <a:r>
               <a:rPr sz="1300" b="1" i="0" spc="156">
                 <a:solidFill>
-                  <a:srgbClr val="6B4FBB"/>
+                  <a:srgbClr val="3B49A0"/>
                 </a:solidFill>
                 <a:latin typeface="Verdana"/>
               </a:rPr>
@@ -18879,7 +18879,7 @@
             <a:r>
               <a:rPr sz="1700" b="1" i="0">
                 <a:solidFill>
-                  <a:srgbClr val="6B4FBB"/>
+                  <a:srgbClr val="3B49A0"/>
                 </a:solidFill>
                 <a:latin typeface="Verdana"/>
               </a:rPr>
@@ -18999,7 +18999,7 @@
             <a:r>
               <a:rPr sz="1700" b="1" i="0">
                 <a:solidFill>
-                  <a:srgbClr val="6B4FBB"/>
+                  <a:srgbClr val="3B49A0"/>
                 </a:solidFill>
                 <a:latin typeface="Verdana"/>
               </a:rPr>
@@ -19119,7 +19119,7 @@
             <a:r>
               <a:rPr sz="1700" b="1" i="0">
                 <a:solidFill>
-                  <a:srgbClr val="6B4FBB"/>
+                  <a:srgbClr val="3B49A0"/>
                 </a:solidFill>
                 <a:latin typeface="Verdana"/>
               </a:rPr>
@@ -19239,7 +19239,7 @@
             <a:r>
               <a:rPr sz="1700" b="1" i="0">
                 <a:solidFill>
-                  <a:srgbClr val="6B4FBB"/>
+                  <a:srgbClr val="3B49A0"/>
                 </a:solidFill>
                 <a:latin typeface="Verdana"/>
               </a:rPr>
@@ -19359,7 +19359,7 @@
             <a:r>
               <a:rPr sz="1700" b="1" i="0">
                 <a:solidFill>
-                  <a:srgbClr val="6B4FBB"/>
+                  <a:srgbClr val="3B49A0"/>
                 </a:solidFill>
                 <a:latin typeface="Verdana"/>
               </a:rPr>
@@ -19660,7 +19660,7 @@
             <a:r>
               <a:rPr sz="1300" b="1" i="0" spc="156">
                 <a:solidFill>
-                  <a:srgbClr val="6B4FBB"/>
+                  <a:srgbClr val="3B49A0"/>
                 </a:solidFill>
                 <a:latin typeface="Verdana"/>
               </a:rPr>
@@ -19784,7 +19784,7 @@
             <a:r>
               <a:rPr sz="2100" b="1" i="0">
                 <a:solidFill>
-                  <a:srgbClr val="6B4FBB"/>
+                  <a:srgbClr val="3B49A0"/>
                 </a:solidFill>
                 <a:latin typeface="Verdana"/>
               </a:rPr>
@@ -19908,7 +19908,7 @@
             <a:r>
               <a:rPr sz="2100" b="1" i="0">
                 <a:solidFill>
-                  <a:srgbClr val="6B4FBB"/>
+                  <a:srgbClr val="3B49A0"/>
                 </a:solidFill>
                 <a:latin typeface="Verdana"/>
               </a:rPr>
@@ -20032,7 +20032,7 @@
             <a:r>
               <a:rPr sz="2100" b="1" i="0">
                 <a:solidFill>
-                  <a:srgbClr val="6B4FBB"/>
+                  <a:srgbClr val="3B49A0"/>
                 </a:solidFill>
                 <a:latin typeface="Verdana"/>
               </a:rPr>
@@ -20156,7 +20156,7 @@
             <a:r>
               <a:rPr sz="2100" b="1" i="0">
                 <a:solidFill>
-                  <a:srgbClr val="6B4FBB"/>
+                  <a:srgbClr val="3B49A0"/>
                 </a:solidFill>
                 <a:latin typeface="Verdana"/>
               </a:rPr>
@@ -20372,7 +20372,7 @@
             <a:r>
               <a:rPr sz="1300" b="1" i="0" spc="156">
                 <a:solidFill>
-                  <a:srgbClr val="6B4FBB"/>
+                  <a:srgbClr val="3B49A0"/>
                 </a:solidFill>
                 <a:latin typeface="Verdana"/>
               </a:rPr>
@@ -20522,7 +20522,7 @@
             </a:avLst>
           </a:prstGeom>
           <a:solidFill>
-            <a:srgbClr val="EFEAFA"/>
+            <a:srgbClr val="E8EAFA"/>
           </a:solidFill>
           <a:ln>
             <a:noFill/>
@@ -20579,7 +20579,7 @@
             <a:r>
               <a:rPr sz="1500" b="1" i="0">
                 <a:solidFill>
-                  <a:srgbClr val="6B4FBB"/>
+                  <a:srgbClr val="3B49A0"/>
                 </a:solidFill>
                 <a:latin typeface="Verdana"/>
               </a:rPr>
@@ -20690,7 +20690,7 @@
             </a:avLst>
           </a:prstGeom>
           <a:solidFill>
-            <a:srgbClr val="EFEAFA"/>
+            <a:srgbClr val="E8EAFA"/>
           </a:solidFill>
           <a:ln>
             <a:noFill/>
@@ -20747,7 +20747,7 @@
             <a:r>
               <a:rPr sz="1500" b="1" i="0">
                 <a:solidFill>
-                  <a:srgbClr val="6B4FBB"/>
+                  <a:srgbClr val="3B49A0"/>
                 </a:solidFill>
                 <a:latin typeface="Verdana"/>
               </a:rPr>
@@ -20858,7 +20858,7 @@
             </a:avLst>
           </a:prstGeom>
           <a:solidFill>
-            <a:srgbClr val="EFEAFA"/>
+            <a:srgbClr val="E8EAFA"/>
           </a:solidFill>
           <a:ln>
             <a:noFill/>
@@ -20915,7 +20915,7 @@
             <a:r>
               <a:rPr sz="1500" b="1" i="0">
                 <a:solidFill>
-                  <a:srgbClr val="6B4FBB"/>
+                  <a:srgbClr val="3B49A0"/>
                 </a:solidFill>
                 <a:latin typeface="Verdana"/>
               </a:rPr>
@@ -21026,7 +21026,7 @@
             </a:avLst>
           </a:prstGeom>
           <a:solidFill>
-            <a:srgbClr val="EFEAFA"/>
+            <a:srgbClr val="E8EAFA"/>
           </a:solidFill>
           <a:ln>
             <a:noFill/>
@@ -21083,7 +21083,7 @@
             <a:r>
               <a:rPr sz="1500" b="1" i="0">
                 <a:solidFill>
-                  <a:srgbClr val="6B4FBB"/>
+                  <a:srgbClr val="3B49A0"/>
                 </a:solidFill>
                 <a:latin typeface="Verdana"/>
               </a:rPr>
@@ -21194,7 +21194,7 @@
             </a:avLst>
           </a:prstGeom>
           <a:solidFill>
-            <a:srgbClr val="EFEAFA"/>
+            <a:srgbClr val="E8EAFA"/>
           </a:solidFill>
           <a:ln>
             <a:noFill/>
@@ -21251,7 +21251,7 @@
             <a:r>
               <a:rPr sz="1500" b="1" i="0">
                 <a:solidFill>
-                  <a:srgbClr val="6B4FBB"/>
+                  <a:srgbClr val="3B49A0"/>
                 </a:solidFill>
                 <a:latin typeface="Verdana"/>
               </a:rPr>
@@ -21362,7 +21362,7 @@
             </a:avLst>
           </a:prstGeom>
           <a:solidFill>
-            <a:srgbClr val="EFEAFA"/>
+            <a:srgbClr val="E8EAFA"/>
           </a:solidFill>
           <a:ln>
             <a:noFill/>
@@ -21419,7 +21419,7 @@
             <a:r>
               <a:rPr sz="1500" b="1" i="0">
                 <a:solidFill>
-                  <a:srgbClr val="6B4FBB"/>
+                  <a:srgbClr val="3B49A0"/>
                 </a:solidFill>
                 <a:latin typeface="Verdana"/>
               </a:rPr>
@@ -21635,7 +21635,7 @@
             <a:r>
               <a:rPr sz="1300" b="1" i="0" spc="156">
                 <a:solidFill>
-                  <a:srgbClr val="6B4FBB"/>
+                  <a:srgbClr val="3B49A0"/>
                 </a:solidFill>
                 <a:latin typeface="Verdana"/>
               </a:rPr>
@@ -21785,7 +21785,7 @@
             </a:avLst>
           </a:prstGeom>
           <a:solidFill>
-            <a:srgbClr val="EFEAFA"/>
+            <a:srgbClr val="E8EAFA"/>
           </a:solidFill>
           <a:ln>
             <a:noFill/>
@@ -21842,7 +21842,7 @@
             <a:r>
               <a:rPr sz="1500" b="1" i="0">
                 <a:solidFill>
-                  <a:srgbClr val="6B4FBB"/>
+                  <a:srgbClr val="3B49A0"/>
                 </a:solidFill>
                 <a:latin typeface="Verdana"/>
               </a:rPr>
@@ -21962,7 +21962,7 @@
             </a:avLst>
           </a:prstGeom>
           <a:solidFill>
-            <a:srgbClr val="EFEAFA"/>
+            <a:srgbClr val="E8EAFA"/>
           </a:solidFill>
           <a:ln>
             <a:noFill/>
@@ -22019,7 +22019,7 @@
             <a:r>
               <a:rPr sz="1500" b="1" i="0">
                 <a:solidFill>
-                  <a:srgbClr val="6B4FBB"/>
+                  <a:srgbClr val="3B49A0"/>
                 </a:solidFill>
                 <a:latin typeface="Verdana"/>
               </a:rPr>
@@ -22139,7 +22139,7 @@
             </a:avLst>
           </a:prstGeom>
           <a:solidFill>
-            <a:srgbClr val="EFEAFA"/>
+            <a:srgbClr val="E8EAFA"/>
           </a:solidFill>
           <a:ln>
             <a:noFill/>
@@ -22196,7 +22196,7 @@
             <a:r>
               <a:rPr sz="1500" b="1" i="0">
                 <a:solidFill>
-                  <a:srgbClr val="6B4FBB"/>
+                  <a:srgbClr val="3B49A0"/>
                 </a:solidFill>
                 <a:latin typeface="Verdana"/>
               </a:rPr>
@@ -22316,7 +22316,7 @@
             </a:avLst>
           </a:prstGeom>
           <a:solidFill>
-            <a:srgbClr val="EFEAFA"/>
+            <a:srgbClr val="E8EAFA"/>
           </a:solidFill>
           <a:ln>
             <a:noFill/>
@@ -22373,7 +22373,7 @@
             <a:r>
               <a:rPr sz="1500" b="1" i="0">
                 <a:solidFill>
-                  <a:srgbClr val="6B4FBB"/>
+                  <a:srgbClr val="3B49A0"/>
                 </a:solidFill>
                 <a:latin typeface="Verdana"/>
               </a:rPr>
@@ -22493,7 +22493,7 @@
             </a:avLst>
           </a:prstGeom>
           <a:solidFill>
-            <a:srgbClr val="EFEAFA"/>
+            <a:srgbClr val="E8EAFA"/>
           </a:solidFill>
           <a:ln>
             <a:noFill/>
@@ -22550,7 +22550,7 @@
             <a:r>
               <a:rPr sz="1500" b="1" i="0">
                 <a:solidFill>
-                  <a:srgbClr val="6B4FBB"/>
+                  <a:srgbClr val="3B49A0"/>
                 </a:solidFill>
                 <a:latin typeface="Verdana"/>
               </a:rPr>
@@ -22670,7 +22670,7 @@
             </a:avLst>
           </a:prstGeom>
           <a:solidFill>
-            <a:srgbClr val="EFEAFA"/>
+            <a:srgbClr val="E8EAFA"/>
           </a:solidFill>
           <a:ln>
             <a:noFill/>
@@ -22727,7 +22727,7 @@
             <a:r>
               <a:rPr sz="1500" b="1" i="0">
                 <a:solidFill>
-                  <a:srgbClr val="6B4FBB"/>
+                  <a:srgbClr val="3B49A0"/>
                 </a:solidFill>
                 <a:latin typeface="Verdana"/>
               </a:rPr>
@@ -22952,7 +22952,7 @@
             <a:r>
               <a:rPr sz="1300" b="1" i="0" spc="156">
                 <a:solidFill>
-                  <a:srgbClr val="6B4FBB"/>
+                  <a:srgbClr val="3B49A0"/>
                 </a:solidFill>
                 <a:latin typeface="Verdana"/>
               </a:rPr>
@@ -23102,7 +23102,7 @@
             </a:avLst>
           </a:prstGeom>
           <a:solidFill>
-            <a:srgbClr val="EFEAFA"/>
+            <a:srgbClr val="E8EAFA"/>
           </a:solidFill>
           <a:ln>
             <a:noFill/>
@@ -23159,7 +23159,7 @@
             <a:r>
               <a:rPr sz="1500" b="1" i="0">
                 <a:solidFill>
-                  <a:srgbClr val="6B4FBB"/>
+                  <a:srgbClr val="3B49A0"/>
                 </a:solidFill>
                 <a:latin typeface="Verdana"/>
               </a:rPr>
@@ -23270,7 +23270,7 @@
             </a:avLst>
           </a:prstGeom>
           <a:solidFill>
-            <a:srgbClr val="EFEAFA"/>
+            <a:srgbClr val="E8EAFA"/>
           </a:solidFill>
           <a:ln>
             <a:noFill/>
@@ -23327,7 +23327,7 @@
             <a:r>
               <a:rPr sz="1500" b="1" i="0">
                 <a:solidFill>
-                  <a:srgbClr val="6B4FBB"/>
+                  <a:srgbClr val="3B49A0"/>
                 </a:solidFill>
                 <a:latin typeface="Verdana"/>
               </a:rPr>
@@ -23438,7 +23438,7 @@
             </a:avLst>
           </a:prstGeom>
           <a:solidFill>
-            <a:srgbClr val="EFEAFA"/>
+            <a:srgbClr val="E8EAFA"/>
           </a:solidFill>
           <a:ln>
             <a:noFill/>
@@ -23495,7 +23495,7 @@
             <a:r>
               <a:rPr sz="1500" b="1" i="0">
                 <a:solidFill>
-                  <a:srgbClr val="6B4FBB"/>
+                  <a:srgbClr val="3B49A0"/>
                 </a:solidFill>
                 <a:latin typeface="Verdana"/>
               </a:rPr>
@@ -23606,7 +23606,7 @@
             </a:avLst>
           </a:prstGeom>
           <a:solidFill>
-            <a:srgbClr val="EFEAFA"/>
+            <a:srgbClr val="E8EAFA"/>
           </a:solidFill>
           <a:ln>
             <a:noFill/>
@@ -23663,7 +23663,7 @@
             <a:r>
               <a:rPr sz="1500" b="1" i="0">
                 <a:solidFill>
-                  <a:srgbClr val="6B4FBB"/>
+                  <a:srgbClr val="3B49A0"/>
                 </a:solidFill>
                 <a:latin typeface="Verdana"/>
               </a:rPr>
@@ -23774,7 +23774,7 @@
             </a:avLst>
           </a:prstGeom>
           <a:solidFill>
-            <a:srgbClr val="EFEAFA"/>
+            <a:srgbClr val="E8EAFA"/>
           </a:solidFill>
           <a:ln>
             <a:noFill/>
@@ -23831,7 +23831,7 @@
             <a:r>
               <a:rPr sz="1500" b="1" i="0">
                 <a:solidFill>
-                  <a:srgbClr val="6B4FBB"/>
+                  <a:srgbClr val="3B49A0"/>
                 </a:solidFill>
                 <a:latin typeface="Verdana"/>
               </a:rPr>
@@ -24047,7 +24047,7 @@
             <a:r>
               <a:rPr sz="1300" b="1" i="0" spc="156">
                 <a:solidFill>
-                  <a:srgbClr val="6B4FBB"/>
+                  <a:srgbClr val="3B49A0"/>
                 </a:solidFill>
                 <a:latin typeface="Verdana"/>
               </a:rPr>
@@ -24197,7 +24197,7 @@
             </a:avLst>
           </a:prstGeom>
           <a:solidFill>
-            <a:srgbClr val="EFEAFA"/>
+            <a:srgbClr val="E8EAFA"/>
           </a:solidFill>
           <a:ln>
             <a:noFill/>
@@ -24254,7 +24254,7 @@
             <a:r>
               <a:rPr sz="1500" b="1" i="0">
                 <a:solidFill>
-                  <a:srgbClr val="6B4FBB"/>
+                  <a:srgbClr val="3B49A0"/>
                 </a:solidFill>
                 <a:latin typeface="Verdana"/>
               </a:rPr>
@@ -24374,7 +24374,7 @@
             </a:avLst>
           </a:prstGeom>
           <a:solidFill>
-            <a:srgbClr val="EFEAFA"/>
+            <a:srgbClr val="E8EAFA"/>
           </a:solidFill>
           <a:ln>
             <a:noFill/>
@@ -24431,7 +24431,7 @@
             <a:r>
               <a:rPr sz="1500" b="1" i="0">
                 <a:solidFill>
-                  <a:srgbClr val="6B4FBB"/>
+                  <a:srgbClr val="3B49A0"/>
                 </a:solidFill>
                 <a:latin typeface="Verdana"/>
               </a:rPr>
@@ -24551,7 +24551,7 @@
             </a:avLst>
           </a:prstGeom>
           <a:solidFill>
-            <a:srgbClr val="EFEAFA"/>
+            <a:srgbClr val="E8EAFA"/>
           </a:solidFill>
           <a:ln>
             <a:noFill/>
@@ -24608,7 +24608,7 @@
             <a:r>
               <a:rPr sz="1500" b="1" i="0">
                 <a:solidFill>
-                  <a:srgbClr val="6B4FBB"/>
+                  <a:srgbClr val="3B49A0"/>
                 </a:solidFill>
                 <a:latin typeface="Verdana"/>
               </a:rPr>
@@ -24728,7 +24728,7 @@
             </a:avLst>
           </a:prstGeom>
           <a:solidFill>
-            <a:srgbClr val="EFEAFA"/>
+            <a:srgbClr val="E8EAFA"/>
           </a:solidFill>
           <a:ln>
             <a:noFill/>
@@ -24785,7 +24785,7 @@
             <a:r>
               <a:rPr sz="1500" b="1" i="0">
                 <a:solidFill>
-                  <a:srgbClr val="6B4FBB"/>
+                  <a:srgbClr val="3B49A0"/>
                 </a:solidFill>
                 <a:latin typeface="Verdana"/>
               </a:rPr>
@@ -24905,7 +24905,7 @@
             </a:avLst>
           </a:prstGeom>
           <a:solidFill>
-            <a:srgbClr val="EFEAFA"/>
+            <a:srgbClr val="E8EAFA"/>
           </a:solidFill>
           <a:ln>
             <a:noFill/>
@@ -24962,7 +24962,7 @@
             <a:r>
               <a:rPr sz="1500" b="1" i="0">
                 <a:solidFill>
-                  <a:srgbClr val="6B4FBB"/>
+                  <a:srgbClr val="3B49A0"/>
                 </a:solidFill>
                 <a:latin typeface="Verdana"/>
               </a:rPr>
